--- a/decks/02-wattwise.pptx
+++ b/decks/02-wattwise.pptx
@@ -117,36 +117,36 @@
   <p:extLst>
     <p:ext uri="{521415D9-36F7-43E2-AB2F-B90AF26B5E84}">
       <p14:sectionLst xmlns:p14="http://schemas.microsoft.com/office/powerpoint/2010/main">
-        <p14:section name="Introduction" id="{f519a099-4c45-dd25-47ac-cf8379f88d64}">
+        <p14:section name="Introduction" id="{8217c22a-0243-0008-2765-c8cdca7c24d8}">
           <p14:sldIdLst>
             <p14:sldId id="256"/>
           </p14:sldIdLst>
         </p14:section>
-        <p14:section name="Problem &amp; solution" id="{4ecf2466-f59c-c913-2291-843598e7a1c3}">
+        <p14:section name="Problem &amp; solution" id="{e735f4c8-d39f-fe44-7fc4-534d04c2ad58}">
           <p14:sldIdLst>
             <p14:sldId id="257"/>
             <p14:sldId id="258"/>
           </p14:sldIdLst>
         </p14:section>
-        <p14:section name="Product" id="{93dcc921-935f-1598-cf68-8148caea550d}">
+        <p14:section name="Product" id="{b7d61f01-2487-adb8-1604-c43811e3c9fb}">
           <p14:sldIdLst>
             <p14:sldId id="259"/>
             <p14:sldId id="260"/>
             <p14:sldId id="261"/>
           </p14:sldIdLst>
         </p14:section>
-        <p14:section name="Why us" id="{e060e192-bf9c-df62-461d-5e8e90999abb}">
+        <p14:section name="Why us" id="{b176d93a-7e5d-dbb5-eb08-b6069e885993}">
           <p14:sldIdLst>
             <p14:sldId id="262"/>
             <p14:sldId id="263"/>
           </p14:sldIdLst>
         </p14:section>
-        <p14:section name="Demo" id="{f52ed5c8-f0a2-0a5c-26ea-60c1c80a5831}">
+        <p14:section name="Demo" id="{f71e2b51-ca24-b0ff-c2fe-d3a2ca0a7425}">
           <p14:sldIdLst>
             <p14:sldId id="264"/>
           </p14:sldIdLst>
         </p14:section>
-        <p14:section name="Roadmap" id="{af0acb7a-7988-68c6-e9b8-49f99c2a198e}">
+        <p14:section name="Roadmap" id="{0e5db111-30a3-0625-2b62-f6fe0cd14c3d}">
           <p14:sldIdLst>
             <p14:sldId id="265"/>
             <p14:sldId id="266"/>
@@ -2987,6 +2987,88 @@
               <a:t>Questions?</a:t>
             </a:r>
             <a:endParaRPr lang="en-US" sz="2600" dirty="0"/>
+          </a:p>
+        </p:txBody>
+      </p:sp>
+      <p:sp>
+        <p:nvSpPr>
+          <p:cNvPr id="6" name="QR card"/>
+          <p:cNvSpPr/>
+          <p:nvPr/>
+        </p:nvSpPr>
+        <p:spPr>
+          <a:xfrm>
+            <a:off x="9098280" y="1234440"/>
+            <a:ext cx="2514600" cy="2514600"/>
+          </a:xfrm>
+          <a:prstGeom prst="roundRect">
+            <a:avLst>
+              <a:gd name="adj" fmla="val 4364"/>
+            </a:avLst>
+          </a:prstGeom>
+          <a:solidFill>
+            <a:schemeClr val="bg1"/>
+          </a:solidFill>
+          <a:ln/>
+        </p:spPr>
+      </p:sp>
+      <p:pic>
+        <p:nvPicPr>
+          <p:cNvPr id="7" name="QR code" descr="QR code linking to the project's code">    </p:cNvPr>
+          <p:cNvPicPr>
+            <a:picLocks noChangeAspect="1"/>
+          </p:cNvPicPr>
+          <p:nvPr/>
+        </p:nvPicPr>
+        <p:blipFill>
+          <a:blip r:embed="rId1"/>
+          <a:stretch>
+            <a:fillRect/>
+          </a:stretch>
+        </p:blipFill>
+        <p:spPr>
+          <a:xfrm>
+            <a:off x="9189720" y="1325880"/>
+            <a:ext cx="2331720" cy="2331720"/>
+          </a:xfrm>
+          <a:prstGeom prst="rect">
+            <a:avLst/>
+          </a:prstGeom>
+        </p:spPr>
+      </p:pic>
+      <p:sp>
+        <p:nvSpPr>
+          <p:cNvPr id="8" name="QR caption"/>
+          <p:cNvSpPr txBox="1"/>
+          <p:nvPr/>
+        </p:nvSpPr>
+        <p:spPr>
+          <a:xfrm>
+            <a:off x="9098280" y="3767328"/>
+            <a:ext cx="2514600" cy="274320"/>
+          </a:xfrm>
+          <a:prstGeom prst="rect">
+            <a:avLst/>
+          </a:prstGeom>
+          <a:noFill/>
+          <a:ln/>
+        </p:spPr>
+        <p:txBody>
+          <a:bodyPr wrap="square" lIns="0" tIns="0" rIns="0" bIns="0" rtlCol="0" anchor="ctr"/>
+          <a:lstStyle/>
+          <a:p>
+            <a:pPr algn="ctr" indent="0" marL="0">
+              <a:buNone/>
+            </a:pPr>
+            <a:r>
+              <a:rPr lang="en-US" sz="1200" dirty="0">
+                <a:solidFill>
+                  <a:schemeClr val="accent6"/>
+                </a:solidFill>
+              </a:rPr>
+              <a:t>Scan for the code</a:t>
+            </a:r>
+            <a:endParaRPr lang="en-US" sz="1200" dirty="0"/>
           </a:p>
         </p:txBody>
       </p:sp>

--- a/decks/02-wattwise.pptx
+++ b/decks/02-wattwise.pptx
@@ -16,9 +16,10 @@
     <p:sldId id="264" r:id="rId10"/>
     <p:sldId id="265" r:id="rId11"/>
     <p:sldId id="266" r:id="rId12"/>
+    <p:sldId id="267" r:id="rId13"/>
   </p:sldIdLst>
   <p:notesMasterIdLst>
-    <p:notesMasterId r:id="rId13"/>
+    <p:notesMasterId r:id="rId14"/>
   </p:notesMasterIdLst>
   <p:sldSz cx="12192000" cy="6858000"/>
   <p:notesSz cx="6858000" cy="12192000"/>
@@ -117,39 +118,40 @@
   <p:extLst>
     <p:ext uri="{521415D9-36F7-43E2-AB2F-B90AF26B5E84}">
       <p14:sectionLst xmlns:p14="http://schemas.microsoft.com/office/powerpoint/2010/main">
-        <p14:section name="Introduction" id="{8217c22a-0243-0008-2765-c8cdca7c24d8}">
+        <p14:section name="Introduction" id="{ebb9a749-6eb4-b714-ca8e-4ca43dd55f57}">
           <p14:sldIdLst>
             <p14:sldId id="256"/>
           </p14:sldIdLst>
         </p14:section>
-        <p14:section name="Problem &amp; solution" id="{e735f4c8-d39f-fe44-7fc4-534d04c2ad58}">
+        <p14:section name="Problem &amp; solution" id="{106aa120-eaee-27a3-9dcd-3c53ff7bc0f1}">
           <p14:sldIdLst>
             <p14:sldId id="257"/>
             <p14:sldId id="258"/>
           </p14:sldIdLst>
         </p14:section>
-        <p14:section name="Product" id="{b7d61f01-2487-adb8-1604-c43811e3c9fb}">
+        <p14:section name="Product" id="{8bb9cd32-fe1e-e487-3527-9c56865aa19c}">
           <p14:sldIdLst>
             <p14:sldId id="259"/>
             <p14:sldId id="260"/>
             <p14:sldId id="261"/>
           </p14:sldIdLst>
         </p14:section>
-        <p14:section name="Why us" id="{b176d93a-7e5d-dbb5-eb08-b6069e885993}">
+        <p14:section name="Why us" id="{c023e54b-91c3-ef3b-bf67-f710126d1236}">
           <p14:sldIdLst>
             <p14:sldId id="262"/>
             <p14:sldId id="263"/>
-          </p14:sldIdLst>
-        </p14:section>
-        <p14:section name="Demo" id="{f71e2b51-ca24-b0ff-c2fe-d3a2ca0a7425}">
-          <p14:sldIdLst>
             <p14:sldId id="264"/>
           </p14:sldIdLst>
         </p14:section>
-        <p14:section name="Roadmap" id="{0e5db111-30a3-0625-2b62-f6fe0cd14c3d}">
+        <p14:section name="Demo" id="{a1920489-e01f-cf2b-099b-c015da40914a}">
           <p14:sldIdLst>
             <p14:sldId id="265"/>
+          </p14:sldIdLst>
+        </p14:section>
+        <p14:section name="Roadmap" id="{97174f16-2f6b-9104-c279-1137231c9296}">
+          <p14:sldIdLst>
             <p14:sldId id="266"/>
+            <p14:sldId id="267"/>
           </p14:sldIdLst>
         </p14:section>
       </p14:sectionLst>
@@ -644,7 +646,7 @@
           <a:p>
             <a:r>
               <a:rPr lang="en-US" dirty="0"/>
-              <a:t>Business: Free open-source core for colleges via eco-clubs Pro tier per building: alerts, meter connectors, NAAC reports Referral fee from solar EPC vendors Shared-savings contracts verified by the same baseline Next: Live Modbus/MQTT meters and WhatsApp alerts Academic calendar and humidity as forecast inputs Time-of-day tariff and peak-demand optimisation Battery dispatch and carbon-aware scheduling NILM to learn end-use shares automatically</a:t>
+              <a:t>Switch to the browser now. 1. Click Run demo - models retrain offline in ~300 ms 2. Read KPI tiles: kWh, rupees, CO2, waste, next-week forecast 3. Hover the CSE Lab night-time waste band for its reason 4. Open Why this forecast: baseline + weather split 5. Solar planner: all roofs, 442 kWp, 4.5-year payback 6. What-if: drag AC and LED sliders, watch savings update 7. Leaderboard and Model report: champion and live accuracy</a:t>
             </a:r>
             <a:endParaRPr lang="en-US" dirty="0"/>
           </a:p>
@@ -732,7 +734,7 @@
           <a:p>
             <a:r>
               <a:rPr lang="en-US" dirty="0"/>
-              <a:t>Close with the impact line, invite questions. Keep the demo tab open in case judges want to try it.</a:t>
+              <a:t>Business: Free open-source core for colleges via eco-clubs Pro tier per building: alerts, meter connectors, NAAC reports Referral fee from solar EPC vendors Shared-savings contracts verified by the same baseline Next: Live Modbus/MQTT meters and WhatsApp alerts Academic calendar and humidity as forecast inputs Time-of-day tariff and peak-demand optimisation Battery dispatch and carbon-aware scheduling NILM to learn end-use shares automatically</a:t>
             </a:r>
             <a:endParaRPr lang="en-US" dirty="0"/>
           </a:p>
@@ -756,6 +758,94 @@
             <a:fld id="{F7021451-1387-4CA6-816F-3879F97B5CBC}" type="slidenum">
               <a:rPr lang="en-US"/>
               <a:t>11</a:t>
+            </a:fld>
+            <a:endParaRPr lang="en-US"/>
+          </a:p>
+        </p:txBody>
+      </p:sp>
+    </p:spTree>
+    <p:extLst>
+      <p:ext uri="{BB962C8B-B14F-4D97-AF65-F5344CB8AC3E}">
+        <p14:creationId xmlns:p14="http://schemas.microsoft.com/office/powerpoint/2010/main" val="1024086991"/>
+      </p:ext>
+    </p:extLst>
+  </p:cSld>
+  <p:clrMapOvr>
+    <a:masterClrMapping/>
+  </p:clrMapOvr>
+</p:notes>
+</file>
+
+<file path=ppt/notesSlides/notesSlide12.xml><?xml version="1.0" encoding="utf-8"?>
+<p:notes xmlns:a="http://schemas.openxmlformats.org/drawingml/2006/main" xmlns:r="http://schemas.openxmlformats.org/officeDocument/2006/relationships" xmlns:p="http://schemas.openxmlformats.org/presentationml/2006/main">
+  <p:cSld>
+    <p:spTree>
+      <p:nvGrpSpPr>
+        <p:cNvPr id="1" name=""/>
+        <p:cNvGrpSpPr/>
+        <p:nvPr/>
+      </p:nvGrpSpPr>
+      <p:grpSpPr>
+        <a:xfrm>
+          <a:off x="0" y="0"/>
+          <a:ext cx="0" cy="0"/>
+          <a:chOff x="0" y="0"/>
+          <a:chExt cx="0" cy="0"/>
+        </a:xfrm>
+      </p:grpSpPr>
+      <p:sp>
+        <p:nvSpPr>
+          <p:cNvPr id="2" name="Slide Image Placeholder 1"/>
+          <p:cNvSpPr>
+            <a:spLocks noGrp="1" noRot="1" noChangeAspect="1"/>
+          </p:cNvSpPr>
+          <p:nvPr>
+            <p:ph type="sldImg"/>
+          </p:nvPr>
+        </p:nvSpPr>
+        <p:spPr/>
+      </p:sp>
+      <p:sp>
+        <p:nvSpPr>
+          <p:cNvPr id="3" name="Notes Placeholder 2"/>
+          <p:cNvSpPr>
+            <a:spLocks noGrp="1"/>
+          </p:cNvSpPr>
+          <p:nvPr>
+            <p:ph type="body" idx="1"/>
+          </p:nvPr>
+        </p:nvSpPr>
+        <p:spPr/>
+        <p:txBody>
+          <a:bodyPr/>
+          <a:lstStyle/>
+          <a:p>
+            <a:r>
+              <a:rPr lang="en-US" dirty="0"/>
+              <a:t>Close with the impact line, invite questions. Keep the demo tab open in case judges want to try it.</a:t>
+            </a:r>
+            <a:endParaRPr lang="en-US" dirty="0"/>
+          </a:p>
+        </p:txBody>
+      </p:sp>
+      <p:sp>
+        <p:nvSpPr>
+          <p:cNvPr id="4" name="Slide Number Placeholder 3"/>
+          <p:cNvSpPr>
+            <a:spLocks noGrp="1"/>
+          </p:cNvSpPr>
+          <p:nvPr>
+            <p:ph type="sldNum" sz="quarter" idx="10"/>
+          </p:nvPr>
+        </p:nvSpPr>
+        <p:spPr/>
+        <p:txBody>
+          <a:bodyPr/>
+          <a:lstStyle/>
+          <a:p>
+            <a:fld id="{F7021451-1387-4CA6-816F-3879F97B5CBC}" type="slidenum">
+              <a:rPr lang="en-US"/>
+              <a:t>12</a:t>
             </a:fld>
             <a:endParaRPr lang="en-US"/>
           </a:p>
@@ -1348,7 +1438,7 @@
           <a:p>
             <a:r>
               <a:rPr lang="en-US" dirty="0"/>
-              <a:t>Results: 5.6% forecast MAPE on hold-out week (Holt-Winters 27.7%); 100% / 89% waste-event precision / recall vs injected truth; 10% monthly saving from 4 cheap levers (Rs 10.7 L/yr, demo); 300 ms full pipeline for 6 buildings x 8 weeks. Impact: ~10% lower bills from operational levers (demo estimate) ~95 t CO2/yr avoided by levers, ~456 t/yr by rooftop solar Students see their building's footprint and compete to cut it</a:t>
+              <a:t>Compare: Monthly bill review vs Cloud energy dashboards vs WattWise. Hourly waste detection: No / Yes / Yes. Explains every alert &amp; forecast: No / Partial / Yes. Forecast accuracy shown: No / Varies / 5.6% MAPE (sim). Solar payback + what-if: No / Partial / Yes. Cost / works offline: ₹0 / Subscription / ₹0 / offline.</a:t>
             </a:r>
             <a:endParaRPr lang="en-US" dirty="0"/>
           </a:p>
@@ -1436,7 +1526,7 @@
           <a:p>
             <a:r>
               <a:rPr lang="en-US" dirty="0"/>
-              <a:t>Switch to the browser now. 1. Click Run demo - models retrain offline in ~300 ms 2. Read KPI tiles: kWh, rupees, CO2, waste, next-week forecast 3. Hover the CSE Lab night-time waste band for its reason 4. Open Why this forecast: baseline + weather split 5. Solar planner: all roofs, 442 kWp, 4.5-year payback 6. What-if: drag AC and LED sliders, watch savings update 7. Leaderboard and Model report: champion and live accuracy</a:t>
+              <a:t>Results: 5.6% forecast MAPE on hold-out week (Holt-Winters 27.7%); 100% / 89% waste-event precision / recall vs injected truth; 10% monthly saving from 4 cheap levers (Rs 10.7 L/yr, demo); 300 ms full pipeline for 6 buildings x 8 weeks. Impact: ~10% lower bills from operational levers (demo estimate) ~95 t CO2/yr avoided by levers, ~456 t/yr by rooftop solar Students see their building's footprint and compete to cut it</a:t>
             </a:r>
             <a:endParaRPr lang="en-US" dirty="0"/>
           </a:p>
@@ -2309,7 +2399,7 @@
                   <a:schemeClr val="tx1"/>
                 </a:solidFill>
               </a:rPr>
-              <a:t>Feasibility, business model &amp; roadmap</a:t>
+              <a:t>Live demo in 3 minutes</a:t>
             </a:r>
             <a:endParaRPr lang="en-US" sz="3600" dirty="0"/>
           </a:p>
@@ -2317,36 +2407,14 @@
       </p:sp>
       <p:sp>
         <p:nvSpPr>
-          <p:cNvPr id="3" name="Business model card"/>
+          <p:cNvPr id="3" name="Step 1 dot"/>
           <p:cNvSpPr/>
           <p:nvPr/>
         </p:nvSpPr>
         <p:spPr>
           <a:xfrm>
-            <a:off x="548640" y="1371600"/>
-            <a:ext cx="5410048" cy="4297680"/>
-          </a:xfrm>
-          <a:prstGeom prst="roundRect">
-            <a:avLst>
-              <a:gd name="adj" fmla="val 2553"/>
-            </a:avLst>
-          </a:prstGeom>
-          <a:solidFill>
-            <a:schemeClr val="bg2"/>
-          </a:solidFill>
-          <a:ln/>
-        </p:spPr>
-      </p:sp>
-      <p:sp>
-        <p:nvSpPr>
-          <p:cNvPr id="4" name="Business model circle"/>
-          <p:cNvSpPr/>
-          <p:nvPr/>
-        </p:nvSpPr>
-        <p:spPr>
-          <a:xfrm>
-            <a:off x="868680" y="1645920"/>
-            <a:ext cx="548640" cy="548640"/>
+            <a:off x="548640" y="1435608"/>
+            <a:ext cx="457200" cy="457200"/>
           </a:xfrm>
           <a:prstGeom prst="ellipse">
             <a:avLst/>
@@ -2357,9 +2425,667 @@
           <a:ln/>
         </p:spPr>
       </p:sp>
+      <p:sp>
+        <p:nvSpPr>
+          <p:cNvPr id="4" name="Step 1 number"/>
+          <p:cNvSpPr txBox="1"/>
+          <p:nvPr/>
+        </p:nvSpPr>
+        <p:spPr>
+          <a:xfrm>
+            <a:off x="548640" y="1435608"/>
+            <a:ext cx="457200" cy="457200"/>
+          </a:xfrm>
+          <a:prstGeom prst="rect">
+            <a:avLst/>
+          </a:prstGeom>
+          <a:noFill/>
+          <a:ln/>
+        </p:spPr>
+        <p:txBody>
+          <a:bodyPr wrap="square" lIns="0" tIns="0" rIns="0" bIns="0" rtlCol="0" anchor="ctr"/>
+          <a:lstStyle/>
+          <a:p>
+            <a:pPr algn="ctr" indent="0" marL="0">
+              <a:buNone/>
+            </a:pPr>
+            <a:r>
+              <a:rPr lang="en-US" sz="1600" b="1" dirty="0">
+                <a:solidFill>
+                  <a:schemeClr val="bg1"/>
+                </a:solidFill>
+              </a:rPr>
+              <a:t>1</a:t>
+            </a:r>
+            <a:endParaRPr lang="en-US" sz="1600" dirty="0"/>
+          </a:p>
+        </p:txBody>
+      </p:sp>
+      <p:sp>
+        <p:nvSpPr>
+          <p:cNvPr id="5" name="Step 1 text"/>
+          <p:cNvSpPr txBox="1"/>
+          <p:nvPr/>
+        </p:nvSpPr>
+        <p:spPr>
+          <a:xfrm>
+            <a:off x="1234440" y="1371600"/>
+            <a:ext cx="5120640" cy="585216"/>
+          </a:xfrm>
+          <a:prstGeom prst="rect">
+            <a:avLst/>
+          </a:prstGeom>
+          <a:noFill/>
+          <a:ln/>
+        </p:spPr>
+        <p:txBody>
+          <a:bodyPr wrap="square" lIns="0" tIns="0" rIns="0" bIns="0" rtlCol="0" anchor="ctr"/>
+          <a:lstStyle/>
+          <a:p>
+            <a:pPr indent="0" marL="0">
+              <a:buNone/>
+            </a:pPr>
+            <a:r>
+              <a:rPr lang="en-US" sz="1600" dirty="0">
+                <a:solidFill>
+                  <a:schemeClr val="tx1"/>
+                </a:solidFill>
+              </a:rPr>
+              <a:t>Click Run demo - models retrain offline in ~300 ms</a:t>
+            </a:r>
+            <a:endParaRPr lang="en-US" sz="1600" dirty="0"/>
+          </a:p>
+        </p:txBody>
+      </p:sp>
+      <p:sp>
+        <p:nvSpPr>
+          <p:cNvPr id="6" name="Step 2 dot"/>
+          <p:cNvSpPr/>
+          <p:nvPr/>
+        </p:nvSpPr>
+        <p:spPr>
+          <a:xfrm>
+            <a:off x="548640" y="2130552"/>
+            <a:ext cx="457200" cy="457200"/>
+          </a:xfrm>
+          <a:prstGeom prst="ellipse">
+            <a:avLst/>
+          </a:prstGeom>
+          <a:solidFill>
+            <a:schemeClr val="accent1"/>
+          </a:solidFill>
+          <a:ln/>
+        </p:spPr>
+      </p:sp>
+      <p:sp>
+        <p:nvSpPr>
+          <p:cNvPr id="7" name="Step 2 number"/>
+          <p:cNvSpPr txBox="1"/>
+          <p:nvPr/>
+        </p:nvSpPr>
+        <p:spPr>
+          <a:xfrm>
+            <a:off x="548640" y="2130552"/>
+            <a:ext cx="457200" cy="457200"/>
+          </a:xfrm>
+          <a:prstGeom prst="rect">
+            <a:avLst/>
+          </a:prstGeom>
+          <a:noFill/>
+          <a:ln/>
+        </p:spPr>
+        <p:txBody>
+          <a:bodyPr wrap="square" lIns="0" tIns="0" rIns="0" bIns="0" rtlCol="0" anchor="ctr"/>
+          <a:lstStyle/>
+          <a:p>
+            <a:pPr algn="ctr" indent="0" marL="0">
+              <a:buNone/>
+            </a:pPr>
+            <a:r>
+              <a:rPr lang="en-US" sz="1600" b="1" dirty="0">
+                <a:solidFill>
+                  <a:schemeClr val="bg1"/>
+                </a:solidFill>
+              </a:rPr>
+              <a:t>2</a:t>
+            </a:r>
+            <a:endParaRPr lang="en-US" sz="1600" dirty="0"/>
+          </a:p>
+        </p:txBody>
+      </p:sp>
+      <p:sp>
+        <p:nvSpPr>
+          <p:cNvPr id="8" name="Step 2 text"/>
+          <p:cNvSpPr txBox="1"/>
+          <p:nvPr/>
+        </p:nvSpPr>
+        <p:spPr>
+          <a:xfrm>
+            <a:off x="1234440" y="2066544"/>
+            <a:ext cx="5120640" cy="585216"/>
+          </a:xfrm>
+          <a:prstGeom prst="rect">
+            <a:avLst/>
+          </a:prstGeom>
+          <a:noFill/>
+          <a:ln/>
+        </p:spPr>
+        <p:txBody>
+          <a:bodyPr wrap="square" lIns="0" tIns="0" rIns="0" bIns="0" rtlCol="0" anchor="ctr"/>
+          <a:lstStyle/>
+          <a:p>
+            <a:pPr indent="0" marL="0">
+              <a:buNone/>
+            </a:pPr>
+            <a:r>
+              <a:rPr lang="en-US" sz="1600" dirty="0">
+                <a:solidFill>
+                  <a:schemeClr val="tx1"/>
+                </a:solidFill>
+              </a:rPr>
+              <a:t>Read KPI tiles: kWh, rupees, CO2, waste, next-week forecast</a:t>
+            </a:r>
+            <a:endParaRPr lang="en-US" sz="1600" dirty="0"/>
+          </a:p>
+        </p:txBody>
+      </p:sp>
+      <p:sp>
+        <p:nvSpPr>
+          <p:cNvPr id="9" name="Step 3 dot"/>
+          <p:cNvSpPr/>
+          <p:nvPr/>
+        </p:nvSpPr>
+        <p:spPr>
+          <a:xfrm>
+            <a:off x="548640" y="2825496"/>
+            <a:ext cx="457200" cy="457200"/>
+          </a:xfrm>
+          <a:prstGeom prst="ellipse">
+            <a:avLst/>
+          </a:prstGeom>
+          <a:solidFill>
+            <a:schemeClr val="accent1"/>
+          </a:solidFill>
+          <a:ln/>
+        </p:spPr>
+      </p:sp>
+      <p:sp>
+        <p:nvSpPr>
+          <p:cNvPr id="10" name="Step 3 number"/>
+          <p:cNvSpPr txBox="1"/>
+          <p:nvPr/>
+        </p:nvSpPr>
+        <p:spPr>
+          <a:xfrm>
+            <a:off x="548640" y="2825496"/>
+            <a:ext cx="457200" cy="457200"/>
+          </a:xfrm>
+          <a:prstGeom prst="rect">
+            <a:avLst/>
+          </a:prstGeom>
+          <a:noFill/>
+          <a:ln/>
+        </p:spPr>
+        <p:txBody>
+          <a:bodyPr wrap="square" lIns="0" tIns="0" rIns="0" bIns="0" rtlCol="0" anchor="ctr"/>
+          <a:lstStyle/>
+          <a:p>
+            <a:pPr algn="ctr" indent="0" marL="0">
+              <a:buNone/>
+            </a:pPr>
+            <a:r>
+              <a:rPr lang="en-US" sz="1600" b="1" dirty="0">
+                <a:solidFill>
+                  <a:schemeClr val="bg1"/>
+                </a:solidFill>
+              </a:rPr>
+              <a:t>3</a:t>
+            </a:r>
+            <a:endParaRPr lang="en-US" sz="1600" dirty="0"/>
+          </a:p>
+        </p:txBody>
+      </p:sp>
+      <p:sp>
+        <p:nvSpPr>
+          <p:cNvPr id="11" name="Step 3 text"/>
+          <p:cNvSpPr txBox="1"/>
+          <p:nvPr/>
+        </p:nvSpPr>
+        <p:spPr>
+          <a:xfrm>
+            <a:off x="1234440" y="2761488"/>
+            <a:ext cx="5120640" cy="585216"/>
+          </a:xfrm>
+          <a:prstGeom prst="rect">
+            <a:avLst/>
+          </a:prstGeom>
+          <a:noFill/>
+          <a:ln/>
+        </p:spPr>
+        <p:txBody>
+          <a:bodyPr wrap="square" lIns="0" tIns="0" rIns="0" bIns="0" rtlCol="0" anchor="ctr"/>
+          <a:lstStyle/>
+          <a:p>
+            <a:pPr indent="0" marL="0">
+              <a:buNone/>
+            </a:pPr>
+            <a:r>
+              <a:rPr lang="en-US" sz="1600" dirty="0">
+                <a:solidFill>
+                  <a:schemeClr val="tx1"/>
+                </a:solidFill>
+              </a:rPr>
+              <a:t>Hover the CSE Lab night-time waste band for its reason</a:t>
+            </a:r>
+            <a:endParaRPr lang="en-US" sz="1600" dirty="0"/>
+          </a:p>
+        </p:txBody>
+      </p:sp>
+      <p:sp>
+        <p:nvSpPr>
+          <p:cNvPr id="12" name="Step 4 dot"/>
+          <p:cNvSpPr/>
+          <p:nvPr/>
+        </p:nvSpPr>
+        <p:spPr>
+          <a:xfrm>
+            <a:off x="548640" y="3520440"/>
+            <a:ext cx="457200" cy="457200"/>
+          </a:xfrm>
+          <a:prstGeom prst="ellipse">
+            <a:avLst/>
+          </a:prstGeom>
+          <a:solidFill>
+            <a:schemeClr val="accent1"/>
+          </a:solidFill>
+          <a:ln/>
+        </p:spPr>
+      </p:sp>
+      <p:sp>
+        <p:nvSpPr>
+          <p:cNvPr id="13" name="Step 4 number"/>
+          <p:cNvSpPr txBox="1"/>
+          <p:nvPr/>
+        </p:nvSpPr>
+        <p:spPr>
+          <a:xfrm>
+            <a:off x="548640" y="3520440"/>
+            <a:ext cx="457200" cy="457200"/>
+          </a:xfrm>
+          <a:prstGeom prst="rect">
+            <a:avLst/>
+          </a:prstGeom>
+          <a:noFill/>
+          <a:ln/>
+        </p:spPr>
+        <p:txBody>
+          <a:bodyPr wrap="square" lIns="0" tIns="0" rIns="0" bIns="0" rtlCol="0" anchor="ctr"/>
+          <a:lstStyle/>
+          <a:p>
+            <a:pPr algn="ctr" indent="0" marL="0">
+              <a:buNone/>
+            </a:pPr>
+            <a:r>
+              <a:rPr lang="en-US" sz="1600" b="1" dirty="0">
+                <a:solidFill>
+                  <a:schemeClr val="bg1"/>
+                </a:solidFill>
+              </a:rPr>
+              <a:t>4</a:t>
+            </a:r>
+            <a:endParaRPr lang="en-US" sz="1600" dirty="0"/>
+          </a:p>
+        </p:txBody>
+      </p:sp>
+      <p:sp>
+        <p:nvSpPr>
+          <p:cNvPr id="14" name="Step 4 text"/>
+          <p:cNvSpPr txBox="1"/>
+          <p:nvPr/>
+        </p:nvSpPr>
+        <p:spPr>
+          <a:xfrm>
+            <a:off x="1234440" y="3456432"/>
+            <a:ext cx="5120640" cy="585216"/>
+          </a:xfrm>
+          <a:prstGeom prst="rect">
+            <a:avLst/>
+          </a:prstGeom>
+          <a:noFill/>
+          <a:ln/>
+        </p:spPr>
+        <p:txBody>
+          <a:bodyPr wrap="square" lIns="0" tIns="0" rIns="0" bIns="0" rtlCol="0" anchor="ctr"/>
+          <a:lstStyle/>
+          <a:p>
+            <a:pPr indent="0" marL="0">
+              <a:buNone/>
+            </a:pPr>
+            <a:r>
+              <a:rPr lang="en-US" sz="1600" dirty="0">
+                <a:solidFill>
+                  <a:schemeClr val="tx1"/>
+                </a:solidFill>
+              </a:rPr>
+              <a:t>Open Why this forecast: baseline + weather split</a:t>
+            </a:r>
+            <a:endParaRPr lang="en-US" sz="1600" dirty="0"/>
+          </a:p>
+        </p:txBody>
+      </p:sp>
+      <p:sp>
+        <p:nvSpPr>
+          <p:cNvPr id="15" name="Step 5 dot"/>
+          <p:cNvSpPr/>
+          <p:nvPr/>
+        </p:nvSpPr>
+        <p:spPr>
+          <a:xfrm>
+            <a:off x="548640" y="4215384"/>
+            <a:ext cx="457200" cy="457200"/>
+          </a:xfrm>
+          <a:prstGeom prst="ellipse">
+            <a:avLst/>
+          </a:prstGeom>
+          <a:solidFill>
+            <a:schemeClr val="accent1"/>
+          </a:solidFill>
+          <a:ln/>
+        </p:spPr>
+      </p:sp>
+      <p:sp>
+        <p:nvSpPr>
+          <p:cNvPr id="16" name="Step 5 number"/>
+          <p:cNvSpPr txBox="1"/>
+          <p:nvPr/>
+        </p:nvSpPr>
+        <p:spPr>
+          <a:xfrm>
+            <a:off x="548640" y="4215384"/>
+            <a:ext cx="457200" cy="457200"/>
+          </a:xfrm>
+          <a:prstGeom prst="rect">
+            <a:avLst/>
+          </a:prstGeom>
+          <a:noFill/>
+          <a:ln/>
+        </p:spPr>
+        <p:txBody>
+          <a:bodyPr wrap="square" lIns="0" tIns="0" rIns="0" bIns="0" rtlCol="0" anchor="ctr"/>
+          <a:lstStyle/>
+          <a:p>
+            <a:pPr algn="ctr" indent="0" marL="0">
+              <a:buNone/>
+            </a:pPr>
+            <a:r>
+              <a:rPr lang="en-US" sz="1600" b="1" dirty="0">
+                <a:solidFill>
+                  <a:schemeClr val="bg1"/>
+                </a:solidFill>
+              </a:rPr>
+              <a:t>5</a:t>
+            </a:r>
+            <a:endParaRPr lang="en-US" sz="1600" dirty="0"/>
+          </a:p>
+        </p:txBody>
+      </p:sp>
+      <p:sp>
+        <p:nvSpPr>
+          <p:cNvPr id="17" name="Step 5 text"/>
+          <p:cNvSpPr txBox="1"/>
+          <p:nvPr/>
+        </p:nvSpPr>
+        <p:spPr>
+          <a:xfrm>
+            <a:off x="1234440" y="4151376"/>
+            <a:ext cx="5120640" cy="585216"/>
+          </a:xfrm>
+          <a:prstGeom prst="rect">
+            <a:avLst/>
+          </a:prstGeom>
+          <a:noFill/>
+          <a:ln/>
+        </p:spPr>
+        <p:txBody>
+          <a:bodyPr wrap="square" lIns="0" tIns="0" rIns="0" bIns="0" rtlCol="0" anchor="ctr"/>
+          <a:lstStyle/>
+          <a:p>
+            <a:pPr indent="0" marL="0">
+              <a:buNone/>
+            </a:pPr>
+            <a:r>
+              <a:rPr lang="en-US" sz="1600" dirty="0">
+                <a:solidFill>
+                  <a:schemeClr val="tx1"/>
+                </a:solidFill>
+              </a:rPr>
+              <a:t>Solar planner: all roofs, 442 kWp, 4.5-year payback</a:t>
+            </a:r>
+            <a:endParaRPr lang="en-US" sz="1600" dirty="0"/>
+          </a:p>
+        </p:txBody>
+      </p:sp>
+      <p:sp>
+        <p:nvSpPr>
+          <p:cNvPr id="18" name="Step 6 dot"/>
+          <p:cNvSpPr/>
+          <p:nvPr/>
+        </p:nvSpPr>
+        <p:spPr>
+          <a:xfrm>
+            <a:off x="548640" y="4910328"/>
+            <a:ext cx="457200" cy="457200"/>
+          </a:xfrm>
+          <a:prstGeom prst="ellipse">
+            <a:avLst/>
+          </a:prstGeom>
+          <a:solidFill>
+            <a:schemeClr val="accent1"/>
+          </a:solidFill>
+          <a:ln/>
+        </p:spPr>
+      </p:sp>
+      <p:sp>
+        <p:nvSpPr>
+          <p:cNvPr id="19" name="Step 6 number"/>
+          <p:cNvSpPr txBox="1"/>
+          <p:nvPr/>
+        </p:nvSpPr>
+        <p:spPr>
+          <a:xfrm>
+            <a:off x="548640" y="4910328"/>
+            <a:ext cx="457200" cy="457200"/>
+          </a:xfrm>
+          <a:prstGeom prst="rect">
+            <a:avLst/>
+          </a:prstGeom>
+          <a:noFill/>
+          <a:ln/>
+        </p:spPr>
+        <p:txBody>
+          <a:bodyPr wrap="square" lIns="0" tIns="0" rIns="0" bIns="0" rtlCol="0" anchor="ctr"/>
+          <a:lstStyle/>
+          <a:p>
+            <a:pPr algn="ctr" indent="0" marL="0">
+              <a:buNone/>
+            </a:pPr>
+            <a:r>
+              <a:rPr lang="en-US" sz="1600" b="1" dirty="0">
+                <a:solidFill>
+                  <a:schemeClr val="bg1"/>
+                </a:solidFill>
+              </a:rPr>
+              <a:t>6</a:t>
+            </a:r>
+            <a:endParaRPr lang="en-US" sz="1600" dirty="0"/>
+          </a:p>
+        </p:txBody>
+      </p:sp>
+      <p:sp>
+        <p:nvSpPr>
+          <p:cNvPr id="20" name="Step 6 text"/>
+          <p:cNvSpPr txBox="1"/>
+          <p:nvPr/>
+        </p:nvSpPr>
+        <p:spPr>
+          <a:xfrm>
+            <a:off x="1234440" y="4846320"/>
+            <a:ext cx="5120640" cy="585216"/>
+          </a:xfrm>
+          <a:prstGeom prst="rect">
+            <a:avLst/>
+          </a:prstGeom>
+          <a:noFill/>
+          <a:ln/>
+        </p:spPr>
+        <p:txBody>
+          <a:bodyPr wrap="square" lIns="0" tIns="0" rIns="0" bIns="0" rtlCol="0" anchor="ctr"/>
+          <a:lstStyle/>
+          <a:p>
+            <a:pPr indent="0" marL="0">
+              <a:buNone/>
+            </a:pPr>
+            <a:r>
+              <a:rPr lang="en-US" sz="1600" dirty="0">
+                <a:solidFill>
+                  <a:schemeClr val="tx1"/>
+                </a:solidFill>
+              </a:rPr>
+              <a:t>What-if: drag AC and LED sliders, watch savings update</a:t>
+            </a:r>
+            <a:endParaRPr lang="en-US" sz="1600" dirty="0"/>
+          </a:p>
+        </p:txBody>
+      </p:sp>
+      <p:sp>
+        <p:nvSpPr>
+          <p:cNvPr id="21" name="Step 7 dot"/>
+          <p:cNvSpPr/>
+          <p:nvPr/>
+        </p:nvSpPr>
+        <p:spPr>
+          <a:xfrm>
+            <a:off x="548640" y="5605272"/>
+            <a:ext cx="457200" cy="457200"/>
+          </a:xfrm>
+          <a:prstGeom prst="ellipse">
+            <a:avLst/>
+          </a:prstGeom>
+          <a:solidFill>
+            <a:schemeClr val="accent1"/>
+          </a:solidFill>
+          <a:ln/>
+        </p:spPr>
+      </p:sp>
+      <p:sp>
+        <p:nvSpPr>
+          <p:cNvPr id="22" name="Step 7 number"/>
+          <p:cNvSpPr txBox="1"/>
+          <p:nvPr/>
+        </p:nvSpPr>
+        <p:spPr>
+          <a:xfrm>
+            <a:off x="548640" y="5605272"/>
+            <a:ext cx="457200" cy="457200"/>
+          </a:xfrm>
+          <a:prstGeom prst="rect">
+            <a:avLst/>
+          </a:prstGeom>
+          <a:noFill/>
+          <a:ln/>
+        </p:spPr>
+        <p:txBody>
+          <a:bodyPr wrap="square" lIns="0" tIns="0" rIns="0" bIns="0" rtlCol="0" anchor="ctr"/>
+          <a:lstStyle/>
+          <a:p>
+            <a:pPr algn="ctr" indent="0" marL="0">
+              <a:buNone/>
+            </a:pPr>
+            <a:r>
+              <a:rPr lang="en-US" sz="1600" b="1" dirty="0">
+                <a:solidFill>
+                  <a:schemeClr val="bg1"/>
+                </a:solidFill>
+              </a:rPr>
+              <a:t>7</a:t>
+            </a:r>
+            <a:endParaRPr lang="en-US" sz="1600" dirty="0"/>
+          </a:p>
+        </p:txBody>
+      </p:sp>
+      <p:sp>
+        <p:nvSpPr>
+          <p:cNvPr id="23" name="Step 7 text"/>
+          <p:cNvSpPr txBox="1"/>
+          <p:nvPr/>
+        </p:nvSpPr>
+        <p:spPr>
+          <a:xfrm>
+            <a:off x="1234440" y="5541264"/>
+            <a:ext cx="5120640" cy="585216"/>
+          </a:xfrm>
+          <a:prstGeom prst="rect">
+            <a:avLst/>
+          </a:prstGeom>
+          <a:noFill/>
+          <a:ln/>
+        </p:spPr>
+        <p:txBody>
+          <a:bodyPr wrap="square" lIns="0" tIns="0" rIns="0" bIns="0" rtlCol="0" anchor="ctr"/>
+          <a:lstStyle/>
+          <a:p>
+            <a:pPr indent="0" marL="0">
+              <a:buNone/>
+            </a:pPr>
+            <a:r>
+              <a:rPr lang="en-US" sz="1600" dirty="0">
+                <a:solidFill>
+                  <a:schemeClr val="tx1"/>
+                </a:solidFill>
+              </a:rPr>
+              <a:t>Leaderboard and Model report: champion and live accuracy</a:t>
+            </a:r>
+            <a:endParaRPr lang="en-US" sz="1600" dirty="0"/>
+          </a:p>
+        </p:txBody>
+      </p:sp>
+      <p:sp>
+        <p:nvSpPr>
+          <p:cNvPr id="24" name="Demo screenshot frame"/>
+          <p:cNvSpPr/>
+          <p:nvPr/>
+        </p:nvSpPr>
+        <p:spPr>
+          <a:xfrm>
+            <a:off x="6528816" y="1545336"/>
+            <a:ext cx="5138928" cy="3252978"/>
+          </a:xfrm>
+          <a:prstGeom prst="roundRect">
+            <a:avLst>
+              <a:gd name="adj" fmla="val 2249"/>
+            </a:avLst>
+          </a:prstGeom>
+          <a:solidFill>
+            <a:schemeClr val="bg1"/>
+          </a:solidFill>
+          <a:ln w="12700">
+            <a:solidFill>
+              <a:schemeClr val="bg2"/>
+            </a:solidFill>
+            <a:prstDash val="solid"/>
+          </a:ln>
+          <a:effectLst>
+            <a:outerShdw sx="100000" sy="100000" kx="0" ky="0" algn="bl" rotWithShape="0" blurRad="101600" dist="25400" dir="5400000">
+              <a:srgbClr val="000000">
+                <a:alpha val="14000"/>
+              </a:srgbClr>
+            </a:outerShdw>
+          </a:effectLst>
+        </p:spPr>
+      </p:sp>
       <p:pic>
         <p:nvPicPr>
-          <p:cNvPr id="5" name="Business model icon" descr="preencoded.png">    </p:cNvPr>
+          <p:cNvPr id="25" name="Demo screenshot" descr="WattWise screenshot: What-if simulator">    </p:cNvPr>
           <p:cNvPicPr>
             <a:picLocks noChangeAspect="1"/>
           </p:cNvPicPr>
@@ -2373,8 +3099,8 @@
         </p:blipFill>
         <p:spPr>
           <a:xfrm>
-            <a:off x="1005840" y="1783080"/>
-            <a:ext cx="274320" cy="274320"/>
+            <a:off x="6583680" y="1600200"/>
+            <a:ext cx="5029200" cy="3143250"/>
           </a:xfrm>
           <a:prstGeom prst="rect">
             <a:avLst/>
@@ -2383,14 +3109,14 @@
       </p:pic>
       <p:sp>
         <p:nvSpPr>
-          <p:cNvPr id="6" name="Business model title"/>
+          <p:cNvPr id="26" name="Demo screenshot caption"/>
           <p:cNvSpPr txBox="1"/>
           <p:nvPr/>
         </p:nvSpPr>
         <p:spPr>
           <a:xfrm>
-            <a:off x="1600200" y="1645920"/>
-            <a:ext cx="4038448" cy="548640"/>
+            <a:off x="6583680" y="4880610"/>
+            <a:ext cx="5029200" cy="274320"/>
           </a:xfrm>
           <a:prstGeom prst="rect">
             <a:avLst/>
@@ -2402,31 +3128,42 @@
           <a:bodyPr wrap="square" lIns="0" tIns="0" rIns="0" bIns="0" rtlCol="0" anchor="ctr"/>
           <a:lstStyle/>
           <a:p>
-            <a:pPr indent="0" marL="0">
-              <a:buNone/>
-            </a:pPr>
-            <a:r>
-              <a:rPr lang="en-US" sz="2000" b="1" dirty="0">
-                <a:solidFill>
-                  <a:schemeClr val="tx1"/>
-                </a:solidFill>
-              </a:rPr>
-              <a:t>Business model</a:t>
-            </a:r>
-            <a:endParaRPr lang="en-US" sz="2000" dirty="0"/>
-          </a:p>
-        </p:txBody>
-      </p:sp>
-      <p:sp>
-        <p:nvSpPr>
-          <p:cNvPr id="7" name="Business model list"/>
+            <a:pPr algn="ctr" indent="0" marL="0">
+              <a:buNone/>
+            </a:pPr>
+            <a:r>
+              <a:rPr lang="en-US" sz="1200" dirty="0">
+                <a:solidFill>
+                  <a:schemeClr val="accent1"/>
+                </a:solidFill>
+              </a:rPr>
+              <a:t>▸ </a:t>
+            </a:r>
+            <a:pPr algn="ctr" indent="0" marL="0">
+              <a:buNone/>
+            </a:pPr>
+            <a:r>
+              <a:rPr lang="en-US" sz="1200" dirty="0">
+                <a:solidFill>
+                  <a:schemeClr val="accent4"/>
+                </a:solidFill>
+              </a:rPr>
+              <a:t>What-if simulator</a:t>
+            </a:r>
+            <a:endParaRPr lang="en-US" sz="1200" dirty="0"/>
+          </a:p>
+        </p:txBody>
+      </p:sp>
+      <p:sp>
+        <p:nvSpPr>
+          <p:cNvPr id="27" name="Run command"/>
           <p:cNvSpPr txBox="1"/>
           <p:nvPr/>
         </p:nvSpPr>
         <p:spPr>
           <a:xfrm>
-            <a:off x="914400" y="2468880"/>
-            <a:ext cx="4678528" cy="3017520"/>
+            <a:off x="6583680" y="5246370"/>
+            <a:ext cx="5029200" cy="411480"/>
           </a:xfrm>
           <a:prstGeom prst="rect">
             <a:avLst/>
@@ -2435,293 +3172,24 @@
           <a:ln/>
         </p:spPr>
         <p:txBody>
-          <a:bodyPr wrap="square" lIns="0" tIns="0" rIns="0" bIns="0" rtlCol="0" anchor="t"/>
-          <a:lstStyle/>
-          <a:p>
-            <a:pPr marL="228600" indent="-228600">
-              <a:spcAft>
-                <a:spcPts val="1000"/>
-              </a:spcAft>
-              <a:buSzPct val="100000"/>
-              <a:buChar char="•"/>
-            </a:pPr>
-            <a:r>
-              <a:rPr lang="en-US" sz="1600" dirty="0">
-                <a:solidFill>
-                  <a:schemeClr val="tx1"/>
-                </a:solidFill>
-              </a:rPr>
-              <a:t>Free open-source core for colleges via eco-clubs</a:t>
-            </a:r>
-            <a:endParaRPr lang="en-US" sz="1600" dirty="0"/>
-          </a:p>
-          <a:p>
-            <a:pPr marL="228600" indent="-228600">
-              <a:spcAft>
-                <a:spcPts val="1000"/>
-              </a:spcAft>
-              <a:buSzPct val="100000"/>
-              <a:buChar char="•"/>
-            </a:pPr>
-            <a:r>
-              <a:rPr lang="en-US" sz="1600" dirty="0">
-                <a:solidFill>
-                  <a:schemeClr val="tx1"/>
-                </a:solidFill>
-              </a:rPr>
-              <a:t>Pro tier per building: alerts, meter connectors, NAAC reports</a:t>
-            </a:r>
-            <a:endParaRPr lang="en-US" sz="1600" dirty="0"/>
-          </a:p>
-          <a:p>
-            <a:pPr marL="228600" indent="-228600">
-              <a:spcAft>
-                <a:spcPts val="1000"/>
-              </a:spcAft>
-              <a:buSzPct val="100000"/>
-              <a:buChar char="•"/>
-            </a:pPr>
-            <a:r>
-              <a:rPr lang="en-US" sz="1600" dirty="0">
-                <a:solidFill>
-                  <a:schemeClr val="tx1"/>
-                </a:solidFill>
-              </a:rPr>
-              <a:t>Referral fee from solar EPC vendors</a:t>
-            </a:r>
-            <a:endParaRPr lang="en-US" sz="1600" dirty="0"/>
-          </a:p>
-          <a:p>
-            <a:pPr marL="228600" indent="-228600">
-              <a:spcAft>
-                <a:spcPts val="1000"/>
-              </a:spcAft>
-              <a:buSzPct val="100000"/>
-              <a:buChar char="•"/>
-            </a:pPr>
-            <a:r>
-              <a:rPr lang="en-US" sz="1600" dirty="0">
-                <a:solidFill>
-                  <a:schemeClr val="tx1"/>
-                </a:solidFill>
-              </a:rPr>
-              <a:t>Shared-savings contracts verified by the same baseline</a:t>
-            </a:r>
-            <a:endParaRPr lang="en-US" sz="1600" dirty="0"/>
-          </a:p>
-        </p:txBody>
-      </p:sp>
-      <p:sp>
-        <p:nvSpPr>
-          <p:cNvPr id="8" name="Future scope card"/>
-          <p:cNvSpPr/>
-          <p:nvPr/>
-        </p:nvSpPr>
-        <p:spPr>
-          <a:xfrm>
-            <a:off x="6233008" y="1371600"/>
-            <a:ext cx="5410048" cy="4297680"/>
-          </a:xfrm>
-          <a:prstGeom prst="roundRect">
-            <a:avLst>
-              <a:gd name="adj" fmla="val 2553"/>
-            </a:avLst>
-          </a:prstGeom>
-          <a:solidFill>
-            <a:schemeClr val="accent2"/>
-          </a:solidFill>
-          <a:ln/>
-        </p:spPr>
-      </p:sp>
-      <p:sp>
-        <p:nvSpPr>
-          <p:cNvPr id="9" name="Future scope circle"/>
-          <p:cNvSpPr/>
-          <p:nvPr/>
-        </p:nvSpPr>
-        <p:spPr>
-          <a:xfrm>
-            <a:off x="6553048" y="1645920"/>
-            <a:ext cx="548640" cy="548640"/>
-          </a:xfrm>
-          <a:prstGeom prst="ellipse">
-            <a:avLst/>
-          </a:prstGeom>
-          <a:solidFill>
-            <a:schemeClr val="accent1"/>
-          </a:solidFill>
-          <a:ln/>
-        </p:spPr>
-      </p:sp>
-      <p:pic>
-        <p:nvPicPr>
-          <p:cNvPr id="10" name="Future scope icon" descr="preencoded.png">    </p:cNvPr>
-          <p:cNvPicPr>
-            <a:picLocks noChangeAspect="1"/>
-          </p:cNvPicPr>
-          <p:nvPr/>
-        </p:nvPicPr>
-        <p:blipFill>
-          <a:blip r:embed="rId2"/>
-          <a:stretch>
-            <a:fillRect/>
-          </a:stretch>
-        </p:blipFill>
-        <p:spPr>
-          <a:xfrm>
-            <a:off x="6690208" y="1783080"/>
-            <a:ext cx="274320" cy="274320"/>
-          </a:xfrm>
-          <a:prstGeom prst="rect">
-            <a:avLst/>
-          </a:prstGeom>
-        </p:spPr>
-      </p:pic>
-      <p:sp>
-        <p:nvSpPr>
-          <p:cNvPr id="11" name="Future scope title"/>
-          <p:cNvSpPr txBox="1"/>
-          <p:nvPr/>
-        </p:nvSpPr>
-        <p:spPr>
-          <a:xfrm>
-            <a:off x="7284568" y="1645920"/>
-            <a:ext cx="4038448" cy="548640"/>
-          </a:xfrm>
-          <a:prstGeom prst="rect">
-            <a:avLst/>
-          </a:prstGeom>
-          <a:noFill/>
-          <a:ln/>
-        </p:spPr>
-        <p:txBody>
           <a:bodyPr wrap="square" lIns="0" tIns="0" rIns="0" bIns="0" rtlCol="0" anchor="ctr"/>
           <a:lstStyle/>
           <a:p>
-            <a:pPr indent="0" marL="0">
-              <a:buNone/>
-            </a:pPr>
-            <a:r>
-              <a:rPr lang="en-US" sz="2000" b="1" dirty="0">
-                <a:solidFill>
-                  <a:schemeClr val="tx1"/>
-                </a:solidFill>
-              </a:rPr>
-              <a:t>Future scope</a:t>
-            </a:r>
-            <a:endParaRPr lang="en-US" sz="2000" dirty="0"/>
-          </a:p>
-        </p:txBody>
-      </p:sp>
-      <p:sp>
-        <p:nvSpPr>
-          <p:cNvPr id="12" name="Future scope list"/>
-          <p:cNvSpPr txBox="1"/>
-          <p:nvPr/>
-        </p:nvSpPr>
-        <p:spPr>
-          <a:xfrm>
-            <a:off x="6598768" y="2468880"/>
-            <a:ext cx="4678528" cy="3017520"/>
-          </a:xfrm>
-          <a:prstGeom prst="rect">
-            <a:avLst/>
-          </a:prstGeom>
-          <a:noFill/>
-          <a:ln/>
-        </p:spPr>
-        <p:txBody>
-          <a:bodyPr wrap="square" lIns="0" tIns="0" rIns="0" bIns="0" rtlCol="0" anchor="t"/>
-          <a:lstStyle/>
-          <a:p>
-            <a:pPr marL="228600" indent="-228600">
-              <a:spcAft>
-                <a:spcPts val="1000"/>
-              </a:spcAft>
-              <a:buSzPct val="100000"/>
-              <a:buChar char="•"/>
-            </a:pPr>
-            <a:r>
-              <a:rPr lang="en-US" sz="1600" dirty="0">
-                <a:solidFill>
-                  <a:schemeClr val="tx1"/>
-                </a:solidFill>
-              </a:rPr>
-              <a:t>Live Modbus/MQTT meters and WhatsApp alerts</a:t>
-            </a:r>
-            <a:endParaRPr lang="en-US" sz="1600" dirty="0"/>
-          </a:p>
-          <a:p>
-            <a:pPr marL="228600" indent="-228600">
-              <a:spcAft>
-                <a:spcPts val="1000"/>
-              </a:spcAft>
-              <a:buSzPct val="100000"/>
-              <a:buChar char="•"/>
-            </a:pPr>
-            <a:r>
-              <a:rPr lang="en-US" sz="1600" dirty="0">
-                <a:solidFill>
-                  <a:schemeClr val="tx1"/>
-                </a:solidFill>
-              </a:rPr>
-              <a:t>Academic calendar and humidity as forecast inputs</a:t>
-            </a:r>
-            <a:endParaRPr lang="en-US" sz="1600" dirty="0"/>
-          </a:p>
-          <a:p>
-            <a:pPr marL="228600" indent="-228600">
-              <a:spcAft>
-                <a:spcPts val="1000"/>
-              </a:spcAft>
-              <a:buSzPct val="100000"/>
-              <a:buChar char="•"/>
-            </a:pPr>
-            <a:r>
-              <a:rPr lang="en-US" sz="1600" dirty="0">
-                <a:solidFill>
-                  <a:schemeClr val="tx1"/>
-                </a:solidFill>
-              </a:rPr>
-              <a:t>Time-of-day tariff and peak-demand optimisation</a:t>
-            </a:r>
-            <a:endParaRPr lang="en-US" sz="1600" dirty="0"/>
-          </a:p>
-          <a:p>
-            <a:pPr marL="228600" indent="-228600">
-              <a:spcAft>
-                <a:spcPts val="1000"/>
-              </a:spcAft>
-              <a:buSzPct val="100000"/>
-              <a:buChar char="•"/>
-            </a:pPr>
-            <a:r>
-              <a:rPr lang="en-US" sz="1600" dirty="0">
-                <a:solidFill>
-                  <a:schemeClr val="tx1"/>
-                </a:solidFill>
-              </a:rPr>
-              <a:t>Battery dispatch and carbon-aware scheduling</a:t>
-            </a:r>
-            <a:endParaRPr lang="en-US" sz="1600" dirty="0"/>
-          </a:p>
-          <a:p>
-            <a:pPr marL="228600" indent="-228600">
-              <a:spcAft>
-                <a:spcPts val="1000"/>
-              </a:spcAft>
-              <a:buSzPct val="100000"/>
-              <a:buChar char="•"/>
-            </a:pPr>
-            <a:r>
-              <a:rPr lang="en-US" sz="1600" dirty="0">
-                <a:solidFill>
-                  <a:schemeClr val="tx1"/>
-                </a:solidFill>
-              </a:rPr>
-              <a:t>NILM to learn end-use shares automatically</a:t>
-            </a:r>
-            <a:endParaRPr lang="en-US" sz="1600" dirty="0"/>
+            <a:pPr algn="ctr" indent="0" marL="0">
+              <a:buNone/>
+            </a:pPr>
+            <a:r>
+              <a:rPr lang="en-US" sz="1400" dirty="0">
+                <a:solidFill>
+                  <a:schemeClr val="accent3"/>
+                </a:solidFill>
+                <a:latin typeface="Courier New" pitchFamily="34" charset="0"/>
+                <a:ea typeface="Courier New" pitchFamily="34" charset="-122"/>
+                <a:cs typeface="Courier New" pitchFamily="34" charset="-120"/>
+              </a:rPr>
+              <a:t>python app.py  →  http://localhost:8002</a:t>
+            </a:r>
+            <a:endParaRPr lang="en-US" sz="1400" dirty="0"/>
           </a:p>
         </p:txBody>
       </p:sp>
@@ -2797,6 +3265,524 @@
       </p:grpSpPr>
       <p:sp>
         <p:nvSpPr>
+          <p:cNvPr id="2" name="Text 0"/>
+          <p:cNvSpPr/>
+          <p:nvPr>
+            <p:ph idx="100" type="title" hasCustomPrompt="1"/>
+          </p:nvPr>
+        </p:nvSpPr>
+        <p:spPr>
+          <a:xfrm>
+            <a:off x="548640" y="320040"/>
+            <a:ext cx="11094415" cy="777240"/>
+          </a:xfrm>
+          <a:prstGeom prst="rect">
+            <a:avLst/>
+          </a:prstGeom>
+          <a:noFill/>
+          <a:ln/>
+        </p:spPr>
+        <p:txBody>
+          <a:bodyPr wrap="square" lIns="0" tIns="0" rIns="0" bIns="0" rtlCol="0" anchor="ctr"/>
+          <a:lstStyle/>
+          <a:p>
+            <a:pPr algn="l" indent="0" marL="0">
+              <a:buNone/>
+            </a:pPr>
+            <a:r>
+              <a:rPr lang="en-US" sz="3600" b="1" dirty="0">
+                <a:solidFill>
+                  <a:schemeClr val="tx1"/>
+                </a:solidFill>
+              </a:rPr>
+              <a:t>Feasibility, business model &amp; roadmap</a:t>
+            </a:r>
+            <a:endParaRPr lang="en-US" sz="3600" dirty="0"/>
+          </a:p>
+        </p:txBody>
+      </p:sp>
+      <p:sp>
+        <p:nvSpPr>
+          <p:cNvPr id="3" name="Business model card"/>
+          <p:cNvSpPr/>
+          <p:nvPr/>
+        </p:nvSpPr>
+        <p:spPr>
+          <a:xfrm>
+            <a:off x="548640" y="1371600"/>
+            <a:ext cx="5410048" cy="4297680"/>
+          </a:xfrm>
+          <a:prstGeom prst="roundRect">
+            <a:avLst>
+              <a:gd name="adj" fmla="val 2553"/>
+            </a:avLst>
+          </a:prstGeom>
+          <a:solidFill>
+            <a:schemeClr val="bg2"/>
+          </a:solidFill>
+          <a:ln/>
+        </p:spPr>
+      </p:sp>
+      <p:sp>
+        <p:nvSpPr>
+          <p:cNvPr id="4" name="Business model circle"/>
+          <p:cNvSpPr/>
+          <p:nvPr/>
+        </p:nvSpPr>
+        <p:spPr>
+          <a:xfrm>
+            <a:off x="868680" y="1645920"/>
+            <a:ext cx="548640" cy="548640"/>
+          </a:xfrm>
+          <a:prstGeom prst="ellipse">
+            <a:avLst/>
+          </a:prstGeom>
+          <a:solidFill>
+            <a:schemeClr val="accent1"/>
+          </a:solidFill>
+          <a:ln/>
+        </p:spPr>
+      </p:sp>
+      <p:pic>
+        <p:nvPicPr>
+          <p:cNvPr id="5" name="Business model icon" descr="preencoded.png">    </p:cNvPr>
+          <p:cNvPicPr>
+            <a:picLocks noChangeAspect="1"/>
+          </p:cNvPicPr>
+          <p:nvPr/>
+        </p:nvPicPr>
+        <p:blipFill>
+          <a:blip r:embed="rId1"/>
+          <a:stretch>
+            <a:fillRect/>
+          </a:stretch>
+        </p:blipFill>
+        <p:spPr>
+          <a:xfrm>
+            <a:off x="1005840" y="1783080"/>
+            <a:ext cx="274320" cy="274320"/>
+          </a:xfrm>
+          <a:prstGeom prst="rect">
+            <a:avLst/>
+          </a:prstGeom>
+        </p:spPr>
+      </p:pic>
+      <p:sp>
+        <p:nvSpPr>
+          <p:cNvPr id="6" name="Business model title"/>
+          <p:cNvSpPr txBox="1"/>
+          <p:nvPr/>
+        </p:nvSpPr>
+        <p:spPr>
+          <a:xfrm>
+            <a:off x="1600200" y="1645920"/>
+            <a:ext cx="4038448" cy="548640"/>
+          </a:xfrm>
+          <a:prstGeom prst="rect">
+            <a:avLst/>
+          </a:prstGeom>
+          <a:noFill/>
+          <a:ln/>
+        </p:spPr>
+        <p:txBody>
+          <a:bodyPr wrap="square" lIns="0" tIns="0" rIns="0" bIns="0" rtlCol="0" anchor="ctr"/>
+          <a:lstStyle/>
+          <a:p>
+            <a:pPr indent="0" marL="0">
+              <a:buNone/>
+            </a:pPr>
+            <a:r>
+              <a:rPr lang="en-US" sz="2000" b="1" dirty="0">
+                <a:solidFill>
+                  <a:schemeClr val="tx1"/>
+                </a:solidFill>
+              </a:rPr>
+              <a:t>Business model</a:t>
+            </a:r>
+            <a:endParaRPr lang="en-US" sz="2000" dirty="0"/>
+          </a:p>
+        </p:txBody>
+      </p:sp>
+      <p:sp>
+        <p:nvSpPr>
+          <p:cNvPr id="7" name="Business model list"/>
+          <p:cNvSpPr txBox="1"/>
+          <p:nvPr/>
+        </p:nvSpPr>
+        <p:spPr>
+          <a:xfrm>
+            <a:off x="914400" y="2468880"/>
+            <a:ext cx="4678528" cy="3017520"/>
+          </a:xfrm>
+          <a:prstGeom prst="rect">
+            <a:avLst/>
+          </a:prstGeom>
+          <a:noFill/>
+          <a:ln/>
+        </p:spPr>
+        <p:txBody>
+          <a:bodyPr wrap="square" lIns="0" tIns="0" rIns="0" bIns="0" rtlCol="0" anchor="t"/>
+          <a:lstStyle/>
+          <a:p>
+            <a:pPr marL="228600" indent="-228600">
+              <a:spcAft>
+                <a:spcPts val="1000"/>
+              </a:spcAft>
+              <a:buSzPct val="100000"/>
+              <a:buChar char="•"/>
+            </a:pPr>
+            <a:r>
+              <a:rPr lang="en-US" sz="1600" dirty="0">
+                <a:solidFill>
+                  <a:schemeClr val="tx1"/>
+                </a:solidFill>
+              </a:rPr>
+              <a:t>Free open-source core for colleges via eco-clubs</a:t>
+            </a:r>
+            <a:endParaRPr lang="en-US" sz="1600" dirty="0"/>
+          </a:p>
+          <a:p>
+            <a:pPr marL="228600" indent="-228600">
+              <a:spcAft>
+                <a:spcPts val="1000"/>
+              </a:spcAft>
+              <a:buSzPct val="100000"/>
+              <a:buChar char="•"/>
+            </a:pPr>
+            <a:r>
+              <a:rPr lang="en-US" sz="1600" dirty="0">
+                <a:solidFill>
+                  <a:schemeClr val="tx1"/>
+                </a:solidFill>
+              </a:rPr>
+              <a:t>Pro tier per building: alerts, meter connectors, NAAC reports</a:t>
+            </a:r>
+            <a:endParaRPr lang="en-US" sz="1600" dirty="0"/>
+          </a:p>
+          <a:p>
+            <a:pPr marL="228600" indent="-228600">
+              <a:spcAft>
+                <a:spcPts val="1000"/>
+              </a:spcAft>
+              <a:buSzPct val="100000"/>
+              <a:buChar char="•"/>
+            </a:pPr>
+            <a:r>
+              <a:rPr lang="en-US" sz="1600" dirty="0">
+                <a:solidFill>
+                  <a:schemeClr val="tx1"/>
+                </a:solidFill>
+              </a:rPr>
+              <a:t>Referral fee from solar EPC vendors</a:t>
+            </a:r>
+            <a:endParaRPr lang="en-US" sz="1600" dirty="0"/>
+          </a:p>
+          <a:p>
+            <a:pPr marL="228600" indent="-228600">
+              <a:spcAft>
+                <a:spcPts val="1000"/>
+              </a:spcAft>
+              <a:buSzPct val="100000"/>
+              <a:buChar char="•"/>
+            </a:pPr>
+            <a:r>
+              <a:rPr lang="en-US" sz="1600" dirty="0">
+                <a:solidFill>
+                  <a:schemeClr val="tx1"/>
+                </a:solidFill>
+              </a:rPr>
+              <a:t>Shared-savings contracts verified by the same baseline</a:t>
+            </a:r>
+            <a:endParaRPr lang="en-US" sz="1600" dirty="0"/>
+          </a:p>
+        </p:txBody>
+      </p:sp>
+      <p:sp>
+        <p:nvSpPr>
+          <p:cNvPr id="8" name="Future scope card"/>
+          <p:cNvSpPr/>
+          <p:nvPr/>
+        </p:nvSpPr>
+        <p:spPr>
+          <a:xfrm>
+            <a:off x="6233008" y="1371600"/>
+            <a:ext cx="5410048" cy="4297680"/>
+          </a:xfrm>
+          <a:prstGeom prst="roundRect">
+            <a:avLst>
+              <a:gd name="adj" fmla="val 2553"/>
+            </a:avLst>
+          </a:prstGeom>
+          <a:solidFill>
+            <a:schemeClr val="accent2"/>
+          </a:solidFill>
+          <a:ln/>
+        </p:spPr>
+      </p:sp>
+      <p:sp>
+        <p:nvSpPr>
+          <p:cNvPr id="9" name="Future scope circle"/>
+          <p:cNvSpPr/>
+          <p:nvPr/>
+        </p:nvSpPr>
+        <p:spPr>
+          <a:xfrm>
+            <a:off x="6553048" y="1645920"/>
+            <a:ext cx="548640" cy="548640"/>
+          </a:xfrm>
+          <a:prstGeom prst="ellipse">
+            <a:avLst/>
+          </a:prstGeom>
+          <a:solidFill>
+            <a:schemeClr val="accent1"/>
+          </a:solidFill>
+          <a:ln/>
+        </p:spPr>
+      </p:sp>
+      <p:pic>
+        <p:nvPicPr>
+          <p:cNvPr id="10" name="Future scope icon" descr="preencoded.png">    </p:cNvPr>
+          <p:cNvPicPr>
+            <a:picLocks noChangeAspect="1"/>
+          </p:cNvPicPr>
+          <p:nvPr/>
+        </p:nvPicPr>
+        <p:blipFill>
+          <a:blip r:embed="rId2"/>
+          <a:stretch>
+            <a:fillRect/>
+          </a:stretch>
+        </p:blipFill>
+        <p:spPr>
+          <a:xfrm>
+            <a:off x="6690208" y="1783080"/>
+            <a:ext cx="274320" cy="274320"/>
+          </a:xfrm>
+          <a:prstGeom prst="rect">
+            <a:avLst/>
+          </a:prstGeom>
+        </p:spPr>
+      </p:pic>
+      <p:sp>
+        <p:nvSpPr>
+          <p:cNvPr id="11" name="Future scope title"/>
+          <p:cNvSpPr txBox="1"/>
+          <p:nvPr/>
+        </p:nvSpPr>
+        <p:spPr>
+          <a:xfrm>
+            <a:off x="7284568" y="1645920"/>
+            <a:ext cx="4038448" cy="548640"/>
+          </a:xfrm>
+          <a:prstGeom prst="rect">
+            <a:avLst/>
+          </a:prstGeom>
+          <a:noFill/>
+          <a:ln/>
+        </p:spPr>
+        <p:txBody>
+          <a:bodyPr wrap="square" lIns="0" tIns="0" rIns="0" bIns="0" rtlCol="0" anchor="ctr"/>
+          <a:lstStyle/>
+          <a:p>
+            <a:pPr indent="0" marL="0">
+              <a:buNone/>
+            </a:pPr>
+            <a:r>
+              <a:rPr lang="en-US" sz="2000" b="1" dirty="0">
+                <a:solidFill>
+                  <a:schemeClr val="tx1"/>
+                </a:solidFill>
+              </a:rPr>
+              <a:t>Future scope</a:t>
+            </a:r>
+            <a:endParaRPr lang="en-US" sz="2000" dirty="0"/>
+          </a:p>
+        </p:txBody>
+      </p:sp>
+      <p:sp>
+        <p:nvSpPr>
+          <p:cNvPr id="12" name="Future scope list"/>
+          <p:cNvSpPr txBox="1"/>
+          <p:nvPr/>
+        </p:nvSpPr>
+        <p:spPr>
+          <a:xfrm>
+            <a:off x="6598768" y="2468880"/>
+            <a:ext cx="4678528" cy="3017520"/>
+          </a:xfrm>
+          <a:prstGeom prst="rect">
+            <a:avLst/>
+          </a:prstGeom>
+          <a:noFill/>
+          <a:ln/>
+        </p:spPr>
+        <p:txBody>
+          <a:bodyPr wrap="square" lIns="0" tIns="0" rIns="0" bIns="0" rtlCol="0" anchor="t"/>
+          <a:lstStyle/>
+          <a:p>
+            <a:pPr marL="228600" indent="-228600">
+              <a:spcAft>
+                <a:spcPts val="1000"/>
+              </a:spcAft>
+              <a:buSzPct val="100000"/>
+              <a:buChar char="•"/>
+            </a:pPr>
+            <a:r>
+              <a:rPr lang="en-US" sz="1600" dirty="0">
+                <a:solidFill>
+                  <a:schemeClr val="tx1"/>
+                </a:solidFill>
+              </a:rPr>
+              <a:t>Live Modbus/MQTT meters and WhatsApp alerts</a:t>
+            </a:r>
+            <a:endParaRPr lang="en-US" sz="1600" dirty="0"/>
+          </a:p>
+          <a:p>
+            <a:pPr marL="228600" indent="-228600">
+              <a:spcAft>
+                <a:spcPts val="1000"/>
+              </a:spcAft>
+              <a:buSzPct val="100000"/>
+              <a:buChar char="•"/>
+            </a:pPr>
+            <a:r>
+              <a:rPr lang="en-US" sz="1600" dirty="0">
+                <a:solidFill>
+                  <a:schemeClr val="tx1"/>
+                </a:solidFill>
+              </a:rPr>
+              <a:t>Academic calendar and humidity as forecast inputs</a:t>
+            </a:r>
+            <a:endParaRPr lang="en-US" sz="1600" dirty="0"/>
+          </a:p>
+          <a:p>
+            <a:pPr marL="228600" indent="-228600">
+              <a:spcAft>
+                <a:spcPts val="1000"/>
+              </a:spcAft>
+              <a:buSzPct val="100000"/>
+              <a:buChar char="•"/>
+            </a:pPr>
+            <a:r>
+              <a:rPr lang="en-US" sz="1600" dirty="0">
+                <a:solidFill>
+                  <a:schemeClr val="tx1"/>
+                </a:solidFill>
+              </a:rPr>
+              <a:t>Time-of-day tariff and peak-demand optimisation</a:t>
+            </a:r>
+            <a:endParaRPr lang="en-US" sz="1600" dirty="0"/>
+          </a:p>
+          <a:p>
+            <a:pPr marL="228600" indent="-228600">
+              <a:spcAft>
+                <a:spcPts val="1000"/>
+              </a:spcAft>
+              <a:buSzPct val="100000"/>
+              <a:buChar char="•"/>
+            </a:pPr>
+            <a:r>
+              <a:rPr lang="en-US" sz="1600" dirty="0">
+                <a:solidFill>
+                  <a:schemeClr val="tx1"/>
+                </a:solidFill>
+              </a:rPr>
+              <a:t>Battery dispatch and carbon-aware scheduling</a:t>
+            </a:r>
+            <a:endParaRPr lang="en-US" sz="1600" dirty="0"/>
+          </a:p>
+          <a:p>
+            <a:pPr marL="228600" indent="-228600">
+              <a:spcAft>
+                <a:spcPts val="1000"/>
+              </a:spcAft>
+              <a:buSzPct val="100000"/>
+              <a:buChar char="•"/>
+            </a:pPr>
+            <a:r>
+              <a:rPr lang="en-US" sz="1600" dirty="0">
+                <a:solidFill>
+                  <a:schemeClr val="tx1"/>
+                </a:solidFill>
+              </a:rPr>
+              <a:t>NILM to learn end-use shares automatically</a:t>
+            </a:r>
+            <a:endParaRPr lang="en-US" sz="1600" dirty="0"/>
+          </a:p>
+        </p:txBody>
+      </p:sp>
+      <p:sp>
+        <p:nvSpPr>
+          <p:cNvPr id="25" name="Slide Number Placeholder 0"/>
+          <p:cNvSpPr>
+            <a:spLocks noGrp="1"/>
+          </p:cNvSpPr>
+          <p:nvPr>
+            <p:ph type="sldNum" sz="quarter" idx="4294967295"/>
+          </p:nvPr>
+        </p:nvSpPr>
+        <p:spPr>
+          <a:xfrm>
+            <a:off x="11094415" y="6400800"/>
+            <a:ext cx="548640" cy="274320"/>
+          </a:xfrm>
+          <a:prstGeom prst="rect">
+            <a:avLst/>
+          </a:prstGeom>
+          <a:extLst>
+            <a:ext uri="{C572A759-6A51-4108-AA02-DFA0A04FC94B}">
+              <ma14:wrappingTextBoxFlag xmlns:ma14="http://schemas.microsoft.com/office/mac/drawingml/2011/main" val="0"/>
+            </a:ext>
+          </a:extLst>
+        </p:spPr>
+        <p:txBody>
+          <a:bodyPr/>
+          <a:lstStyle>
+            <a:lvl1pPr>
+              <a:defRPr sz="1000">
+                <a:solidFill>
+                  <a:schemeClr val="accent4"/>
+                </a:solidFill>
+              </a:defRPr>
+            </a:lvl1pPr>
+          </a:lstStyle>
+          <a:p>
+            <a:pPr algn="r"/>
+            <a:fld id="{F7021451-1387-4CA6-816F-3879F97B5CBC}" type="slidenum">
+              <a:rPr b="0" lang="en-US"/>
+              <a:t>11</a:t>
+            </a:fld>
+            <a:endParaRPr lang="en-US"/>
+          </a:p>
+        </p:txBody>
+      </p:sp>
+    </p:spTree>
+  </p:cSld>
+  <p:clrMapOvr>
+    <a:masterClrMapping/>
+  </p:clrMapOvr>
+</p:sld>
+</file>
+
+<file path=ppt/slides/slide12.xml><?xml version="1.0" encoding="utf-8"?>
+<p:sld xmlns:a="http://schemas.openxmlformats.org/drawingml/2006/main" xmlns:r="http://schemas.openxmlformats.org/officeDocument/2006/relationships" xmlns:p="http://schemas.openxmlformats.org/presentationml/2006/main">
+  <p:cSld name="Slide 12">
+    <p:spTree>
+      <p:nvGrpSpPr>
+        <p:cNvPr id="1" name=""/>
+        <p:cNvGrpSpPr/>
+        <p:nvPr/>
+      </p:nvGrpSpPr>
+      <p:grpSpPr>
+        <a:xfrm>
+          <a:off x="0" y="0"/>
+          <a:ext cx="0" cy="0"/>
+          <a:chOff x="0" y="0"/>
+          <a:chExt cx="0" cy="0"/>
+        </a:xfrm>
+      </p:grpSpPr>
+      <p:sp>
+        <p:nvSpPr>
           <p:cNvPr id="2" name="Thanks"/>
           <p:cNvSpPr txBox="1"/>
           <p:nvPr/>
@@ -3837,7 +4823,7 @@
       </p:sp>
       <p:pic>
         <p:nvPicPr>
-          <p:cNvPr id="7" name="Solution screenshot" descr="WattWise screenshot">    </p:cNvPr>
+          <p:cNvPr id="7" name="Solution screenshot" descr="WattWise screenshot: Solar planner">    </p:cNvPr>
           <p:cNvPicPr>
             <a:picLocks noChangeAspect="1"/>
           </p:cNvPicPr>
@@ -3859,6 +4845,53 @@
           </a:prstGeom>
         </p:spPr>
       </p:pic>
+      <p:sp>
+        <p:nvSpPr>
+          <p:cNvPr id="8" name="Solution screenshot caption"/>
+          <p:cNvSpPr txBox="1"/>
+          <p:nvPr/>
+        </p:nvSpPr>
+        <p:spPr>
+          <a:xfrm>
+            <a:off x="6446520" y="4993767"/>
+            <a:ext cx="5166360" cy="274320"/>
+          </a:xfrm>
+          <a:prstGeom prst="rect">
+            <a:avLst/>
+          </a:prstGeom>
+          <a:noFill/>
+          <a:ln/>
+        </p:spPr>
+        <p:txBody>
+          <a:bodyPr wrap="square" lIns="0" tIns="0" rIns="0" bIns="0" rtlCol="0" anchor="ctr"/>
+          <a:lstStyle/>
+          <a:p>
+            <a:pPr algn="ctr" indent="0" marL="0">
+              <a:buNone/>
+            </a:pPr>
+            <a:r>
+              <a:rPr lang="en-US" sz="1200" dirty="0">
+                <a:solidFill>
+                  <a:schemeClr val="accent1"/>
+                </a:solidFill>
+              </a:rPr>
+              <a:t>▸ </a:t>
+            </a:r>
+            <a:pPr algn="ctr" indent="0" marL="0">
+              <a:buNone/>
+            </a:pPr>
+            <a:r>
+              <a:rPr lang="en-US" sz="1200" dirty="0">
+                <a:solidFill>
+                  <a:schemeClr val="accent4"/>
+                </a:solidFill>
+              </a:rPr>
+              <a:t>Solar planner</a:t>
+            </a:r>
+            <a:endParaRPr lang="en-US" sz="1200" dirty="0"/>
+          </a:p>
+        </p:txBody>
+      </p:sp>
       <p:sp>
         <p:nvSpPr>
           <p:cNvPr id="25" name="Slide Number Placeholder 0"/>
@@ -7015,573 +8048,1677 @@
                   <a:schemeClr val="tx1"/>
                 </a:solidFill>
               </a:rPr>
-              <a:t>Measured results</a:t>
+              <a:t>How we compare</a:t>
             </a:r>
             <a:endParaRPr lang="en-US" sz="3600" dirty="0"/>
           </a:p>
         </p:txBody>
       </p:sp>
-      <p:sp>
-        <p:nvSpPr>
-          <p:cNvPr id="3" name="Result 1 card"/>
-          <p:cNvSpPr/>
-          <p:nvPr/>
-        </p:nvSpPr>
-        <p:spPr>
-          <a:xfrm>
-            <a:off x="548640" y="1463040"/>
-            <a:ext cx="2567864" cy="2377440"/>
-          </a:xfrm>
-          <a:prstGeom prst="roundRect">
-            <a:avLst>
-              <a:gd name="adj" fmla="val 4615"/>
-            </a:avLst>
-          </a:prstGeom>
-          <a:solidFill>
-            <a:schemeClr val="tx2"/>
-          </a:solidFill>
-          <a:ln/>
-          <a:effectLst>
-            <a:outerShdw sx="100000" sy="100000" kx="0" ky="0" algn="bl" rotWithShape="0" blurRad="101600" dist="25400" dir="5400000">
-              <a:srgbClr val="000000">
-                <a:alpha val="14000"/>
-              </a:srgbClr>
-            </a:outerShdw>
-          </a:effectLst>
-        </p:spPr>
-      </p:sp>
-      <p:sp>
-        <p:nvSpPr>
-          <p:cNvPr id="4" name="Result 1 value"/>
-          <p:cNvSpPr txBox="1"/>
-          <p:nvPr/>
-        </p:nvSpPr>
-        <p:spPr>
-          <a:xfrm>
-            <a:off x="777240" y="1645920"/>
-            <a:ext cx="2110664" cy="1097280"/>
-          </a:xfrm>
-          <a:prstGeom prst="rect">
-            <a:avLst/>
-          </a:prstGeom>
-          <a:noFill/>
-          <a:ln/>
-        </p:spPr>
-        <p:txBody>
-          <a:bodyPr wrap="square" lIns="0" tIns="0" rIns="0" bIns="0" rtlCol="0" anchor="ctr">
-            <a:normAutofit/>
-          </a:bodyPr>
-          <a:lstStyle/>
-          <a:p>
-            <a:pPr algn="ctr" indent="0" marL="0">
-              <a:buNone/>
-            </a:pPr>
-            <a:r>
-              <a:rPr lang="en-US" sz="4000" b="1" dirty="0">
-                <a:solidFill>
-                  <a:schemeClr val="accent6"/>
-                </a:solidFill>
-              </a:rPr>
-              <a:t>5.6%</a:t>
-            </a:r>
-            <a:endParaRPr lang="en-US" sz="4000" dirty="0"/>
-          </a:p>
-        </p:txBody>
-      </p:sp>
-      <p:sp>
-        <p:nvSpPr>
-          <p:cNvPr id="5" name="Result 1 label"/>
-          <p:cNvSpPr txBox="1"/>
-          <p:nvPr/>
-        </p:nvSpPr>
-        <p:spPr>
-          <a:xfrm>
-            <a:off x="777240" y="2743200"/>
-            <a:ext cx="2110664" cy="914400"/>
-          </a:xfrm>
-          <a:prstGeom prst="rect">
-            <a:avLst/>
-          </a:prstGeom>
-          <a:noFill/>
-          <a:ln/>
-        </p:spPr>
-        <p:txBody>
-          <a:bodyPr wrap="square" lIns="0" tIns="0" rIns="0" bIns="0" rtlCol="0" anchor="t"/>
-          <a:lstStyle/>
-          <a:p>
-            <a:pPr algn="ctr" indent="0" marL="0">
-              <a:buNone/>
-            </a:pPr>
-            <a:r>
-              <a:rPr lang="en-US" sz="1400" dirty="0">
-                <a:solidFill>
-                  <a:schemeClr val="bg1"/>
-                </a:solidFill>
-              </a:rPr>
-              <a:t>forecast MAPE on hold-out week (Holt-Winters 27.7%)</a:t>
-            </a:r>
-            <a:endParaRPr lang="en-US" sz="1400" dirty="0"/>
-          </a:p>
-        </p:txBody>
-      </p:sp>
-      <p:sp>
-        <p:nvSpPr>
-          <p:cNvPr id="6" name="Result 2 card"/>
-          <p:cNvSpPr/>
-          <p:nvPr/>
-        </p:nvSpPr>
-        <p:spPr>
-          <a:xfrm>
-            <a:off x="3390824" y="1463040"/>
-            <a:ext cx="2567864" cy="2377440"/>
-          </a:xfrm>
-          <a:prstGeom prst="roundRect">
-            <a:avLst>
-              <a:gd name="adj" fmla="val 4615"/>
-            </a:avLst>
-          </a:prstGeom>
-          <a:solidFill>
-            <a:schemeClr val="tx2"/>
-          </a:solidFill>
-          <a:ln/>
-          <a:effectLst>
-            <a:outerShdw sx="100000" sy="100000" kx="0" ky="0" algn="bl" rotWithShape="0" blurRad="101600" dist="25400" dir="5400000">
-              <a:srgbClr val="000000">
-                <a:alpha val="14000"/>
-              </a:srgbClr>
-            </a:outerShdw>
-          </a:effectLst>
-        </p:spPr>
-      </p:sp>
-      <p:sp>
-        <p:nvSpPr>
-          <p:cNvPr id="7" name="Result 2 value"/>
-          <p:cNvSpPr txBox="1"/>
-          <p:nvPr/>
-        </p:nvSpPr>
-        <p:spPr>
-          <a:xfrm>
-            <a:off x="3619424" y="1645920"/>
-            <a:ext cx="2110664" cy="1097280"/>
-          </a:xfrm>
-          <a:prstGeom prst="rect">
-            <a:avLst/>
-          </a:prstGeom>
-          <a:noFill/>
-          <a:ln/>
-        </p:spPr>
-        <p:txBody>
-          <a:bodyPr wrap="square" lIns="0" tIns="0" rIns="0" bIns="0" rtlCol="0" anchor="ctr">
-            <a:normAutofit/>
-          </a:bodyPr>
-          <a:lstStyle/>
-          <a:p>
-            <a:pPr algn="ctr" indent="0" marL="0">
-              <a:buNone/>
-            </a:pPr>
-            <a:r>
-              <a:rPr lang="en-US" sz="2400" b="1" dirty="0">
-                <a:solidFill>
-                  <a:schemeClr val="accent6"/>
-                </a:solidFill>
-              </a:rPr>
-              <a:t>100% / 89%</a:t>
-            </a:r>
-            <a:endParaRPr lang="en-US" sz="2400" dirty="0"/>
-          </a:p>
-        </p:txBody>
-      </p:sp>
-      <p:sp>
-        <p:nvSpPr>
-          <p:cNvPr id="8" name="Result 2 label"/>
-          <p:cNvSpPr txBox="1"/>
-          <p:nvPr/>
-        </p:nvSpPr>
-        <p:spPr>
-          <a:xfrm>
-            <a:off x="3619424" y="2743200"/>
-            <a:ext cx="2110664" cy="914400"/>
-          </a:xfrm>
-          <a:prstGeom prst="rect">
-            <a:avLst/>
-          </a:prstGeom>
-          <a:noFill/>
-          <a:ln/>
-        </p:spPr>
-        <p:txBody>
-          <a:bodyPr wrap="square" lIns="0" tIns="0" rIns="0" bIns="0" rtlCol="0" anchor="t"/>
-          <a:lstStyle/>
-          <a:p>
-            <a:pPr algn="ctr" indent="0" marL="0">
-              <a:buNone/>
-            </a:pPr>
-            <a:r>
-              <a:rPr lang="en-US" sz="1400" dirty="0">
-                <a:solidFill>
-                  <a:schemeClr val="bg1"/>
-                </a:solidFill>
-              </a:rPr>
-              <a:t>waste-event precision / recall vs injected truth</a:t>
-            </a:r>
-            <a:endParaRPr lang="en-US" sz="1400" dirty="0"/>
-          </a:p>
-        </p:txBody>
-      </p:sp>
-      <p:sp>
-        <p:nvSpPr>
-          <p:cNvPr id="9" name="Result 3 card"/>
-          <p:cNvSpPr/>
-          <p:nvPr/>
-        </p:nvSpPr>
-        <p:spPr>
-          <a:xfrm>
-            <a:off x="6233008" y="1463040"/>
-            <a:ext cx="2567864" cy="2377440"/>
-          </a:xfrm>
-          <a:prstGeom prst="roundRect">
-            <a:avLst>
-              <a:gd name="adj" fmla="val 4615"/>
-            </a:avLst>
-          </a:prstGeom>
-          <a:solidFill>
-            <a:schemeClr val="tx2"/>
-          </a:solidFill>
-          <a:ln/>
-          <a:effectLst>
-            <a:outerShdw sx="100000" sy="100000" kx="0" ky="0" algn="bl" rotWithShape="0" blurRad="101600" dist="25400" dir="5400000">
-              <a:srgbClr val="000000">
-                <a:alpha val="14000"/>
-              </a:srgbClr>
-            </a:outerShdw>
-          </a:effectLst>
-        </p:spPr>
-      </p:sp>
-      <p:sp>
-        <p:nvSpPr>
-          <p:cNvPr id="10" name="Result 3 value"/>
-          <p:cNvSpPr txBox="1"/>
-          <p:nvPr/>
-        </p:nvSpPr>
-        <p:spPr>
-          <a:xfrm>
-            <a:off x="6461608" y="1645920"/>
-            <a:ext cx="2110664" cy="1097280"/>
-          </a:xfrm>
-          <a:prstGeom prst="rect">
-            <a:avLst/>
-          </a:prstGeom>
-          <a:noFill/>
-          <a:ln/>
-        </p:spPr>
-        <p:txBody>
-          <a:bodyPr wrap="square" lIns="0" tIns="0" rIns="0" bIns="0" rtlCol="0" anchor="ctr">
-            <a:normAutofit/>
-          </a:bodyPr>
-          <a:lstStyle/>
-          <a:p>
-            <a:pPr algn="ctr" indent="0" marL="0">
-              <a:buNone/>
-            </a:pPr>
-            <a:r>
-              <a:rPr lang="en-US" sz="4000" b="1" dirty="0">
-                <a:solidFill>
-                  <a:schemeClr val="accent6"/>
-                </a:solidFill>
-              </a:rPr>
-              <a:t>10%</a:t>
-            </a:r>
-            <a:endParaRPr lang="en-US" sz="4000" dirty="0"/>
-          </a:p>
-        </p:txBody>
-      </p:sp>
-      <p:sp>
-        <p:nvSpPr>
-          <p:cNvPr id="11" name="Result 3 label"/>
-          <p:cNvSpPr txBox="1"/>
-          <p:nvPr/>
-        </p:nvSpPr>
-        <p:spPr>
-          <a:xfrm>
-            <a:off x="6461608" y="2743200"/>
-            <a:ext cx="2110664" cy="914400"/>
-          </a:xfrm>
-          <a:prstGeom prst="rect">
-            <a:avLst/>
-          </a:prstGeom>
-          <a:noFill/>
-          <a:ln/>
-        </p:spPr>
-        <p:txBody>
-          <a:bodyPr wrap="square" lIns="0" tIns="0" rIns="0" bIns="0" rtlCol="0" anchor="t"/>
-          <a:lstStyle/>
-          <a:p>
-            <a:pPr algn="ctr" indent="0" marL="0">
-              <a:buNone/>
-            </a:pPr>
-            <a:r>
-              <a:rPr lang="en-US" sz="1400" dirty="0">
-                <a:solidFill>
-                  <a:schemeClr val="bg1"/>
-                </a:solidFill>
-              </a:rPr>
-              <a:t>monthly saving from 4 cheap levers (Rs 10.7 L/yr, demo)</a:t>
-            </a:r>
-            <a:endParaRPr lang="en-US" sz="1400" dirty="0"/>
-          </a:p>
-        </p:txBody>
-      </p:sp>
-      <p:sp>
-        <p:nvSpPr>
-          <p:cNvPr id="12" name="Result 4 card"/>
-          <p:cNvSpPr/>
-          <p:nvPr/>
-        </p:nvSpPr>
-        <p:spPr>
-          <a:xfrm>
-            <a:off x="9075191" y="1463040"/>
-            <a:ext cx="2567864" cy="2377440"/>
-          </a:xfrm>
-          <a:prstGeom prst="roundRect">
-            <a:avLst>
-              <a:gd name="adj" fmla="val 4615"/>
-            </a:avLst>
-          </a:prstGeom>
-          <a:solidFill>
-            <a:schemeClr val="tx2"/>
-          </a:solidFill>
-          <a:ln/>
-          <a:effectLst>
-            <a:outerShdw sx="100000" sy="100000" kx="0" ky="0" algn="bl" rotWithShape="0" blurRad="101600" dist="25400" dir="5400000">
-              <a:srgbClr val="000000">
-                <a:alpha val="14000"/>
-              </a:srgbClr>
-            </a:outerShdw>
-          </a:effectLst>
-        </p:spPr>
-      </p:sp>
-      <p:sp>
-        <p:nvSpPr>
-          <p:cNvPr id="13" name="Result 4 value"/>
-          <p:cNvSpPr txBox="1"/>
-          <p:nvPr/>
-        </p:nvSpPr>
-        <p:spPr>
-          <a:xfrm>
-            <a:off x="9303791" y="1645920"/>
-            <a:ext cx="2110664" cy="1097280"/>
-          </a:xfrm>
-          <a:prstGeom prst="rect">
-            <a:avLst/>
-          </a:prstGeom>
-          <a:noFill/>
-          <a:ln/>
-        </p:spPr>
-        <p:txBody>
-          <a:bodyPr wrap="square" lIns="0" tIns="0" rIns="0" bIns="0" rtlCol="0" anchor="ctr">
-            <a:normAutofit/>
-          </a:bodyPr>
-          <a:lstStyle/>
-          <a:p>
-            <a:pPr algn="ctr" indent="0" marL="0">
-              <a:buNone/>
-            </a:pPr>
-            <a:r>
-              <a:rPr lang="en-US" sz="4000" b="1" dirty="0">
-                <a:solidFill>
-                  <a:schemeClr val="accent6"/>
-                </a:solidFill>
-              </a:rPr>
-              <a:t>300 ms</a:t>
-            </a:r>
-            <a:endParaRPr lang="en-US" sz="4000" dirty="0"/>
-          </a:p>
-        </p:txBody>
-      </p:sp>
-      <p:sp>
-        <p:nvSpPr>
-          <p:cNvPr id="14" name="Result 4 label"/>
-          <p:cNvSpPr txBox="1"/>
-          <p:nvPr/>
-        </p:nvSpPr>
-        <p:spPr>
-          <a:xfrm>
-            <a:off x="9303791" y="2743200"/>
-            <a:ext cx="2110664" cy="914400"/>
-          </a:xfrm>
-          <a:prstGeom prst="rect">
-            <a:avLst/>
-          </a:prstGeom>
-          <a:noFill/>
-          <a:ln/>
-        </p:spPr>
-        <p:txBody>
-          <a:bodyPr wrap="square" lIns="0" tIns="0" rIns="0" bIns="0" rtlCol="0" anchor="t"/>
-          <a:lstStyle/>
-          <a:p>
-            <a:pPr algn="ctr" indent="0" marL="0">
-              <a:buNone/>
-            </a:pPr>
-            <a:r>
-              <a:rPr lang="en-US" sz="1400" dirty="0">
-                <a:solidFill>
-                  <a:schemeClr val="bg1"/>
-                </a:solidFill>
-              </a:rPr>
-              <a:t>full pipeline for 6 buildings x 8 weeks</a:t>
-            </a:r>
-            <a:endParaRPr lang="en-US" sz="1400" dirty="0"/>
-          </a:p>
-        </p:txBody>
-      </p:sp>
-      <p:sp>
-        <p:nvSpPr>
-          <p:cNvPr id="15" name="Results caveat"/>
-          <p:cNvSpPr txBox="1"/>
-          <p:nvPr/>
-        </p:nvSpPr>
-        <p:spPr>
-          <a:xfrm>
-            <a:off x="548640" y="4160520"/>
-            <a:ext cx="11094415" cy="457200"/>
-          </a:xfrm>
-          <a:prstGeom prst="rect">
-            <a:avLst/>
-          </a:prstGeom>
-          <a:noFill/>
-          <a:ln/>
-        </p:spPr>
-        <p:txBody>
-          <a:bodyPr wrap="square" lIns="0" tIns="0" rIns="0" bIns="0" rtlCol="0" anchor="ctr"/>
-          <a:lstStyle/>
-          <a:p>
-            <a:pPr indent="0" marL="0">
-              <a:buNone/>
-            </a:pPr>
-            <a:r>
-              <a:rPr lang="en-US" sz="1200" i="1" dirty="0">
-                <a:solidFill>
-                  <a:schemeClr val="accent4"/>
-                </a:solidFill>
-              </a:rPr>
-              <a:t>Measured on held-out data generated by the project (see REPORT.md for method). Real-world performance needs field validation.</a:t>
-            </a:r>
-            <a:endParaRPr lang="en-US" sz="1200" dirty="0"/>
-          </a:p>
-        </p:txBody>
-      </p:sp>
-      <p:sp>
-        <p:nvSpPr>
-          <p:cNvPr id="16" name="Impact strip"/>
-          <p:cNvSpPr/>
-          <p:nvPr/>
-        </p:nvSpPr>
-        <p:spPr>
-          <a:xfrm>
-            <a:off x="548640" y="4754880"/>
-            <a:ext cx="11094415" cy="1371600"/>
-          </a:xfrm>
-          <a:prstGeom prst="roundRect">
-            <a:avLst>
-              <a:gd name="adj" fmla="val 8000"/>
-            </a:avLst>
-          </a:prstGeom>
-          <a:solidFill>
-            <a:schemeClr val="accent2"/>
-          </a:solidFill>
-          <a:ln/>
-        </p:spPr>
-      </p:sp>
-      <p:sp>
-        <p:nvSpPr>
-          <p:cNvPr id="17" name="Impact circle"/>
-          <p:cNvSpPr/>
-          <p:nvPr/>
-        </p:nvSpPr>
-        <p:spPr>
-          <a:xfrm>
-            <a:off x="822960" y="5120640"/>
-            <a:ext cx="640080" cy="640080"/>
-          </a:xfrm>
-          <a:prstGeom prst="ellipse">
-            <a:avLst/>
-          </a:prstGeom>
-          <a:solidFill>
-            <a:schemeClr val="accent1"/>
-          </a:solidFill>
-          <a:ln/>
-        </p:spPr>
-      </p:sp>
-      <p:pic>
-        <p:nvPicPr>
-          <p:cNvPr id="18" name="Impact icon" descr="preencoded.png">    </p:cNvPr>
-          <p:cNvPicPr>
-            <a:picLocks noChangeAspect="1"/>
-          </p:cNvPicPr>
-          <p:nvPr/>
-        </p:nvPicPr>
-        <p:blipFill>
-          <a:blip r:embed="rId1"/>
-          <a:stretch>
-            <a:fillRect/>
-          </a:stretch>
-        </p:blipFill>
-        <p:spPr>
-          <a:xfrm>
-            <a:off x="982980" y="5280660"/>
-            <a:ext cx="320040" cy="320040"/>
-          </a:xfrm>
-          <a:prstGeom prst="rect">
-            <a:avLst/>
-          </a:prstGeom>
-        </p:spPr>
-      </p:pic>
-      <p:sp>
-        <p:nvSpPr>
-          <p:cNvPr id="19" name="Impact text"/>
-          <p:cNvSpPr txBox="1"/>
-          <p:nvPr/>
-        </p:nvSpPr>
-        <p:spPr>
-          <a:xfrm>
-            <a:off x="1737360" y="4754880"/>
-            <a:ext cx="9631375" cy="1371600"/>
-          </a:xfrm>
-          <a:prstGeom prst="rect">
-            <a:avLst/>
-          </a:prstGeom>
-          <a:noFill/>
-          <a:ln/>
-        </p:spPr>
-        <p:txBody>
-          <a:bodyPr wrap="square" lIns="0" tIns="0" rIns="0" bIns="0" rtlCol="0" anchor="ctr"/>
-          <a:lstStyle/>
-          <a:p>
-            <a:pPr indent="0" marL="0">
-              <a:buNone/>
-            </a:pPr>
-            <a:r>
-              <a:rPr lang="en-US" sz="1500" b="1" dirty="0">
-                <a:solidFill>
-                  <a:schemeClr val="accent3"/>
-                </a:solidFill>
-              </a:rPr>
-              <a:t>Impact  </a:t>
-            </a:r>
-            <a:pPr indent="0" marL="0">
-              <a:buNone/>
-            </a:pPr>
-            <a:r>
-              <a:rPr lang="en-US" sz="1500" dirty="0">
-                <a:solidFill>
-                  <a:schemeClr val="tx1"/>
-                </a:solidFill>
-              </a:rPr>
-              <a:t>~10% lower bills from operational levers (demo estimate)  ·  ~95 t CO2/yr avoided by levers, ~456 t/yr by rooftop solar  ·  Students see their building's footprint and compete to cut it</a:t>
-            </a:r>
-            <a:endParaRPr lang="en-US" sz="1500" dirty="0"/>
-          </a:p>
-        </p:txBody>
-      </p:sp>
+      <p:graphicFrame>
+        <p:nvGraphicFramePr>
+          <p:cNvPr id="9" name="Comparison table"/>
+          <p:cNvGraphicFramePr>
+            <a:graphicFrameLocks noGrp="1"/>
+          </p:cNvGraphicFramePr>
+          <p:nvPr>
+            <p:extLst>
+              <p:ext uri="{D42A27DB-BD31-4B8C-83A1-F6EECF244321}">
+                <p14:modId xmlns:p14="http://schemas.microsoft.com/office/powerpoint/2010/main" val="1579011935"/>
+              </p:ext>
+            </p:extLst>
+          </p:nvPr>
+        </p:nvGraphicFramePr>
+        <p:xfrm>
+          <a:off x="548640" y="1417320"/>
+          <a:ext cx="11094415" cy="914400"/>
+        </p:xfrm>
+        <a:graphic>
+          <a:graphicData uri="http://schemas.openxmlformats.org/drawingml/2006/table">
+            <a:tbl>
+              <a:tblPr/>
+              <a:tblGrid>
+                <a:gridCol w="3749040"/>
+                <a:gridCol w="2448458"/>
+                <a:gridCol w="2448458"/>
+                <a:gridCol w="2448458"/>
+              </a:tblGrid>
+              <a:tr h="713232">
+                <a:tc>
+                  <a:txBody>
+                    <a:bodyPr/>
+                    <a:lstStyle/>
+                    <a:p>
+                      <a:pPr indent="0" marL="0">
+                        <a:buNone/>
+                      </a:pPr>
+                      <a:endParaRPr lang="en-US" sz="1500" dirty="0">
+                        <a:latin typeface="Calibri" charset="0"/>
+                        <a:ea typeface="Calibri" charset="0"/>
+                        <a:cs typeface="Calibri" charset="0"/>
+                      </a:endParaRPr>
+                    </a:p>
+                  </a:txBody>
+                  <a:tcPr marL="128016" marR="128016" marT="36576" marB="36576">
+                    <a:lnL w="12700" cap="flat" cmpd="sng" algn="ctr">
+                      <a:solidFill>
+                        <a:srgbClr val="E2E4F0"/>
+                      </a:solidFill>
+                      <a:prstDash val="solid"/>
+                      <a:round/>
+                      <a:headEnd type="none" w="med" len="med"/>
+                      <a:tailEnd type="none" w="med" len="med"/>
+                    </a:lnL>
+                    <a:lnR w="12700" cap="flat" cmpd="sng" algn="ctr">
+                      <a:solidFill>
+                        <a:srgbClr val="E2E4F0"/>
+                      </a:solidFill>
+                      <a:prstDash val="solid"/>
+                      <a:round/>
+                      <a:headEnd type="none" w="med" len="med"/>
+                      <a:tailEnd type="none" w="med" len="med"/>
+                    </a:lnR>
+                    <a:lnT w="12700" cap="flat" cmpd="sng" algn="ctr">
+                      <a:solidFill>
+                        <a:srgbClr val="E2E4F0"/>
+                      </a:solidFill>
+                      <a:prstDash val="solid"/>
+                      <a:round/>
+                      <a:headEnd type="none" w="med" len="med"/>
+                      <a:tailEnd type="none" w="med" len="med"/>
+                    </a:lnT>
+                    <a:lnB w="12700" cap="flat" cmpd="sng" algn="ctr">
+                      <a:solidFill>
+                        <a:srgbClr val="E2E4F0"/>
+                      </a:solidFill>
+                      <a:prstDash val="solid"/>
+                      <a:round/>
+                      <a:headEnd type="none" w="med" len="med"/>
+                      <a:tailEnd type="none" w="med" len="med"/>
+                    </a:lnB>
+                    <a:solidFill>
+                      <a:schemeClr val="bg1"/>
+                    </a:solidFill>
+                  </a:tcPr>
+                </a:tc>
+                <a:tc>
+                  <a:txBody>
+                    <a:bodyPr/>
+                    <a:lstStyle/>
+                    <a:p>
+                      <a:pPr algn="ctr" indent="0" marL="0">
+                        <a:buNone/>
+                      </a:pPr>
+                      <a:r>
+                        <a:rPr lang="en-US" sz="1500" b="1" dirty="0">
+                          <a:solidFill>
+                            <a:schemeClr val="bg1"/>
+                          </a:solidFill>
+                          <a:latin typeface="Calibri" pitchFamily="34" charset="0"/>
+                          <a:ea typeface="Calibri" pitchFamily="34" charset="-122"/>
+                          <a:cs typeface="Calibri" pitchFamily="34" charset="-120"/>
+                        </a:rPr>
+                        <a:t>Monthly bill review</a:t>
+                      </a:r>
+                      <a:endParaRPr lang="en-US" sz="1500" dirty="0">
+                        <a:latin typeface="Calibri" charset="0"/>
+                        <a:ea typeface="Calibri" charset="0"/>
+                        <a:cs typeface="Calibri" charset="0"/>
+                      </a:endParaRPr>
+                    </a:p>
+                  </a:txBody>
+                  <a:tcPr marL="128016" marR="128016" marT="36576" marB="36576" anchor="ctr">
+                    <a:lnL w="12700" cap="flat" cmpd="sng" algn="ctr">
+                      <a:solidFill>
+                        <a:srgbClr val="E2E4F0"/>
+                      </a:solidFill>
+                      <a:prstDash val="solid"/>
+                      <a:round/>
+                      <a:headEnd type="none" w="med" len="med"/>
+                      <a:tailEnd type="none" w="med" len="med"/>
+                    </a:lnL>
+                    <a:lnR w="12700" cap="flat" cmpd="sng" algn="ctr">
+                      <a:solidFill>
+                        <a:srgbClr val="E2E4F0"/>
+                      </a:solidFill>
+                      <a:prstDash val="solid"/>
+                      <a:round/>
+                      <a:headEnd type="none" w="med" len="med"/>
+                      <a:tailEnd type="none" w="med" len="med"/>
+                    </a:lnR>
+                    <a:lnT w="12700" cap="flat" cmpd="sng" algn="ctr">
+                      <a:solidFill>
+                        <a:srgbClr val="E2E4F0"/>
+                      </a:solidFill>
+                      <a:prstDash val="solid"/>
+                      <a:round/>
+                      <a:headEnd type="none" w="med" len="med"/>
+                      <a:tailEnd type="none" w="med" len="med"/>
+                    </a:lnT>
+                    <a:lnB w="12700" cap="flat" cmpd="sng" algn="ctr">
+                      <a:solidFill>
+                        <a:srgbClr val="E2E4F0"/>
+                      </a:solidFill>
+                      <a:prstDash val="solid"/>
+                      <a:round/>
+                      <a:headEnd type="none" w="med" len="med"/>
+                      <a:tailEnd type="none" w="med" len="med"/>
+                    </a:lnB>
+                    <a:solidFill>
+                      <a:schemeClr val="tx2"/>
+                    </a:solidFill>
+                  </a:tcPr>
+                </a:tc>
+                <a:tc>
+                  <a:txBody>
+                    <a:bodyPr/>
+                    <a:lstStyle/>
+                    <a:p>
+                      <a:pPr algn="ctr" indent="0" marL="0">
+                        <a:buNone/>
+                      </a:pPr>
+                      <a:r>
+                        <a:rPr lang="en-US" sz="1500" b="1" dirty="0">
+                          <a:solidFill>
+                            <a:schemeClr val="bg1"/>
+                          </a:solidFill>
+                          <a:latin typeface="Calibri" pitchFamily="34" charset="0"/>
+                          <a:ea typeface="Calibri" pitchFamily="34" charset="-122"/>
+                          <a:cs typeface="Calibri" pitchFamily="34" charset="-120"/>
+                        </a:rPr>
+                        <a:t>Cloud energy dashboards</a:t>
+                      </a:r>
+                      <a:endParaRPr lang="en-US" sz="1500" dirty="0">
+                        <a:latin typeface="Calibri" charset="0"/>
+                        <a:ea typeface="Calibri" charset="0"/>
+                        <a:cs typeface="Calibri" charset="0"/>
+                      </a:endParaRPr>
+                    </a:p>
+                  </a:txBody>
+                  <a:tcPr marL="128016" marR="128016" marT="36576" marB="36576" anchor="ctr">
+                    <a:lnL w="12700" cap="flat" cmpd="sng" algn="ctr">
+                      <a:solidFill>
+                        <a:srgbClr val="E2E4F0"/>
+                      </a:solidFill>
+                      <a:prstDash val="solid"/>
+                      <a:round/>
+                      <a:headEnd type="none" w="med" len="med"/>
+                      <a:tailEnd type="none" w="med" len="med"/>
+                    </a:lnL>
+                    <a:lnR w="12700" cap="flat" cmpd="sng" algn="ctr">
+                      <a:solidFill>
+                        <a:srgbClr val="E2E4F0"/>
+                      </a:solidFill>
+                      <a:prstDash val="solid"/>
+                      <a:round/>
+                      <a:headEnd type="none" w="med" len="med"/>
+                      <a:tailEnd type="none" w="med" len="med"/>
+                    </a:lnR>
+                    <a:lnT w="12700" cap="flat" cmpd="sng" algn="ctr">
+                      <a:solidFill>
+                        <a:srgbClr val="E2E4F0"/>
+                      </a:solidFill>
+                      <a:prstDash val="solid"/>
+                      <a:round/>
+                      <a:headEnd type="none" w="med" len="med"/>
+                      <a:tailEnd type="none" w="med" len="med"/>
+                    </a:lnT>
+                    <a:lnB w="12700" cap="flat" cmpd="sng" algn="ctr">
+                      <a:solidFill>
+                        <a:srgbClr val="E2E4F0"/>
+                      </a:solidFill>
+                      <a:prstDash val="solid"/>
+                      <a:round/>
+                      <a:headEnd type="none" w="med" len="med"/>
+                      <a:tailEnd type="none" w="med" len="med"/>
+                    </a:lnB>
+                    <a:solidFill>
+                      <a:schemeClr val="tx2"/>
+                    </a:solidFill>
+                  </a:tcPr>
+                </a:tc>
+                <a:tc>
+                  <a:txBody>
+                    <a:bodyPr/>
+                    <a:lstStyle/>
+                    <a:p>
+                      <a:pPr algn="ctr" indent="0" marL="0">
+                        <a:buNone/>
+                      </a:pPr>
+                      <a:r>
+                        <a:rPr lang="en-US" sz="1500" b="1" dirty="0">
+                          <a:solidFill>
+                            <a:schemeClr val="bg1"/>
+                          </a:solidFill>
+                          <a:latin typeface="Calibri" pitchFamily="34" charset="0"/>
+                          <a:ea typeface="Calibri" pitchFamily="34" charset="-122"/>
+                          <a:cs typeface="Calibri" pitchFamily="34" charset="-120"/>
+                        </a:rPr>
+                        <a:t>WattWise</a:t>
+                      </a:r>
+                      <a:endParaRPr lang="en-US" sz="1500" dirty="0">
+                        <a:latin typeface="Calibri" charset="0"/>
+                        <a:ea typeface="Calibri" charset="0"/>
+                        <a:cs typeface="Calibri" charset="0"/>
+                      </a:endParaRPr>
+                    </a:p>
+                  </a:txBody>
+                  <a:tcPr marL="128016" marR="128016" marT="36576" marB="36576" anchor="ctr">
+                    <a:lnL w="12700" cap="flat" cmpd="sng" algn="ctr">
+                      <a:solidFill>
+                        <a:srgbClr val="E2E4F0"/>
+                      </a:solidFill>
+                      <a:prstDash val="solid"/>
+                      <a:round/>
+                      <a:headEnd type="none" w="med" len="med"/>
+                      <a:tailEnd type="none" w="med" len="med"/>
+                    </a:lnL>
+                    <a:lnR w="12700" cap="flat" cmpd="sng" algn="ctr">
+                      <a:solidFill>
+                        <a:srgbClr val="E2E4F0"/>
+                      </a:solidFill>
+                      <a:prstDash val="solid"/>
+                      <a:round/>
+                      <a:headEnd type="none" w="med" len="med"/>
+                      <a:tailEnd type="none" w="med" len="med"/>
+                    </a:lnR>
+                    <a:lnT w="12700" cap="flat" cmpd="sng" algn="ctr">
+                      <a:solidFill>
+                        <a:srgbClr val="E2E4F0"/>
+                      </a:solidFill>
+                      <a:prstDash val="solid"/>
+                      <a:round/>
+                      <a:headEnd type="none" w="med" len="med"/>
+                      <a:tailEnd type="none" w="med" len="med"/>
+                    </a:lnT>
+                    <a:lnB w="12700" cap="flat" cmpd="sng" algn="ctr">
+                      <a:solidFill>
+                        <a:srgbClr val="E2E4F0"/>
+                      </a:solidFill>
+                      <a:prstDash val="solid"/>
+                      <a:round/>
+                      <a:headEnd type="none" w="med" len="med"/>
+                      <a:tailEnd type="none" w="med" len="med"/>
+                    </a:lnB>
+                    <a:solidFill>
+                      <a:schemeClr val="accent1"/>
+                    </a:solidFill>
+                  </a:tcPr>
+                </a:tc>
+              </a:tr>
+              <a:tr h="713232">
+                <a:tc>
+                  <a:txBody>
+                    <a:bodyPr/>
+                    <a:lstStyle/>
+                    <a:p>
+                      <a:pPr indent="0" marL="0">
+                        <a:buNone/>
+                      </a:pPr>
+                      <a:r>
+                        <a:rPr lang="en-US" sz="1500" b="1" dirty="0">
+                          <a:solidFill>
+                            <a:schemeClr val="tx1"/>
+                          </a:solidFill>
+                          <a:latin typeface="Calibri" pitchFamily="34" charset="0"/>
+                          <a:ea typeface="Calibri" pitchFamily="34" charset="-122"/>
+                          <a:cs typeface="Calibri" pitchFamily="34" charset="-120"/>
+                        </a:rPr>
+                        <a:t>Hourly waste detection</a:t>
+                      </a:r>
+                      <a:endParaRPr lang="en-US" sz="1500" dirty="0">
+                        <a:latin typeface="Calibri" charset="0"/>
+                        <a:ea typeface="Calibri" charset="0"/>
+                        <a:cs typeface="Calibri" charset="0"/>
+                      </a:endParaRPr>
+                    </a:p>
+                  </a:txBody>
+                  <a:tcPr marL="128016" marR="128016" marT="36576" marB="36576" anchor="ctr">
+                    <a:lnL w="12700" cap="flat" cmpd="sng" algn="ctr">
+                      <a:solidFill>
+                        <a:srgbClr val="E2E4F0"/>
+                      </a:solidFill>
+                      <a:prstDash val="solid"/>
+                      <a:round/>
+                      <a:headEnd type="none" w="med" len="med"/>
+                      <a:tailEnd type="none" w="med" len="med"/>
+                    </a:lnL>
+                    <a:lnR w="12700" cap="flat" cmpd="sng" algn="ctr">
+                      <a:solidFill>
+                        <a:srgbClr val="E2E4F0"/>
+                      </a:solidFill>
+                      <a:prstDash val="solid"/>
+                      <a:round/>
+                      <a:headEnd type="none" w="med" len="med"/>
+                      <a:tailEnd type="none" w="med" len="med"/>
+                    </a:lnR>
+                    <a:lnT w="12700" cap="flat" cmpd="sng" algn="ctr">
+                      <a:solidFill>
+                        <a:srgbClr val="E2E4F0"/>
+                      </a:solidFill>
+                      <a:prstDash val="solid"/>
+                      <a:round/>
+                      <a:headEnd type="none" w="med" len="med"/>
+                      <a:tailEnd type="none" w="med" len="med"/>
+                    </a:lnT>
+                    <a:lnB w="12700" cap="flat" cmpd="sng" algn="ctr">
+                      <a:solidFill>
+                        <a:srgbClr val="E2E4F0"/>
+                      </a:solidFill>
+                      <a:prstDash val="solid"/>
+                      <a:round/>
+                      <a:headEnd type="none" w="med" len="med"/>
+                      <a:tailEnd type="none" w="med" len="med"/>
+                    </a:lnB>
+                    <a:solidFill>
+                      <a:schemeClr val="bg2"/>
+                    </a:solidFill>
+                  </a:tcPr>
+                </a:tc>
+                <a:tc>
+                  <a:txBody>
+                    <a:bodyPr/>
+                    <a:lstStyle/>
+                    <a:p>
+                      <a:pPr algn="ctr" indent="0" marL="0">
+                        <a:buNone/>
+                      </a:pPr>
+                      <a:r>
+                        <a:rPr lang="en-US" sz="1500" dirty="0">
+                          <a:solidFill>
+                            <a:srgbClr val="9AA0AE"/>
+                          </a:solidFill>
+                          <a:latin typeface="Calibri" pitchFamily="34" charset="0"/>
+                          <a:ea typeface="Calibri" pitchFamily="34" charset="-122"/>
+                          <a:cs typeface="Calibri" pitchFamily="34" charset="-120"/>
+                        </a:rPr>
+                        <a:t>✗  No</a:t>
+                      </a:r>
+                      <a:endParaRPr lang="en-US" sz="1500" dirty="0">
+                        <a:latin typeface="Calibri" charset="0"/>
+                        <a:ea typeface="Calibri" charset="0"/>
+                        <a:cs typeface="Calibri" charset="0"/>
+                      </a:endParaRPr>
+                    </a:p>
+                  </a:txBody>
+                  <a:tcPr marL="128016" marR="128016" marT="36576" marB="36576" anchor="ctr">
+                    <a:lnL w="12700" cap="flat" cmpd="sng" algn="ctr">
+                      <a:solidFill>
+                        <a:srgbClr val="E2E4F0"/>
+                      </a:solidFill>
+                      <a:prstDash val="solid"/>
+                      <a:round/>
+                      <a:headEnd type="none" w="med" len="med"/>
+                      <a:tailEnd type="none" w="med" len="med"/>
+                    </a:lnL>
+                    <a:lnR w="12700" cap="flat" cmpd="sng" algn="ctr">
+                      <a:solidFill>
+                        <a:srgbClr val="E2E4F0"/>
+                      </a:solidFill>
+                      <a:prstDash val="solid"/>
+                      <a:round/>
+                      <a:headEnd type="none" w="med" len="med"/>
+                      <a:tailEnd type="none" w="med" len="med"/>
+                    </a:lnR>
+                    <a:lnT w="12700" cap="flat" cmpd="sng" algn="ctr">
+                      <a:solidFill>
+                        <a:srgbClr val="E2E4F0"/>
+                      </a:solidFill>
+                      <a:prstDash val="solid"/>
+                      <a:round/>
+                      <a:headEnd type="none" w="med" len="med"/>
+                      <a:tailEnd type="none" w="med" len="med"/>
+                    </a:lnT>
+                    <a:lnB w="12700" cap="flat" cmpd="sng" algn="ctr">
+                      <a:solidFill>
+                        <a:srgbClr val="E2E4F0"/>
+                      </a:solidFill>
+                      <a:prstDash val="solid"/>
+                      <a:round/>
+                      <a:headEnd type="none" w="med" len="med"/>
+                      <a:tailEnd type="none" w="med" len="med"/>
+                    </a:lnB>
+                    <a:solidFill>
+                      <a:schemeClr val="bg1"/>
+                    </a:solidFill>
+                  </a:tcPr>
+                </a:tc>
+                <a:tc>
+                  <a:txBody>
+                    <a:bodyPr/>
+                    <a:lstStyle/>
+                    <a:p>
+                      <a:pPr algn="ctr" indent="0" marL="0">
+                        <a:buNone/>
+                      </a:pPr>
+                      <a:r>
+                        <a:rPr lang="en-US" sz="1500" dirty="0">
+                          <a:solidFill>
+                            <a:srgbClr val="2E7D32"/>
+                          </a:solidFill>
+                          <a:latin typeface="Calibri" pitchFamily="34" charset="0"/>
+                          <a:ea typeface="Calibri" pitchFamily="34" charset="-122"/>
+                          <a:cs typeface="Calibri" pitchFamily="34" charset="-120"/>
+                        </a:rPr>
+                        <a:t>✓  Yes</a:t>
+                      </a:r>
+                      <a:endParaRPr lang="en-US" sz="1500" dirty="0">
+                        <a:latin typeface="Calibri" charset="0"/>
+                        <a:ea typeface="Calibri" charset="0"/>
+                        <a:cs typeface="Calibri" charset="0"/>
+                      </a:endParaRPr>
+                    </a:p>
+                  </a:txBody>
+                  <a:tcPr marL="128016" marR="128016" marT="36576" marB="36576" anchor="ctr">
+                    <a:lnL w="12700" cap="flat" cmpd="sng" algn="ctr">
+                      <a:solidFill>
+                        <a:srgbClr val="E2E4F0"/>
+                      </a:solidFill>
+                      <a:prstDash val="solid"/>
+                      <a:round/>
+                      <a:headEnd type="none" w="med" len="med"/>
+                      <a:tailEnd type="none" w="med" len="med"/>
+                    </a:lnL>
+                    <a:lnR w="12700" cap="flat" cmpd="sng" algn="ctr">
+                      <a:solidFill>
+                        <a:srgbClr val="E2E4F0"/>
+                      </a:solidFill>
+                      <a:prstDash val="solid"/>
+                      <a:round/>
+                      <a:headEnd type="none" w="med" len="med"/>
+                      <a:tailEnd type="none" w="med" len="med"/>
+                    </a:lnR>
+                    <a:lnT w="12700" cap="flat" cmpd="sng" algn="ctr">
+                      <a:solidFill>
+                        <a:srgbClr val="E2E4F0"/>
+                      </a:solidFill>
+                      <a:prstDash val="solid"/>
+                      <a:round/>
+                      <a:headEnd type="none" w="med" len="med"/>
+                      <a:tailEnd type="none" w="med" len="med"/>
+                    </a:lnT>
+                    <a:lnB w="12700" cap="flat" cmpd="sng" algn="ctr">
+                      <a:solidFill>
+                        <a:srgbClr val="E2E4F0"/>
+                      </a:solidFill>
+                      <a:prstDash val="solid"/>
+                      <a:round/>
+                      <a:headEnd type="none" w="med" len="med"/>
+                      <a:tailEnd type="none" w="med" len="med"/>
+                    </a:lnB>
+                    <a:solidFill>
+                      <a:schemeClr val="bg1"/>
+                    </a:solidFill>
+                  </a:tcPr>
+                </a:tc>
+                <a:tc>
+                  <a:txBody>
+                    <a:bodyPr/>
+                    <a:lstStyle/>
+                    <a:p>
+                      <a:pPr algn="ctr" indent="0" marL="0">
+                        <a:buNone/>
+                      </a:pPr>
+                      <a:r>
+                        <a:rPr lang="en-US" sz="1500" b="1" dirty="0">
+                          <a:solidFill>
+                            <a:srgbClr val="2E7D32"/>
+                          </a:solidFill>
+                          <a:latin typeface="Calibri" pitchFamily="34" charset="0"/>
+                          <a:ea typeface="Calibri" pitchFamily="34" charset="-122"/>
+                          <a:cs typeface="Calibri" pitchFamily="34" charset="-120"/>
+                        </a:rPr>
+                        <a:t>✓  Yes</a:t>
+                      </a:r>
+                      <a:endParaRPr lang="en-US" sz="1500" dirty="0">
+                        <a:latin typeface="Calibri" charset="0"/>
+                        <a:ea typeface="Calibri" charset="0"/>
+                        <a:cs typeface="Calibri" charset="0"/>
+                      </a:endParaRPr>
+                    </a:p>
+                  </a:txBody>
+                  <a:tcPr marL="128016" marR="128016" marT="36576" marB="36576" anchor="ctr">
+                    <a:lnL w="12700" cap="flat" cmpd="sng" algn="ctr">
+                      <a:solidFill>
+                        <a:srgbClr val="E2E4F0"/>
+                      </a:solidFill>
+                      <a:prstDash val="solid"/>
+                      <a:round/>
+                      <a:headEnd type="none" w="med" len="med"/>
+                      <a:tailEnd type="none" w="med" len="med"/>
+                    </a:lnL>
+                    <a:lnR w="12700" cap="flat" cmpd="sng" algn="ctr">
+                      <a:solidFill>
+                        <a:srgbClr val="E2E4F0"/>
+                      </a:solidFill>
+                      <a:prstDash val="solid"/>
+                      <a:round/>
+                      <a:headEnd type="none" w="med" len="med"/>
+                      <a:tailEnd type="none" w="med" len="med"/>
+                    </a:lnR>
+                    <a:lnT w="12700" cap="flat" cmpd="sng" algn="ctr">
+                      <a:solidFill>
+                        <a:srgbClr val="E2E4F0"/>
+                      </a:solidFill>
+                      <a:prstDash val="solid"/>
+                      <a:round/>
+                      <a:headEnd type="none" w="med" len="med"/>
+                      <a:tailEnd type="none" w="med" len="med"/>
+                    </a:lnT>
+                    <a:lnB w="12700" cap="flat" cmpd="sng" algn="ctr">
+                      <a:solidFill>
+                        <a:srgbClr val="E2E4F0"/>
+                      </a:solidFill>
+                      <a:prstDash val="solid"/>
+                      <a:round/>
+                      <a:headEnd type="none" w="med" len="med"/>
+                      <a:tailEnd type="none" w="med" len="med"/>
+                    </a:lnB>
+                    <a:solidFill>
+                      <a:schemeClr val="accent2"/>
+                    </a:solidFill>
+                  </a:tcPr>
+                </a:tc>
+              </a:tr>
+              <a:tr h="713232">
+                <a:tc>
+                  <a:txBody>
+                    <a:bodyPr/>
+                    <a:lstStyle/>
+                    <a:p>
+                      <a:pPr indent="0" marL="0">
+                        <a:buNone/>
+                      </a:pPr>
+                      <a:r>
+                        <a:rPr lang="en-US" sz="1500" b="1" dirty="0">
+                          <a:solidFill>
+                            <a:schemeClr val="tx1"/>
+                          </a:solidFill>
+                          <a:latin typeface="Calibri" pitchFamily="34" charset="0"/>
+                          <a:ea typeface="Calibri" pitchFamily="34" charset="-122"/>
+                          <a:cs typeface="Calibri" pitchFamily="34" charset="-120"/>
+                        </a:rPr>
+                        <a:t>Explains every alert &amp; forecast</a:t>
+                      </a:r>
+                      <a:endParaRPr lang="en-US" sz="1500" dirty="0">
+                        <a:latin typeface="Calibri" charset="0"/>
+                        <a:ea typeface="Calibri" charset="0"/>
+                        <a:cs typeface="Calibri" charset="0"/>
+                      </a:endParaRPr>
+                    </a:p>
+                  </a:txBody>
+                  <a:tcPr marL="128016" marR="128016" marT="36576" marB="36576" anchor="ctr">
+                    <a:lnL w="12700" cap="flat" cmpd="sng" algn="ctr">
+                      <a:solidFill>
+                        <a:srgbClr val="E2E4F0"/>
+                      </a:solidFill>
+                      <a:prstDash val="solid"/>
+                      <a:round/>
+                      <a:headEnd type="none" w="med" len="med"/>
+                      <a:tailEnd type="none" w="med" len="med"/>
+                    </a:lnL>
+                    <a:lnR w="12700" cap="flat" cmpd="sng" algn="ctr">
+                      <a:solidFill>
+                        <a:srgbClr val="E2E4F0"/>
+                      </a:solidFill>
+                      <a:prstDash val="solid"/>
+                      <a:round/>
+                      <a:headEnd type="none" w="med" len="med"/>
+                      <a:tailEnd type="none" w="med" len="med"/>
+                    </a:lnR>
+                    <a:lnT w="12700" cap="flat" cmpd="sng" algn="ctr">
+                      <a:solidFill>
+                        <a:srgbClr val="E2E4F0"/>
+                      </a:solidFill>
+                      <a:prstDash val="solid"/>
+                      <a:round/>
+                      <a:headEnd type="none" w="med" len="med"/>
+                      <a:tailEnd type="none" w="med" len="med"/>
+                    </a:lnT>
+                    <a:lnB w="12700" cap="flat" cmpd="sng" algn="ctr">
+                      <a:solidFill>
+                        <a:srgbClr val="E2E4F0"/>
+                      </a:solidFill>
+                      <a:prstDash val="solid"/>
+                      <a:round/>
+                      <a:headEnd type="none" w="med" len="med"/>
+                      <a:tailEnd type="none" w="med" len="med"/>
+                    </a:lnB>
+                    <a:solidFill>
+                      <a:schemeClr val="bg2"/>
+                    </a:solidFill>
+                  </a:tcPr>
+                </a:tc>
+                <a:tc>
+                  <a:txBody>
+                    <a:bodyPr/>
+                    <a:lstStyle/>
+                    <a:p>
+                      <a:pPr algn="ctr" indent="0" marL="0">
+                        <a:buNone/>
+                      </a:pPr>
+                      <a:r>
+                        <a:rPr lang="en-US" sz="1500" dirty="0">
+                          <a:solidFill>
+                            <a:srgbClr val="9AA0AE"/>
+                          </a:solidFill>
+                          <a:latin typeface="Calibri" pitchFamily="34" charset="0"/>
+                          <a:ea typeface="Calibri" pitchFamily="34" charset="-122"/>
+                          <a:cs typeface="Calibri" pitchFamily="34" charset="-120"/>
+                        </a:rPr>
+                        <a:t>✗  No</a:t>
+                      </a:r>
+                      <a:endParaRPr lang="en-US" sz="1500" dirty="0">
+                        <a:latin typeface="Calibri" charset="0"/>
+                        <a:ea typeface="Calibri" charset="0"/>
+                        <a:cs typeface="Calibri" charset="0"/>
+                      </a:endParaRPr>
+                    </a:p>
+                  </a:txBody>
+                  <a:tcPr marL="128016" marR="128016" marT="36576" marB="36576" anchor="ctr">
+                    <a:lnL w="12700" cap="flat" cmpd="sng" algn="ctr">
+                      <a:solidFill>
+                        <a:srgbClr val="E2E4F0"/>
+                      </a:solidFill>
+                      <a:prstDash val="solid"/>
+                      <a:round/>
+                      <a:headEnd type="none" w="med" len="med"/>
+                      <a:tailEnd type="none" w="med" len="med"/>
+                    </a:lnL>
+                    <a:lnR w="12700" cap="flat" cmpd="sng" algn="ctr">
+                      <a:solidFill>
+                        <a:srgbClr val="E2E4F0"/>
+                      </a:solidFill>
+                      <a:prstDash val="solid"/>
+                      <a:round/>
+                      <a:headEnd type="none" w="med" len="med"/>
+                      <a:tailEnd type="none" w="med" len="med"/>
+                    </a:lnR>
+                    <a:lnT w="12700" cap="flat" cmpd="sng" algn="ctr">
+                      <a:solidFill>
+                        <a:srgbClr val="E2E4F0"/>
+                      </a:solidFill>
+                      <a:prstDash val="solid"/>
+                      <a:round/>
+                      <a:headEnd type="none" w="med" len="med"/>
+                      <a:tailEnd type="none" w="med" len="med"/>
+                    </a:lnT>
+                    <a:lnB w="12700" cap="flat" cmpd="sng" algn="ctr">
+                      <a:solidFill>
+                        <a:srgbClr val="E2E4F0"/>
+                      </a:solidFill>
+                      <a:prstDash val="solid"/>
+                      <a:round/>
+                      <a:headEnd type="none" w="med" len="med"/>
+                      <a:tailEnd type="none" w="med" len="med"/>
+                    </a:lnB>
+                    <a:solidFill>
+                      <a:schemeClr val="bg1"/>
+                    </a:solidFill>
+                  </a:tcPr>
+                </a:tc>
+                <a:tc>
+                  <a:txBody>
+                    <a:bodyPr/>
+                    <a:lstStyle/>
+                    <a:p>
+                      <a:pPr algn="ctr" indent="0" marL="0">
+                        <a:buNone/>
+                      </a:pPr>
+                      <a:r>
+                        <a:rPr lang="en-US" sz="1500" dirty="0">
+                          <a:solidFill>
+                            <a:srgbClr val="B26A00"/>
+                          </a:solidFill>
+                          <a:latin typeface="Calibri" pitchFamily="34" charset="0"/>
+                          <a:ea typeface="Calibri" pitchFamily="34" charset="-122"/>
+                          <a:cs typeface="Calibri" pitchFamily="34" charset="-120"/>
+                        </a:rPr>
+                        <a:t>◐  Partial</a:t>
+                      </a:r>
+                      <a:endParaRPr lang="en-US" sz="1500" dirty="0">
+                        <a:latin typeface="Calibri" charset="0"/>
+                        <a:ea typeface="Calibri" charset="0"/>
+                        <a:cs typeface="Calibri" charset="0"/>
+                      </a:endParaRPr>
+                    </a:p>
+                  </a:txBody>
+                  <a:tcPr marL="128016" marR="128016" marT="36576" marB="36576" anchor="ctr">
+                    <a:lnL w="12700" cap="flat" cmpd="sng" algn="ctr">
+                      <a:solidFill>
+                        <a:srgbClr val="E2E4F0"/>
+                      </a:solidFill>
+                      <a:prstDash val="solid"/>
+                      <a:round/>
+                      <a:headEnd type="none" w="med" len="med"/>
+                      <a:tailEnd type="none" w="med" len="med"/>
+                    </a:lnL>
+                    <a:lnR w="12700" cap="flat" cmpd="sng" algn="ctr">
+                      <a:solidFill>
+                        <a:srgbClr val="E2E4F0"/>
+                      </a:solidFill>
+                      <a:prstDash val="solid"/>
+                      <a:round/>
+                      <a:headEnd type="none" w="med" len="med"/>
+                      <a:tailEnd type="none" w="med" len="med"/>
+                    </a:lnR>
+                    <a:lnT w="12700" cap="flat" cmpd="sng" algn="ctr">
+                      <a:solidFill>
+                        <a:srgbClr val="E2E4F0"/>
+                      </a:solidFill>
+                      <a:prstDash val="solid"/>
+                      <a:round/>
+                      <a:headEnd type="none" w="med" len="med"/>
+                      <a:tailEnd type="none" w="med" len="med"/>
+                    </a:lnT>
+                    <a:lnB w="12700" cap="flat" cmpd="sng" algn="ctr">
+                      <a:solidFill>
+                        <a:srgbClr val="E2E4F0"/>
+                      </a:solidFill>
+                      <a:prstDash val="solid"/>
+                      <a:round/>
+                      <a:headEnd type="none" w="med" len="med"/>
+                      <a:tailEnd type="none" w="med" len="med"/>
+                    </a:lnB>
+                    <a:solidFill>
+                      <a:schemeClr val="bg1"/>
+                    </a:solidFill>
+                  </a:tcPr>
+                </a:tc>
+                <a:tc>
+                  <a:txBody>
+                    <a:bodyPr/>
+                    <a:lstStyle/>
+                    <a:p>
+                      <a:pPr algn="ctr" indent="0" marL="0">
+                        <a:buNone/>
+                      </a:pPr>
+                      <a:r>
+                        <a:rPr lang="en-US" sz="1500" b="1" dirty="0">
+                          <a:solidFill>
+                            <a:srgbClr val="2E7D32"/>
+                          </a:solidFill>
+                          <a:latin typeface="Calibri" pitchFamily="34" charset="0"/>
+                          <a:ea typeface="Calibri" pitchFamily="34" charset="-122"/>
+                          <a:cs typeface="Calibri" pitchFamily="34" charset="-120"/>
+                        </a:rPr>
+                        <a:t>✓  Yes</a:t>
+                      </a:r>
+                      <a:endParaRPr lang="en-US" sz="1500" dirty="0">
+                        <a:latin typeface="Calibri" charset="0"/>
+                        <a:ea typeface="Calibri" charset="0"/>
+                        <a:cs typeface="Calibri" charset="0"/>
+                      </a:endParaRPr>
+                    </a:p>
+                  </a:txBody>
+                  <a:tcPr marL="128016" marR="128016" marT="36576" marB="36576" anchor="ctr">
+                    <a:lnL w="12700" cap="flat" cmpd="sng" algn="ctr">
+                      <a:solidFill>
+                        <a:srgbClr val="E2E4F0"/>
+                      </a:solidFill>
+                      <a:prstDash val="solid"/>
+                      <a:round/>
+                      <a:headEnd type="none" w="med" len="med"/>
+                      <a:tailEnd type="none" w="med" len="med"/>
+                    </a:lnL>
+                    <a:lnR w="12700" cap="flat" cmpd="sng" algn="ctr">
+                      <a:solidFill>
+                        <a:srgbClr val="E2E4F0"/>
+                      </a:solidFill>
+                      <a:prstDash val="solid"/>
+                      <a:round/>
+                      <a:headEnd type="none" w="med" len="med"/>
+                      <a:tailEnd type="none" w="med" len="med"/>
+                    </a:lnR>
+                    <a:lnT w="12700" cap="flat" cmpd="sng" algn="ctr">
+                      <a:solidFill>
+                        <a:srgbClr val="E2E4F0"/>
+                      </a:solidFill>
+                      <a:prstDash val="solid"/>
+                      <a:round/>
+                      <a:headEnd type="none" w="med" len="med"/>
+                      <a:tailEnd type="none" w="med" len="med"/>
+                    </a:lnT>
+                    <a:lnB w="12700" cap="flat" cmpd="sng" algn="ctr">
+                      <a:solidFill>
+                        <a:srgbClr val="E2E4F0"/>
+                      </a:solidFill>
+                      <a:prstDash val="solid"/>
+                      <a:round/>
+                      <a:headEnd type="none" w="med" len="med"/>
+                      <a:tailEnd type="none" w="med" len="med"/>
+                    </a:lnB>
+                    <a:solidFill>
+                      <a:schemeClr val="accent2"/>
+                    </a:solidFill>
+                  </a:tcPr>
+                </a:tc>
+              </a:tr>
+              <a:tr h="713232">
+                <a:tc>
+                  <a:txBody>
+                    <a:bodyPr/>
+                    <a:lstStyle/>
+                    <a:p>
+                      <a:pPr indent="0" marL="0">
+                        <a:buNone/>
+                      </a:pPr>
+                      <a:r>
+                        <a:rPr lang="en-US" sz="1500" b="1" dirty="0">
+                          <a:solidFill>
+                            <a:schemeClr val="tx1"/>
+                          </a:solidFill>
+                          <a:latin typeface="Calibri" pitchFamily="34" charset="0"/>
+                          <a:ea typeface="Calibri" pitchFamily="34" charset="-122"/>
+                          <a:cs typeface="Calibri" pitchFamily="34" charset="-120"/>
+                        </a:rPr>
+                        <a:t>Forecast accuracy shown</a:t>
+                      </a:r>
+                      <a:endParaRPr lang="en-US" sz="1500" dirty="0">
+                        <a:latin typeface="Calibri" charset="0"/>
+                        <a:ea typeface="Calibri" charset="0"/>
+                        <a:cs typeface="Calibri" charset="0"/>
+                      </a:endParaRPr>
+                    </a:p>
+                  </a:txBody>
+                  <a:tcPr marL="128016" marR="128016" marT="36576" marB="36576" anchor="ctr">
+                    <a:lnL w="12700" cap="flat" cmpd="sng" algn="ctr">
+                      <a:solidFill>
+                        <a:srgbClr val="E2E4F0"/>
+                      </a:solidFill>
+                      <a:prstDash val="solid"/>
+                      <a:round/>
+                      <a:headEnd type="none" w="med" len="med"/>
+                      <a:tailEnd type="none" w="med" len="med"/>
+                    </a:lnL>
+                    <a:lnR w="12700" cap="flat" cmpd="sng" algn="ctr">
+                      <a:solidFill>
+                        <a:srgbClr val="E2E4F0"/>
+                      </a:solidFill>
+                      <a:prstDash val="solid"/>
+                      <a:round/>
+                      <a:headEnd type="none" w="med" len="med"/>
+                      <a:tailEnd type="none" w="med" len="med"/>
+                    </a:lnR>
+                    <a:lnT w="12700" cap="flat" cmpd="sng" algn="ctr">
+                      <a:solidFill>
+                        <a:srgbClr val="E2E4F0"/>
+                      </a:solidFill>
+                      <a:prstDash val="solid"/>
+                      <a:round/>
+                      <a:headEnd type="none" w="med" len="med"/>
+                      <a:tailEnd type="none" w="med" len="med"/>
+                    </a:lnT>
+                    <a:lnB w="12700" cap="flat" cmpd="sng" algn="ctr">
+                      <a:solidFill>
+                        <a:srgbClr val="E2E4F0"/>
+                      </a:solidFill>
+                      <a:prstDash val="solid"/>
+                      <a:round/>
+                      <a:headEnd type="none" w="med" len="med"/>
+                      <a:tailEnd type="none" w="med" len="med"/>
+                    </a:lnB>
+                    <a:solidFill>
+                      <a:schemeClr val="bg2"/>
+                    </a:solidFill>
+                  </a:tcPr>
+                </a:tc>
+                <a:tc>
+                  <a:txBody>
+                    <a:bodyPr/>
+                    <a:lstStyle/>
+                    <a:p>
+                      <a:pPr algn="ctr" indent="0" marL="0">
+                        <a:buNone/>
+                      </a:pPr>
+                      <a:r>
+                        <a:rPr lang="en-US" sz="1500" dirty="0">
+                          <a:solidFill>
+                            <a:srgbClr val="9AA0AE"/>
+                          </a:solidFill>
+                          <a:latin typeface="Calibri" pitchFamily="34" charset="0"/>
+                          <a:ea typeface="Calibri" pitchFamily="34" charset="-122"/>
+                          <a:cs typeface="Calibri" pitchFamily="34" charset="-120"/>
+                        </a:rPr>
+                        <a:t>✗  No</a:t>
+                      </a:r>
+                      <a:endParaRPr lang="en-US" sz="1500" dirty="0">
+                        <a:latin typeface="Calibri" charset="0"/>
+                        <a:ea typeface="Calibri" charset="0"/>
+                        <a:cs typeface="Calibri" charset="0"/>
+                      </a:endParaRPr>
+                    </a:p>
+                  </a:txBody>
+                  <a:tcPr marL="128016" marR="128016" marT="36576" marB="36576" anchor="ctr">
+                    <a:lnL w="12700" cap="flat" cmpd="sng" algn="ctr">
+                      <a:solidFill>
+                        <a:srgbClr val="E2E4F0"/>
+                      </a:solidFill>
+                      <a:prstDash val="solid"/>
+                      <a:round/>
+                      <a:headEnd type="none" w="med" len="med"/>
+                      <a:tailEnd type="none" w="med" len="med"/>
+                    </a:lnL>
+                    <a:lnR w="12700" cap="flat" cmpd="sng" algn="ctr">
+                      <a:solidFill>
+                        <a:srgbClr val="E2E4F0"/>
+                      </a:solidFill>
+                      <a:prstDash val="solid"/>
+                      <a:round/>
+                      <a:headEnd type="none" w="med" len="med"/>
+                      <a:tailEnd type="none" w="med" len="med"/>
+                    </a:lnR>
+                    <a:lnT w="12700" cap="flat" cmpd="sng" algn="ctr">
+                      <a:solidFill>
+                        <a:srgbClr val="E2E4F0"/>
+                      </a:solidFill>
+                      <a:prstDash val="solid"/>
+                      <a:round/>
+                      <a:headEnd type="none" w="med" len="med"/>
+                      <a:tailEnd type="none" w="med" len="med"/>
+                    </a:lnT>
+                    <a:lnB w="12700" cap="flat" cmpd="sng" algn="ctr">
+                      <a:solidFill>
+                        <a:srgbClr val="E2E4F0"/>
+                      </a:solidFill>
+                      <a:prstDash val="solid"/>
+                      <a:round/>
+                      <a:headEnd type="none" w="med" len="med"/>
+                      <a:tailEnd type="none" w="med" len="med"/>
+                    </a:lnB>
+                    <a:solidFill>
+                      <a:schemeClr val="bg1"/>
+                    </a:solidFill>
+                  </a:tcPr>
+                </a:tc>
+                <a:tc>
+                  <a:txBody>
+                    <a:bodyPr/>
+                    <a:lstStyle/>
+                    <a:p>
+                      <a:pPr algn="ctr" indent="0" marL="0">
+                        <a:buNone/>
+                      </a:pPr>
+                      <a:r>
+                        <a:rPr lang="en-US" sz="1500" dirty="0">
+                          <a:solidFill>
+                            <a:schemeClr val="tx1"/>
+                          </a:solidFill>
+                          <a:latin typeface="Calibri" pitchFamily="34" charset="0"/>
+                          <a:ea typeface="Calibri" pitchFamily="34" charset="-122"/>
+                          <a:cs typeface="Calibri" pitchFamily="34" charset="-120"/>
+                        </a:rPr>
+                        <a:t>Varies</a:t>
+                      </a:r>
+                      <a:endParaRPr lang="en-US" sz="1500" dirty="0">
+                        <a:latin typeface="Calibri" charset="0"/>
+                        <a:ea typeface="Calibri" charset="0"/>
+                        <a:cs typeface="Calibri" charset="0"/>
+                      </a:endParaRPr>
+                    </a:p>
+                  </a:txBody>
+                  <a:tcPr marL="128016" marR="128016" marT="36576" marB="36576" anchor="ctr">
+                    <a:lnL w="12700" cap="flat" cmpd="sng" algn="ctr">
+                      <a:solidFill>
+                        <a:srgbClr val="E2E4F0"/>
+                      </a:solidFill>
+                      <a:prstDash val="solid"/>
+                      <a:round/>
+                      <a:headEnd type="none" w="med" len="med"/>
+                      <a:tailEnd type="none" w="med" len="med"/>
+                    </a:lnL>
+                    <a:lnR w="12700" cap="flat" cmpd="sng" algn="ctr">
+                      <a:solidFill>
+                        <a:srgbClr val="E2E4F0"/>
+                      </a:solidFill>
+                      <a:prstDash val="solid"/>
+                      <a:round/>
+                      <a:headEnd type="none" w="med" len="med"/>
+                      <a:tailEnd type="none" w="med" len="med"/>
+                    </a:lnR>
+                    <a:lnT w="12700" cap="flat" cmpd="sng" algn="ctr">
+                      <a:solidFill>
+                        <a:srgbClr val="E2E4F0"/>
+                      </a:solidFill>
+                      <a:prstDash val="solid"/>
+                      <a:round/>
+                      <a:headEnd type="none" w="med" len="med"/>
+                      <a:tailEnd type="none" w="med" len="med"/>
+                    </a:lnT>
+                    <a:lnB w="12700" cap="flat" cmpd="sng" algn="ctr">
+                      <a:solidFill>
+                        <a:srgbClr val="E2E4F0"/>
+                      </a:solidFill>
+                      <a:prstDash val="solid"/>
+                      <a:round/>
+                      <a:headEnd type="none" w="med" len="med"/>
+                      <a:tailEnd type="none" w="med" len="med"/>
+                    </a:lnB>
+                    <a:solidFill>
+                      <a:schemeClr val="bg1"/>
+                    </a:solidFill>
+                  </a:tcPr>
+                </a:tc>
+                <a:tc>
+                  <a:txBody>
+                    <a:bodyPr/>
+                    <a:lstStyle/>
+                    <a:p>
+                      <a:pPr algn="ctr" indent="0" marL="0">
+                        <a:buNone/>
+                      </a:pPr>
+                      <a:r>
+                        <a:rPr lang="en-US" sz="1500" b="1" dirty="0">
+                          <a:solidFill>
+                            <a:schemeClr val="accent3"/>
+                          </a:solidFill>
+                          <a:latin typeface="Calibri" pitchFamily="34" charset="0"/>
+                          <a:ea typeface="Calibri" pitchFamily="34" charset="-122"/>
+                          <a:cs typeface="Calibri" pitchFamily="34" charset="-120"/>
+                        </a:rPr>
+                        <a:t>5.6% MAPE (sim)</a:t>
+                      </a:r>
+                      <a:endParaRPr lang="en-US" sz="1500" dirty="0">
+                        <a:latin typeface="Calibri" charset="0"/>
+                        <a:ea typeface="Calibri" charset="0"/>
+                        <a:cs typeface="Calibri" charset="0"/>
+                      </a:endParaRPr>
+                    </a:p>
+                  </a:txBody>
+                  <a:tcPr marL="128016" marR="128016" marT="36576" marB="36576" anchor="ctr">
+                    <a:lnL w="12700" cap="flat" cmpd="sng" algn="ctr">
+                      <a:solidFill>
+                        <a:srgbClr val="E2E4F0"/>
+                      </a:solidFill>
+                      <a:prstDash val="solid"/>
+                      <a:round/>
+                      <a:headEnd type="none" w="med" len="med"/>
+                      <a:tailEnd type="none" w="med" len="med"/>
+                    </a:lnL>
+                    <a:lnR w="12700" cap="flat" cmpd="sng" algn="ctr">
+                      <a:solidFill>
+                        <a:srgbClr val="E2E4F0"/>
+                      </a:solidFill>
+                      <a:prstDash val="solid"/>
+                      <a:round/>
+                      <a:headEnd type="none" w="med" len="med"/>
+                      <a:tailEnd type="none" w="med" len="med"/>
+                    </a:lnR>
+                    <a:lnT w="12700" cap="flat" cmpd="sng" algn="ctr">
+                      <a:solidFill>
+                        <a:srgbClr val="E2E4F0"/>
+                      </a:solidFill>
+                      <a:prstDash val="solid"/>
+                      <a:round/>
+                      <a:headEnd type="none" w="med" len="med"/>
+                      <a:tailEnd type="none" w="med" len="med"/>
+                    </a:lnT>
+                    <a:lnB w="12700" cap="flat" cmpd="sng" algn="ctr">
+                      <a:solidFill>
+                        <a:srgbClr val="E2E4F0"/>
+                      </a:solidFill>
+                      <a:prstDash val="solid"/>
+                      <a:round/>
+                      <a:headEnd type="none" w="med" len="med"/>
+                      <a:tailEnd type="none" w="med" len="med"/>
+                    </a:lnB>
+                    <a:solidFill>
+                      <a:schemeClr val="accent2"/>
+                    </a:solidFill>
+                  </a:tcPr>
+                </a:tc>
+              </a:tr>
+              <a:tr h="713232">
+                <a:tc>
+                  <a:txBody>
+                    <a:bodyPr/>
+                    <a:lstStyle/>
+                    <a:p>
+                      <a:pPr indent="0" marL="0">
+                        <a:buNone/>
+                      </a:pPr>
+                      <a:r>
+                        <a:rPr lang="en-US" sz="1500" b="1" dirty="0">
+                          <a:solidFill>
+                            <a:schemeClr val="tx1"/>
+                          </a:solidFill>
+                          <a:latin typeface="Calibri" pitchFamily="34" charset="0"/>
+                          <a:ea typeface="Calibri" pitchFamily="34" charset="-122"/>
+                          <a:cs typeface="Calibri" pitchFamily="34" charset="-120"/>
+                        </a:rPr>
+                        <a:t>Solar payback + what-if</a:t>
+                      </a:r>
+                      <a:endParaRPr lang="en-US" sz="1500" dirty="0">
+                        <a:latin typeface="Calibri" charset="0"/>
+                        <a:ea typeface="Calibri" charset="0"/>
+                        <a:cs typeface="Calibri" charset="0"/>
+                      </a:endParaRPr>
+                    </a:p>
+                  </a:txBody>
+                  <a:tcPr marL="128016" marR="128016" marT="36576" marB="36576" anchor="ctr">
+                    <a:lnL w="12700" cap="flat" cmpd="sng" algn="ctr">
+                      <a:solidFill>
+                        <a:srgbClr val="E2E4F0"/>
+                      </a:solidFill>
+                      <a:prstDash val="solid"/>
+                      <a:round/>
+                      <a:headEnd type="none" w="med" len="med"/>
+                      <a:tailEnd type="none" w="med" len="med"/>
+                    </a:lnL>
+                    <a:lnR w="12700" cap="flat" cmpd="sng" algn="ctr">
+                      <a:solidFill>
+                        <a:srgbClr val="E2E4F0"/>
+                      </a:solidFill>
+                      <a:prstDash val="solid"/>
+                      <a:round/>
+                      <a:headEnd type="none" w="med" len="med"/>
+                      <a:tailEnd type="none" w="med" len="med"/>
+                    </a:lnR>
+                    <a:lnT w="12700" cap="flat" cmpd="sng" algn="ctr">
+                      <a:solidFill>
+                        <a:srgbClr val="E2E4F0"/>
+                      </a:solidFill>
+                      <a:prstDash val="solid"/>
+                      <a:round/>
+                      <a:headEnd type="none" w="med" len="med"/>
+                      <a:tailEnd type="none" w="med" len="med"/>
+                    </a:lnT>
+                    <a:lnB w="12700" cap="flat" cmpd="sng" algn="ctr">
+                      <a:solidFill>
+                        <a:srgbClr val="E2E4F0"/>
+                      </a:solidFill>
+                      <a:prstDash val="solid"/>
+                      <a:round/>
+                      <a:headEnd type="none" w="med" len="med"/>
+                      <a:tailEnd type="none" w="med" len="med"/>
+                    </a:lnB>
+                    <a:solidFill>
+                      <a:schemeClr val="bg2"/>
+                    </a:solidFill>
+                  </a:tcPr>
+                </a:tc>
+                <a:tc>
+                  <a:txBody>
+                    <a:bodyPr/>
+                    <a:lstStyle/>
+                    <a:p>
+                      <a:pPr algn="ctr" indent="0" marL="0">
+                        <a:buNone/>
+                      </a:pPr>
+                      <a:r>
+                        <a:rPr lang="en-US" sz="1500" dirty="0">
+                          <a:solidFill>
+                            <a:srgbClr val="9AA0AE"/>
+                          </a:solidFill>
+                          <a:latin typeface="Calibri" pitchFamily="34" charset="0"/>
+                          <a:ea typeface="Calibri" pitchFamily="34" charset="-122"/>
+                          <a:cs typeface="Calibri" pitchFamily="34" charset="-120"/>
+                        </a:rPr>
+                        <a:t>✗  No</a:t>
+                      </a:r>
+                      <a:endParaRPr lang="en-US" sz="1500" dirty="0">
+                        <a:latin typeface="Calibri" charset="0"/>
+                        <a:ea typeface="Calibri" charset="0"/>
+                        <a:cs typeface="Calibri" charset="0"/>
+                      </a:endParaRPr>
+                    </a:p>
+                  </a:txBody>
+                  <a:tcPr marL="128016" marR="128016" marT="36576" marB="36576" anchor="ctr">
+                    <a:lnL w="12700" cap="flat" cmpd="sng" algn="ctr">
+                      <a:solidFill>
+                        <a:srgbClr val="E2E4F0"/>
+                      </a:solidFill>
+                      <a:prstDash val="solid"/>
+                      <a:round/>
+                      <a:headEnd type="none" w="med" len="med"/>
+                      <a:tailEnd type="none" w="med" len="med"/>
+                    </a:lnL>
+                    <a:lnR w="12700" cap="flat" cmpd="sng" algn="ctr">
+                      <a:solidFill>
+                        <a:srgbClr val="E2E4F0"/>
+                      </a:solidFill>
+                      <a:prstDash val="solid"/>
+                      <a:round/>
+                      <a:headEnd type="none" w="med" len="med"/>
+                      <a:tailEnd type="none" w="med" len="med"/>
+                    </a:lnR>
+                    <a:lnT w="12700" cap="flat" cmpd="sng" algn="ctr">
+                      <a:solidFill>
+                        <a:srgbClr val="E2E4F0"/>
+                      </a:solidFill>
+                      <a:prstDash val="solid"/>
+                      <a:round/>
+                      <a:headEnd type="none" w="med" len="med"/>
+                      <a:tailEnd type="none" w="med" len="med"/>
+                    </a:lnT>
+                    <a:lnB w="12700" cap="flat" cmpd="sng" algn="ctr">
+                      <a:solidFill>
+                        <a:srgbClr val="E2E4F0"/>
+                      </a:solidFill>
+                      <a:prstDash val="solid"/>
+                      <a:round/>
+                      <a:headEnd type="none" w="med" len="med"/>
+                      <a:tailEnd type="none" w="med" len="med"/>
+                    </a:lnB>
+                    <a:solidFill>
+                      <a:schemeClr val="bg1"/>
+                    </a:solidFill>
+                  </a:tcPr>
+                </a:tc>
+                <a:tc>
+                  <a:txBody>
+                    <a:bodyPr/>
+                    <a:lstStyle/>
+                    <a:p>
+                      <a:pPr algn="ctr" indent="0" marL="0">
+                        <a:buNone/>
+                      </a:pPr>
+                      <a:r>
+                        <a:rPr lang="en-US" sz="1500" dirty="0">
+                          <a:solidFill>
+                            <a:srgbClr val="B26A00"/>
+                          </a:solidFill>
+                          <a:latin typeface="Calibri" pitchFamily="34" charset="0"/>
+                          <a:ea typeface="Calibri" pitchFamily="34" charset="-122"/>
+                          <a:cs typeface="Calibri" pitchFamily="34" charset="-120"/>
+                        </a:rPr>
+                        <a:t>◐  Partial</a:t>
+                      </a:r>
+                      <a:endParaRPr lang="en-US" sz="1500" dirty="0">
+                        <a:latin typeface="Calibri" charset="0"/>
+                        <a:ea typeface="Calibri" charset="0"/>
+                        <a:cs typeface="Calibri" charset="0"/>
+                      </a:endParaRPr>
+                    </a:p>
+                  </a:txBody>
+                  <a:tcPr marL="128016" marR="128016" marT="36576" marB="36576" anchor="ctr">
+                    <a:lnL w="12700" cap="flat" cmpd="sng" algn="ctr">
+                      <a:solidFill>
+                        <a:srgbClr val="E2E4F0"/>
+                      </a:solidFill>
+                      <a:prstDash val="solid"/>
+                      <a:round/>
+                      <a:headEnd type="none" w="med" len="med"/>
+                      <a:tailEnd type="none" w="med" len="med"/>
+                    </a:lnL>
+                    <a:lnR w="12700" cap="flat" cmpd="sng" algn="ctr">
+                      <a:solidFill>
+                        <a:srgbClr val="E2E4F0"/>
+                      </a:solidFill>
+                      <a:prstDash val="solid"/>
+                      <a:round/>
+                      <a:headEnd type="none" w="med" len="med"/>
+                      <a:tailEnd type="none" w="med" len="med"/>
+                    </a:lnR>
+                    <a:lnT w="12700" cap="flat" cmpd="sng" algn="ctr">
+                      <a:solidFill>
+                        <a:srgbClr val="E2E4F0"/>
+                      </a:solidFill>
+                      <a:prstDash val="solid"/>
+                      <a:round/>
+                      <a:headEnd type="none" w="med" len="med"/>
+                      <a:tailEnd type="none" w="med" len="med"/>
+                    </a:lnT>
+                    <a:lnB w="12700" cap="flat" cmpd="sng" algn="ctr">
+                      <a:solidFill>
+                        <a:srgbClr val="E2E4F0"/>
+                      </a:solidFill>
+                      <a:prstDash val="solid"/>
+                      <a:round/>
+                      <a:headEnd type="none" w="med" len="med"/>
+                      <a:tailEnd type="none" w="med" len="med"/>
+                    </a:lnB>
+                    <a:solidFill>
+                      <a:schemeClr val="bg1"/>
+                    </a:solidFill>
+                  </a:tcPr>
+                </a:tc>
+                <a:tc>
+                  <a:txBody>
+                    <a:bodyPr/>
+                    <a:lstStyle/>
+                    <a:p>
+                      <a:pPr algn="ctr" indent="0" marL="0">
+                        <a:buNone/>
+                      </a:pPr>
+                      <a:r>
+                        <a:rPr lang="en-US" sz="1500" b="1" dirty="0">
+                          <a:solidFill>
+                            <a:srgbClr val="2E7D32"/>
+                          </a:solidFill>
+                          <a:latin typeface="Calibri" pitchFamily="34" charset="0"/>
+                          <a:ea typeface="Calibri" pitchFamily="34" charset="-122"/>
+                          <a:cs typeface="Calibri" pitchFamily="34" charset="-120"/>
+                        </a:rPr>
+                        <a:t>✓  Yes</a:t>
+                      </a:r>
+                      <a:endParaRPr lang="en-US" sz="1500" dirty="0">
+                        <a:latin typeface="Calibri" charset="0"/>
+                        <a:ea typeface="Calibri" charset="0"/>
+                        <a:cs typeface="Calibri" charset="0"/>
+                      </a:endParaRPr>
+                    </a:p>
+                  </a:txBody>
+                  <a:tcPr marL="128016" marR="128016" marT="36576" marB="36576" anchor="ctr">
+                    <a:lnL w="12700" cap="flat" cmpd="sng" algn="ctr">
+                      <a:solidFill>
+                        <a:srgbClr val="E2E4F0"/>
+                      </a:solidFill>
+                      <a:prstDash val="solid"/>
+                      <a:round/>
+                      <a:headEnd type="none" w="med" len="med"/>
+                      <a:tailEnd type="none" w="med" len="med"/>
+                    </a:lnL>
+                    <a:lnR w="12700" cap="flat" cmpd="sng" algn="ctr">
+                      <a:solidFill>
+                        <a:srgbClr val="E2E4F0"/>
+                      </a:solidFill>
+                      <a:prstDash val="solid"/>
+                      <a:round/>
+                      <a:headEnd type="none" w="med" len="med"/>
+                      <a:tailEnd type="none" w="med" len="med"/>
+                    </a:lnR>
+                    <a:lnT w="12700" cap="flat" cmpd="sng" algn="ctr">
+                      <a:solidFill>
+                        <a:srgbClr val="E2E4F0"/>
+                      </a:solidFill>
+                      <a:prstDash val="solid"/>
+                      <a:round/>
+                      <a:headEnd type="none" w="med" len="med"/>
+                      <a:tailEnd type="none" w="med" len="med"/>
+                    </a:lnT>
+                    <a:lnB w="12700" cap="flat" cmpd="sng" algn="ctr">
+                      <a:solidFill>
+                        <a:srgbClr val="E2E4F0"/>
+                      </a:solidFill>
+                      <a:prstDash val="solid"/>
+                      <a:round/>
+                      <a:headEnd type="none" w="med" len="med"/>
+                      <a:tailEnd type="none" w="med" len="med"/>
+                    </a:lnB>
+                    <a:solidFill>
+                      <a:schemeClr val="accent2"/>
+                    </a:solidFill>
+                  </a:tcPr>
+                </a:tc>
+              </a:tr>
+              <a:tr h="713232">
+                <a:tc>
+                  <a:txBody>
+                    <a:bodyPr/>
+                    <a:lstStyle/>
+                    <a:p>
+                      <a:pPr indent="0" marL="0">
+                        <a:buNone/>
+                      </a:pPr>
+                      <a:r>
+                        <a:rPr lang="en-US" sz="1500" b="1" dirty="0">
+                          <a:solidFill>
+                            <a:schemeClr val="tx1"/>
+                          </a:solidFill>
+                          <a:latin typeface="Calibri" pitchFamily="34" charset="0"/>
+                          <a:ea typeface="Calibri" pitchFamily="34" charset="-122"/>
+                          <a:cs typeface="Calibri" pitchFamily="34" charset="-120"/>
+                        </a:rPr>
+                        <a:t>Cost / works offline</a:t>
+                      </a:r>
+                      <a:endParaRPr lang="en-US" sz="1500" dirty="0">
+                        <a:latin typeface="Calibri" charset="0"/>
+                        <a:ea typeface="Calibri" charset="0"/>
+                        <a:cs typeface="Calibri" charset="0"/>
+                      </a:endParaRPr>
+                    </a:p>
+                  </a:txBody>
+                  <a:tcPr marL="128016" marR="128016" marT="36576" marB="36576" anchor="ctr">
+                    <a:lnL w="12700" cap="flat" cmpd="sng" algn="ctr">
+                      <a:solidFill>
+                        <a:srgbClr val="E2E4F0"/>
+                      </a:solidFill>
+                      <a:prstDash val="solid"/>
+                      <a:round/>
+                      <a:headEnd type="none" w="med" len="med"/>
+                      <a:tailEnd type="none" w="med" len="med"/>
+                    </a:lnL>
+                    <a:lnR w="12700" cap="flat" cmpd="sng" algn="ctr">
+                      <a:solidFill>
+                        <a:srgbClr val="E2E4F0"/>
+                      </a:solidFill>
+                      <a:prstDash val="solid"/>
+                      <a:round/>
+                      <a:headEnd type="none" w="med" len="med"/>
+                      <a:tailEnd type="none" w="med" len="med"/>
+                    </a:lnR>
+                    <a:lnT w="12700" cap="flat" cmpd="sng" algn="ctr">
+                      <a:solidFill>
+                        <a:srgbClr val="E2E4F0"/>
+                      </a:solidFill>
+                      <a:prstDash val="solid"/>
+                      <a:round/>
+                      <a:headEnd type="none" w="med" len="med"/>
+                      <a:tailEnd type="none" w="med" len="med"/>
+                    </a:lnT>
+                    <a:lnB w="12700" cap="flat" cmpd="sng" algn="ctr">
+                      <a:solidFill>
+                        <a:srgbClr val="E2E4F0"/>
+                      </a:solidFill>
+                      <a:prstDash val="solid"/>
+                      <a:round/>
+                      <a:headEnd type="none" w="med" len="med"/>
+                      <a:tailEnd type="none" w="med" len="med"/>
+                    </a:lnB>
+                    <a:solidFill>
+                      <a:schemeClr val="bg2"/>
+                    </a:solidFill>
+                  </a:tcPr>
+                </a:tc>
+                <a:tc>
+                  <a:txBody>
+                    <a:bodyPr/>
+                    <a:lstStyle/>
+                    <a:p>
+                      <a:pPr algn="ctr" indent="0" marL="0">
+                        <a:buNone/>
+                      </a:pPr>
+                      <a:r>
+                        <a:rPr lang="en-US" sz="1500" dirty="0">
+                          <a:solidFill>
+                            <a:schemeClr val="tx1"/>
+                          </a:solidFill>
+                          <a:latin typeface="Calibri" pitchFamily="34" charset="0"/>
+                          <a:ea typeface="Calibri" pitchFamily="34" charset="-122"/>
+                          <a:cs typeface="Calibri" pitchFamily="34" charset="-120"/>
+                        </a:rPr>
+                        <a:t>₹0</a:t>
+                      </a:r>
+                      <a:endParaRPr lang="en-US" sz="1500" dirty="0">
+                        <a:latin typeface="Calibri" charset="0"/>
+                        <a:ea typeface="Calibri" charset="0"/>
+                        <a:cs typeface="Calibri" charset="0"/>
+                      </a:endParaRPr>
+                    </a:p>
+                  </a:txBody>
+                  <a:tcPr marL="128016" marR="128016" marT="36576" marB="36576" anchor="ctr">
+                    <a:lnL w="12700" cap="flat" cmpd="sng" algn="ctr">
+                      <a:solidFill>
+                        <a:srgbClr val="E2E4F0"/>
+                      </a:solidFill>
+                      <a:prstDash val="solid"/>
+                      <a:round/>
+                      <a:headEnd type="none" w="med" len="med"/>
+                      <a:tailEnd type="none" w="med" len="med"/>
+                    </a:lnL>
+                    <a:lnR w="12700" cap="flat" cmpd="sng" algn="ctr">
+                      <a:solidFill>
+                        <a:srgbClr val="E2E4F0"/>
+                      </a:solidFill>
+                      <a:prstDash val="solid"/>
+                      <a:round/>
+                      <a:headEnd type="none" w="med" len="med"/>
+                      <a:tailEnd type="none" w="med" len="med"/>
+                    </a:lnR>
+                    <a:lnT w="12700" cap="flat" cmpd="sng" algn="ctr">
+                      <a:solidFill>
+                        <a:srgbClr val="E2E4F0"/>
+                      </a:solidFill>
+                      <a:prstDash val="solid"/>
+                      <a:round/>
+                      <a:headEnd type="none" w="med" len="med"/>
+                      <a:tailEnd type="none" w="med" len="med"/>
+                    </a:lnT>
+                    <a:lnB w="12700" cap="flat" cmpd="sng" algn="ctr">
+                      <a:solidFill>
+                        <a:srgbClr val="E2E4F0"/>
+                      </a:solidFill>
+                      <a:prstDash val="solid"/>
+                      <a:round/>
+                      <a:headEnd type="none" w="med" len="med"/>
+                      <a:tailEnd type="none" w="med" len="med"/>
+                    </a:lnB>
+                    <a:solidFill>
+                      <a:schemeClr val="bg1"/>
+                    </a:solidFill>
+                  </a:tcPr>
+                </a:tc>
+                <a:tc>
+                  <a:txBody>
+                    <a:bodyPr/>
+                    <a:lstStyle/>
+                    <a:p>
+                      <a:pPr algn="ctr" indent="0" marL="0">
+                        <a:buNone/>
+                      </a:pPr>
+                      <a:r>
+                        <a:rPr lang="en-US" sz="1500" dirty="0">
+                          <a:solidFill>
+                            <a:schemeClr val="tx1"/>
+                          </a:solidFill>
+                          <a:latin typeface="Calibri" pitchFamily="34" charset="0"/>
+                          <a:ea typeface="Calibri" pitchFamily="34" charset="-122"/>
+                          <a:cs typeface="Calibri" pitchFamily="34" charset="-120"/>
+                        </a:rPr>
+                        <a:t>Subscription</a:t>
+                      </a:r>
+                      <a:endParaRPr lang="en-US" sz="1500" dirty="0">
+                        <a:latin typeface="Calibri" charset="0"/>
+                        <a:ea typeface="Calibri" charset="0"/>
+                        <a:cs typeface="Calibri" charset="0"/>
+                      </a:endParaRPr>
+                    </a:p>
+                  </a:txBody>
+                  <a:tcPr marL="128016" marR="128016" marT="36576" marB="36576" anchor="ctr">
+                    <a:lnL w="12700" cap="flat" cmpd="sng" algn="ctr">
+                      <a:solidFill>
+                        <a:srgbClr val="E2E4F0"/>
+                      </a:solidFill>
+                      <a:prstDash val="solid"/>
+                      <a:round/>
+                      <a:headEnd type="none" w="med" len="med"/>
+                      <a:tailEnd type="none" w="med" len="med"/>
+                    </a:lnL>
+                    <a:lnR w="12700" cap="flat" cmpd="sng" algn="ctr">
+                      <a:solidFill>
+                        <a:srgbClr val="E2E4F0"/>
+                      </a:solidFill>
+                      <a:prstDash val="solid"/>
+                      <a:round/>
+                      <a:headEnd type="none" w="med" len="med"/>
+                      <a:tailEnd type="none" w="med" len="med"/>
+                    </a:lnR>
+                    <a:lnT w="12700" cap="flat" cmpd="sng" algn="ctr">
+                      <a:solidFill>
+                        <a:srgbClr val="E2E4F0"/>
+                      </a:solidFill>
+                      <a:prstDash val="solid"/>
+                      <a:round/>
+                      <a:headEnd type="none" w="med" len="med"/>
+                      <a:tailEnd type="none" w="med" len="med"/>
+                    </a:lnT>
+                    <a:lnB w="12700" cap="flat" cmpd="sng" algn="ctr">
+                      <a:solidFill>
+                        <a:srgbClr val="E2E4F0"/>
+                      </a:solidFill>
+                      <a:prstDash val="solid"/>
+                      <a:round/>
+                      <a:headEnd type="none" w="med" len="med"/>
+                      <a:tailEnd type="none" w="med" len="med"/>
+                    </a:lnB>
+                    <a:solidFill>
+                      <a:schemeClr val="bg1"/>
+                    </a:solidFill>
+                  </a:tcPr>
+                </a:tc>
+                <a:tc>
+                  <a:txBody>
+                    <a:bodyPr/>
+                    <a:lstStyle/>
+                    <a:p>
+                      <a:pPr algn="ctr" indent="0" marL="0">
+                        <a:buNone/>
+                      </a:pPr>
+                      <a:r>
+                        <a:rPr lang="en-US" sz="1500" b="1" dirty="0">
+                          <a:solidFill>
+                            <a:schemeClr val="accent3"/>
+                          </a:solidFill>
+                          <a:latin typeface="Calibri" pitchFamily="34" charset="0"/>
+                          <a:ea typeface="Calibri" pitchFamily="34" charset="-122"/>
+                          <a:cs typeface="Calibri" pitchFamily="34" charset="-120"/>
+                        </a:rPr>
+                        <a:t>₹0 / offline</a:t>
+                      </a:r>
+                      <a:endParaRPr lang="en-US" sz="1500" dirty="0">
+                        <a:latin typeface="Calibri" charset="0"/>
+                        <a:ea typeface="Calibri" charset="0"/>
+                        <a:cs typeface="Calibri" charset="0"/>
+                      </a:endParaRPr>
+                    </a:p>
+                  </a:txBody>
+                  <a:tcPr marL="128016" marR="128016" marT="36576" marB="36576" anchor="ctr">
+                    <a:lnL w="12700" cap="flat" cmpd="sng" algn="ctr">
+                      <a:solidFill>
+                        <a:srgbClr val="E2E4F0"/>
+                      </a:solidFill>
+                      <a:prstDash val="solid"/>
+                      <a:round/>
+                      <a:headEnd type="none" w="med" len="med"/>
+                      <a:tailEnd type="none" w="med" len="med"/>
+                    </a:lnL>
+                    <a:lnR w="12700" cap="flat" cmpd="sng" algn="ctr">
+                      <a:solidFill>
+                        <a:srgbClr val="E2E4F0"/>
+                      </a:solidFill>
+                      <a:prstDash val="solid"/>
+                      <a:round/>
+                      <a:headEnd type="none" w="med" len="med"/>
+                      <a:tailEnd type="none" w="med" len="med"/>
+                    </a:lnR>
+                    <a:lnT w="12700" cap="flat" cmpd="sng" algn="ctr">
+                      <a:solidFill>
+                        <a:srgbClr val="E2E4F0"/>
+                      </a:solidFill>
+                      <a:prstDash val="solid"/>
+                      <a:round/>
+                      <a:headEnd type="none" w="med" len="med"/>
+                      <a:tailEnd type="none" w="med" len="med"/>
+                    </a:lnT>
+                    <a:lnB w="12700" cap="flat" cmpd="sng" algn="ctr">
+                      <a:solidFill>
+                        <a:srgbClr val="E2E4F0"/>
+                      </a:solidFill>
+                      <a:prstDash val="solid"/>
+                      <a:round/>
+                      <a:headEnd type="none" w="med" len="med"/>
+                      <a:tailEnd type="none" w="med" len="med"/>
+                    </a:lnB>
+                    <a:solidFill>
+                      <a:schemeClr val="accent2"/>
+                    </a:solidFill>
+                  </a:tcPr>
+                </a:tc>
+              </a:tr>
+            </a:tbl>
+          </a:graphicData>
+        </a:graphic>
+      </p:graphicFrame>
       <p:sp>
         <p:nvSpPr>
           <p:cNvPr id="25" name="Slide Number Placeholder 0"/>
@@ -7684,7 +9821,7 @@
                   <a:schemeClr val="tx1"/>
                 </a:solidFill>
               </a:rPr>
-              <a:t>Live demo in 3 minutes</a:t>
+              <a:t>Measured results</a:t>
             </a:r>
             <a:endParaRPr lang="en-US" sz="3600" dirty="0"/>
           </a:p>
@@ -7692,673 +9829,24 @@
       </p:sp>
       <p:sp>
         <p:nvSpPr>
-          <p:cNvPr id="3" name="Step 1 dot"/>
+          <p:cNvPr id="3" name="Result 1 card"/>
           <p:cNvSpPr/>
           <p:nvPr/>
         </p:nvSpPr>
         <p:spPr>
           <a:xfrm>
-            <a:off x="548640" y="1435608"/>
-            <a:ext cx="457200" cy="457200"/>
-          </a:xfrm>
-          <a:prstGeom prst="ellipse">
-            <a:avLst/>
-          </a:prstGeom>
-          <a:solidFill>
-            <a:schemeClr val="accent1"/>
-          </a:solidFill>
-          <a:ln/>
-        </p:spPr>
-      </p:sp>
-      <p:sp>
-        <p:nvSpPr>
-          <p:cNvPr id="4" name="Step 1 number"/>
-          <p:cNvSpPr txBox="1"/>
-          <p:nvPr/>
-        </p:nvSpPr>
-        <p:spPr>
-          <a:xfrm>
-            <a:off x="548640" y="1435608"/>
-            <a:ext cx="457200" cy="457200"/>
-          </a:xfrm>
-          <a:prstGeom prst="rect">
-            <a:avLst/>
-          </a:prstGeom>
-          <a:noFill/>
-          <a:ln/>
-        </p:spPr>
-        <p:txBody>
-          <a:bodyPr wrap="square" lIns="0" tIns="0" rIns="0" bIns="0" rtlCol="0" anchor="ctr"/>
-          <a:lstStyle/>
-          <a:p>
-            <a:pPr algn="ctr" indent="0" marL="0">
-              <a:buNone/>
-            </a:pPr>
-            <a:r>
-              <a:rPr lang="en-US" sz="1600" b="1" dirty="0">
-                <a:solidFill>
-                  <a:schemeClr val="bg1"/>
-                </a:solidFill>
-              </a:rPr>
-              <a:t>1</a:t>
-            </a:r>
-            <a:endParaRPr lang="en-US" sz="1600" dirty="0"/>
-          </a:p>
-        </p:txBody>
-      </p:sp>
-      <p:sp>
-        <p:nvSpPr>
-          <p:cNvPr id="5" name="Step 1 text"/>
-          <p:cNvSpPr txBox="1"/>
-          <p:nvPr/>
-        </p:nvSpPr>
-        <p:spPr>
-          <a:xfrm>
-            <a:off x="1234440" y="1371600"/>
-            <a:ext cx="5120640" cy="585216"/>
-          </a:xfrm>
-          <a:prstGeom prst="rect">
-            <a:avLst/>
-          </a:prstGeom>
-          <a:noFill/>
-          <a:ln/>
-        </p:spPr>
-        <p:txBody>
-          <a:bodyPr wrap="square" lIns="0" tIns="0" rIns="0" bIns="0" rtlCol="0" anchor="ctr"/>
-          <a:lstStyle/>
-          <a:p>
-            <a:pPr indent="0" marL="0">
-              <a:buNone/>
-            </a:pPr>
-            <a:r>
-              <a:rPr lang="en-US" sz="1600" dirty="0">
-                <a:solidFill>
-                  <a:schemeClr val="tx1"/>
-                </a:solidFill>
-              </a:rPr>
-              <a:t>Click Run demo - models retrain offline in ~300 ms</a:t>
-            </a:r>
-            <a:endParaRPr lang="en-US" sz="1600" dirty="0"/>
-          </a:p>
-        </p:txBody>
-      </p:sp>
-      <p:sp>
-        <p:nvSpPr>
-          <p:cNvPr id="6" name="Step 2 dot"/>
-          <p:cNvSpPr/>
-          <p:nvPr/>
-        </p:nvSpPr>
-        <p:spPr>
-          <a:xfrm>
-            <a:off x="548640" y="2130552"/>
-            <a:ext cx="457200" cy="457200"/>
-          </a:xfrm>
-          <a:prstGeom prst="ellipse">
-            <a:avLst/>
-          </a:prstGeom>
-          <a:solidFill>
-            <a:schemeClr val="accent1"/>
-          </a:solidFill>
-          <a:ln/>
-        </p:spPr>
-      </p:sp>
-      <p:sp>
-        <p:nvSpPr>
-          <p:cNvPr id="7" name="Step 2 number"/>
-          <p:cNvSpPr txBox="1"/>
-          <p:nvPr/>
-        </p:nvSpPr>
-        <p:spPr>
-          <a:xfrm>
-            <a:off x="548640" y="2130552"/>
-            <a:ext cx="457200" cy="457200"/>
-          </a:xfrm>
-          <a:prstGeom prst="rect">
-            <a:avLst/>
-          </a:prstGeom>
-          <a:noFill/>
-          <a:ln/>
-        </p:spPr>
-        <p:txBody>
-          <a:bodyPr wrap="square" lIns="0" tIns="0" rIns="0" bIns="0" rtlCol="0" anchor="ctr"/>
-          <a:lstStyle/>
-          <a:p>
-            <a:pPr algn="ctr" indent="0" marL="0">
-              <a:buNone/>
-            </a:pPr>
-            <a:r>
-              <a:rPr lang="en-US" sz="1600" b="1" dirty="0">
-                <a:solidFill>
-                  <a:schemeClr val="bg1"/>
-                </a:solidFill>
-              </a:rPr>
-              <a:t>2</a:t>
-            </a:r>
-            <a:endParaRPr lang="en-US" sz="1600" dirty="0"/>
-          </a:p>
-        </p:txBody>
-      </p:sp>
-      <p:sp>
-        <p:nvSpPr>
-          <p:cNvPr id="8" name="Step 2 text"/>
-          <p:cNvSpPr txBox="1"/>
-          <p:nvPr/>
-        </p:nvSpPr>
-        <p:spPr>
-          <a:xfrm>
-            <a:off x="1234440" y="2066544"/>
-            <a:ext cx="5120640" cy="585216"/>
-          </a:xfrm>
-          <a:prstGeom prst="rect">
-            <a:avLst/>
-          </a:prstGeom>
-          <a:noFill/>
-          <a:ln/>
-        </p:spPr>
-        <p:txBody>
-          <a:bodyPr wrap="square" lIns="0" tIns="0" rIns="0" bIns="0" rtlCol="0" anchor="ctr"/>
-          <a:lstStyle/>
-          <a:p>
-            <a:pPr indent="0" marL="0">
-              <a:buNone/>
-            </a:pPr>
-            <a:r>
-              <a:rPr lang="en-US" sz="1600" dirty="0">
-                <a:solidFill>
-                  <a:schemeClr val="tx1"/>
-                </a:solidFill>
-              </a:rPr>
-              <a:t>Read KPI tiles: kWh, rupees, CO2, waste, next-week forecast</a:t>
-            </a:r>
-            <a:endParaRPr lang="en-US" sz="1600" dirty="0"/>
-          </a:p>
-        </p:txBody>
-      </p:sp>
-      <p:sp>
-        <p:nvSpPr>
-          <p:cNvPr id="9" name="Step 3 dot"/>
-          <p:cNvSpPr/>
-          <p:nvPr/>
-        </p:nvSpPr>
-        <p:spPr>
-          <a:xfrm>
-            <a:off x="548640" y="2825496"/>
-            <a:ext cx="457200" cy="457200"/>
-          </a:xfrm>
-          <a:prstGeom prst="ellipse">
-            <a:avLst/>
-          </a:prstGeom>
-          <a:solidFill>
-            <a:schemeClr val="accent1"/>
-          </a:solidFill>
-          <a:ln/>
-        </p:spPr>
-      </p:sp>
-      <p:sp>
-        <p:nvSpPr>
-          <p:cNvPr id="10" name="Step 3 number"/>
-          <p:cNvSpPr txBox="1"/>
-          <p:nvPr/>
-        </p:nvSpPr>
-        <p:spPr>
-          <a:xfrm>
-            <a:off x="548640" y="2825496"/>
-            <a:ext cx="457200" cy="457200"/>
-          </a:xfrm>
-          <a:prstGeom prst="rect">
-            <a:avLst/>
-          </a:prstGeom>
-          <a:noFill/>
-          <a:ln/>
-        </p:spPr>
-        <p:txBody>
-          <a:bodyPr wrap="square" lIns="0" tIns="0" rIns="0" bIns="0" rtlCol="0" anchor="ctr"/>
-          <a:lstStyle/>
-          <a:p>
-            <a:pPr algn="ctr" indent="0" marL="0">
-              <a:buNone/>
-            </a:pPr>
-            <a:r>
-              <a:rPr lang="en-US" sz="1600" b="1" dirty="0">
-                <a:solidFill>
-                  <a:schemeClr val="bg1"/>
-                </a:solidFill>
-              </a:rPr>
-              <a:t>3</a:t>
-            </a:r>
-            <a:endParaRPr lang="en-US" sz="1600" dirty="0"/>
-          </a:p>
-        </p:txBody>
-      </p:sp>
-      <p:sp>
-        <p:nvSpPr>
-          <p:cNvPr id="11" name="Step 3 text"/>
-          <p:cNvSpPr txBox="1"/>
-          <p:nvPr/>
-        </p:nvSpPr>
-        <p:spPr>
-          <a:xfrm>
-            <a:off x="1234440" y="2761488"/>
-            <a:ext cx="5120640" cy="585216"/>
-          </a:xfrm>
-          <a:prstGeom prst="rect">
-            <a:avLst/>
-          </a:prstGeom>
-          <a:noFill/>
-          <a:ln/>
-        </p:spPr>
-        <p:txBody>
-          <a:bodyPr wrap="square" lIns="0" tIns="0" rIns="0" bIns="0" rtlCol="0" anchor="ctr"/>
-          <a:lstStyle/>
-          <a:p>
-            <a:pPr indent="0" marL="0">
-              <a:buNone/>
-            </a:pPr>
-            <a:r>
-              <a:rPr lang="en-US" sz="1600" dirty="0">
-                <a:solidFill>
-                  <a:schemeClr val="tx1"/>
-                </a:solidFill>
-              </a:rPr>
-              <a:t>Hover the CSE Lab night-time waste band for its reason</a:t>
-            </a:r>
-            <a:endParaRPr lang="en-US" sz="1600" dirty="0"/>
-          </a:p>
-        </p:txBody>
-      </p:sp>
-      <p:sp>
-        <p:nvSpPr>
-          <p:cNvPr id="12" name="Step 4 dot"/>
-          <p:cNvSpPr/>
-          <p:nvPr/>
-        </p:nvSpPr>
-        <p:spPr>
-          <a:xfrm>
-            <a:off x="548640" y="3520440"/>
-            <a:ext cx="457200" cy="457200"/>
-          </a:xfrm>
-          <a:prstGeom prst="ellipse">
-            <a:avLst/>
-          </a:prstGeom>
-          <a:solidFill>
-            <a:schemeClr val="accent1"/>
-          </a:solidFill>
-          <a:ln/>
-        </p:spPr>
-      </p:sp>
-      <p:sp>
-        <p:nvSpPr>
-          <p:cNvPr id="13" name="Step 4 number"/>
-          <p:cNvSpPr txBox="1"/>
-          <p:nvPr/>
-        </p:nvSpPr>
-        <p:spPr>
-          <a:xfrm>
-            <a:off x="548640" y="3520440"/>
-            <a:ext cx="457200" cy="457200"/>
-          </a:xfrm>
-          <a:prstGeom prst="rect">
-            <a:avLst/>
-          </a:prstGeom>
-          <a:noFill/>
-          <a:ln/>
-        </p:spPr>
-        <p:txBody>
-          <a:bodyPr wrap="square" lIns="0" tIns="0" rIns="0" bIns="0" rtlCol="0" anchor="ctr"/>
-          <a:lstStyle/>
-          <a:p>
-            <a:pPr algn="ctr" indent="0" marL="0">
-              <a:buNone/>
-            </a:pPr>
-            <a:r>
-              <a:rPr lang="en-US" sz="1600" b="1" dirty="0">
-                <a:solidFill>
-                  <a:schemeClr val="bg1"/>
-                </a:solidFill>
-              </a:rPr>
-              <a:t>4</a:t>
-            </a:r>
-            <a:endParaRPr lang="en-US" sz="1600" dirty="0"/>
-          </a:p>
-        </p:txBody>
-      </p:sp>
-      <p:sp>
-        <p:nvSpPr>
-          <p:cNvPr id="14" name="Step 4 text"/>
-          <p:cNvSpPr txBox="1"/>
-          <p:nvPr/>
-        </p:nvSpPr>
-        <p:spPr>
-          <a:xfrm>
-            <a:off x="1234440" y="3456432"/>
-            <a:ext cx="5120640" cy="585216"/>
-          </a:xfrm>
-          <a:prstGeom prst="rect">
-            <a:avLst/>
-          </a:prstGeom>
-          <a:noFill/>
-          <a:ln/>
-        </p:spPr>
-        <p:txBody>
-          <a:bodyPr wrap="square" lIns="0" tIns="0" rIns="0" bIns="0" rtlCol="0" anchor="ctr"/>
-          <a:lstStyle/>
-          <a:p>
-            <a:pPr indent="0" marL="0">
-              <a:buNone/>
-            </a:pPr>
-            <a:r>
-              <a:rPr lang="en-US" sz="1600" dirty="0">
-                <a:solidFill>
-                  <a:schemeClr val="tx1"/>
-                </a:solidFill>
-              </a:rPr>
-              <a:t>Open Why this forecast: baseline + weather split</a:t>
-            </a:r>
-            <a:endParaRPr lang="en-US" sz="1600" dirty="0"/>
-          </a:p>
-        </p:txBody>
-      </p:sp>
-      <p:sp>
-        <p:nvSpPr>
-          <p:cNvPr id="15" name="Step 5 dot"/>
-          <p:cNvSpPr/>
-          <p:nvPr/>
-        </p:nvSpPr>
-        <p:spPr>
-          <a:xfrm>
-            <a:off x="548640" y="4215384"/>
-            <a:ext cx="457200" cy="457200"/>
-          </a:xfrm>
-          <a:prstGeom prst="ellipse">
-            <a:avLst/>
-          </a:prstGeom>
-          <a:solidFill>
-            <a:schemeClr val="accent1"/>
-          </a:solidFill>
-          <a:ln/>
-        </p:spPr>
-      </p:sp>
-      <p:sp>
-        <p:nvSpPr>
-          <p:cNvPr id="16" name="Step 5 number"/>
-          <p:cNvSpPr txBox="1"/>
-          <p:nvPr/>
-        </p:nvSpPr>
-        <p:spPr>
-          <a:xfrm>
-            <a:off x="548640" y="4215384"/>
-            <a:ext cx="457200" cy="457200"/>
-          </a:xfrm>
-          <a:prstGeom prst="rect">
-            <a:avLst/>
-          </a:prstGeom>
-          <a:noFill/>
-          <a:ln/>
-        </p:spPr>
-        <p:txBody>
-          <a:bodyPr wrap="square" lIns="0" tIns="0" rIns="0" bIns="0" rtlCol="0" anchor="ctr"/>
-          <a:lstStyle/>
-          <a:p>
-            <a:pPr algn="ctr" indent="0" marL="0">
-              <a:buNone/>
-            </a:pPr>
-            <a:r>
-              <a:rPr lang="en-US" sz="1600" b="1" dirty="0">
-                <a:solidFill>
-                  <a:schemeClr val="bg1"/>
-                </a:solidFill>
-              </a:rPr>
-              <a:t>5</a:t>
-            </a:r>
-            <a:endParaRPr lang="en-US" sz="1600" dirty="0"/>
-          </a:p>
-        </p:txBody>
-      </p:sp>
-      <p:sp>
-        <p:nvSpPr>
-          <p:cNvPr id="17" name="Step 5 text"/>
-          <p:cNvSpPr txBox="1"/>
-          <p:nvPr/>
-        </p:nvSpPr>
-        <p:spPr>
-          <a:xfrm>
-            <a:off x="1234440" y="4151376"/>
-            <a:ext cx="5120640" cy="585216"/>
-          </a:xfrm>
-          <a:prstGeom prst="rect">
-            <a:avLst/>
-          </a:prstGeom>
-          <a:noFill/>
-          <a:ln/>
-        </p:spPr>
-        <p:txBody>
-          <a:bodyPr wrap="square" lIns="0" tIns="0" rIns="0" bIns="0" rtlCol="0" anchor="ctr"/>
-          <a:lstStyle/>
-          <a:p>
-            <a:pPr indent="0" marL="0">
-              <a:buNone/>
-            </a:pPr>
-            <a:r>
-              <a:rPr lang="en-US" sz="1600" dirty="0">
-                <a:solidFill>
-                  <a:schemeClr val="tx1"/>
-                </a:solidFill>
-              </a:rPr>
-              <a:t>Solar planner: all roofs, 442 kWp, 4.5-year payback</a:t>
-            </a:r>
-            <a:endParaRPr lang="en-US" sz="1600" dirty="0"/>
-          </a:p>
-        </p:txBody>
-      </p:sp>
-      <p:sp>
-        <p:nvSpPr>
-          <p:cNvPr id="18" name="Step 6 dot"/>
-          <p:cNvSpPr/>
-          <p:nvPr/>
-        </p:nvSpPr>
-        <p:spPr>
-          <a:xfrm>
-            <a:off x="548640" y="4910328"/>
-            <a:ext cx="457200" cy="457200"/>
-          </a:xfrm>
-          <a:prstGeom prst="ellipse">
-            <a:avLst/>
-          </a:prstGeom>
-          <a:solidFill>
-            <a:schemeClr val="accent1"/>
-          </a:solidFill>
-          <a:ln/>
-        </p:spPr>
-      </p:sp>
-      <p:sp>
-        <p:nvSpPr>
-          <p:cNvPr id="19" name="Step 6 number"/>
-          <p:cNvSpPr txBox="1"/>
-          <p:nvPr/>
-        </p:nvSpPr>
-        <p:spPr>
-          <a:xfrm>
-            <a:off x="548640" y="4910328"/>
-            <a:ext cx="457200" cy="457200"/>
-          </a:xfrm>
-          <a:prstGeom prst="rect">
-            <a:avLst/>
-          </a:prstGeom>
-          <a:noFill/>
-          <a:ln/>
-        </p:spPr>
-        <p:txBody>
-          <a:bodyPr wrap="square" lIns="0" tIns="0" rIns="0" bIns="0" rtlCol="0" anchor="ctr"/>
-          <a:lstStyle/>
-          <a:p>
-            <a:pPr algn="ctr" indent="0" marL="0">
-              <a:buNone/>
-            </a:pPr>
-            <a:r>
-              <a:rPr lang="en-US" sz="1600" b="1" dirty="0">
-                <a:solidFill>
-                  <a:schemeClr val="bg1"/>
-                </a:solidFill>
-              </a:rPr>
-              <a:t>6</a:t>
-            </a:r>
-            <a:endParaRPr lang="en-US" sz="1600" dirty="0"/>
-          </a:p>
-        </p:txBody>
-      </p:sp>
-      <p:sp>
-        <p:nvSpPr>
-          <p:cNvPr id="20" name="Step 6 text"/>
-          <p:cNvSpPr txBox="1"/>
-          <p:nvPr/>
-        </p:nvSpPr>
-        <p:spPr>
-          <a:xfrm>
-            <a:off x="1234440" y="4846320"/>
-            <a:ext cx="5120640" cy="585216"/>
-          </a:xfrm>
-          <a:prstGeom prst="rect">
-            <a:avLst/>
-          </a:prstGeom>
-          <a:noFill/>
-          <a:ln/>
-        </p:spPr>
-        <p:txBody>
-          <a:bodyPr wrap="square" lIns="0" tIns="0" rIns="0" bIns="0" rtlCol="0" anchor="ctr"/>
-          <a:lstStyle/>
-          <a:p>
-            <a:pPr indent="0" marL="0">
-              <a:buNone/>
-            </a:pPr>
-            <a:r>
-              <a:rPr lang="en-US" sz="1600" dirty="0">
-                <a:solidFill>
-                  <a:schemeClr val="tx1"/>
-                </a:solidFill>
-              </a:rPr>
-              <a:t>What-if: drag AC and LED sliders, watch savings update</a:t>
-            </a:r>
-            <a:endParaRPr lang="en-US" sz="1600" dirty="0"/>
-          </a:p>
-        </p:txBody>
-      </p:sp>
-      <p:sp>
-        <p:nvSpPr>
-          <p:cNvPr id="21" name="Step 7 dot"/>
-          <p:cNvSpPr/>
-          <p:nvPr/>
-        </p:nvSpPr>
-        <p:spPr>
-          <a:xfrm>
-            <a:off x="548640" y="5605272"/>
-            <a:ext cx="457200" cy="457200"/>
-          </a:xfrm>
-          <a:prstGeom prst="ellipse">
-            <a:avLst/>
-          </a:prstGeom>
-          <a:solidFill>
-            <a:schemeClr val="accent1"/>
-          </a:solidFill>
-          <a:ln/>
-        </p:spPr>
-      </p:sp>
-      <p:sp>
-        <p:nvSpPr>
-          <p:cNvPr id="22" name="Step 7 number"/>
-          <p:cNvSpPr txBox="1"/>
-          <p:nvPr/>
-        </p:nvSpPr>
-        <p:spPr>
-          <a:xfrm>
-            <a:off x="548640" y="5605272"/>
-            <a:ext cx="457200" cy="457200"/>
-          </a:xfrm>
-          <a:prstGeom prst="rect">
-            <a:avLst/>
-          </a:prstGeom>
-          <a:noFill/>
-          <a:ln/>
-        </p:spPr>
-        <p:txBody>
-          <a:bodyPr wrap="square" lIns="0" tIns="0" rIns="0" bIns="0" rtlCol="0" anchor="ctr"/>
-          <a:lstStyle/>
-          <a:p>
-            <a:pPr algn="ctr" indent="0" marL="0">
-              <a:buNone/>
-            </a:pPr>
-            <a:r>
-              <a:rPr lang="en-US" sz="1600" b="1" dirty="0">
-                <a:solidFill>
-                  <a:schemeClr val="bg1"/>
-                </a:solidFill>
-              </a:rPr>
-              <a:t>7</a:t>
-            </a:r>
-            <a:endParaRPr lang="en-US" sz="1600" dirty="0"/>
-          </a:p>
-        </p:txBody>
-      </p:sp>
-      <p:sp>
-        <p:nvSpPr>
-          <p:cNvPr id="23" name="Step 7 text"/>
-          <p:cNvSpPr txBox="1"/>
-          <p:nvPr/>
-        </p:nvSpPr>
-        <p:spPr>
-          <a:xfrm>
-            <a:off x="1234440" y="5541264"/>
-            <a:ext cx="5120640" cy="585216"/>
-          </a:xfrm>
-          <a:prstGeom prst="rect">
-            <a:avLst/>
-          </a:prstGeom>
-          <a:noFill/>
-          <a:ln/>
-        </p:spPr>
-        <p:txBody>
-          <a:bodyPr wrap="square" lIns="0" tIns="0" rIns="0" bIns="0" rtlCol="0" anchor="ctr"/>
-          <a:lstStyle/>
-          <a:p>
-            <a:pPr indent="0" marL="0">
-              <a:buNone/>
-            </a:pPr>
-            <a:r>
-              <a:rPr lang="en-US" sz="1600" dirty="0">
-                <a:solidFill>
-                  <a:schemeClr val="tx1"/>
-                </a:solidFill>
-              </a:rPr>
-              <a:t>Leaderboard and Model report: champion and live accuracy</a:t>
-            </a:r>
-            <a:endParaRPr lang="en-US" sz="1600" dirty="0"/>
-          </a:p>
-        </p:txBody>
-      </p:sp>
-      <p:sp>
-        <p:nvSpPr>
-          <p:cNvPr id="24" name="Demo screenshot frame"/>
-          <p:cNvSpPr/>
-          <p:nvPr/>
-        </p:nvSpPr>
-        <p:spPr>
-          <a:xfrm>
-            <a:off x="6528816" y="1545336"/>
-            <a:ext cx="5138928" cy="3252978"/>
+            <a:off x="548640" y="1463040"/>
+            <a:ext cx="2567864" cy="2377440"/>
           </a:xfrm>
           <a:prstGeom prst="roundRect">
             <a:avLst>
-              <a:gd name="adj" fmla="val 2249"/>
+              <a:gd name="adj" fmla="val 4615"/>
             </a:avLst>
           </a:prstGeom>
           <a:solidFill>
-            <a:schemeClr val="bg1"/>
+            <a:schemeClr val="tx2"/>
           </a:solidFill>
-          <a:ln w="12700">
-            <a:solidFill>
-              <a:schemeClr val="bg2"/>
-            </a:solidFill>
-            <a:prstDash val="solid"/>
-          </a:ln>
+          <a:ln/>
           <a:effectLst>
             <a:outerShdw sx="100000" sy="100000" kx="0" ky="0" algn="bl" rotWithShape="0" blurRad="101600" dist="25400" dir="5400000">
               <a:srgbClr val="000000">
@@ -8368,9 +9856,470 @@
           </a:effectLst>
         </p:spPr>
       </p:sp>
+      <p:sp>
+        <p:nvSpPr>
+          <p:cNvPr id="4" name="Result 1 value"/>
+          <p:cNvSpPr txBox="1"/>
+          <p:nvPr/>
+        </p:nvSpPr>
+        <p:spPr>
+          <a:xfrm>
+            <a:off x="777240" y="1645920"/>
+            <a:ext cx="2110664" cy="1097280"/>
+          </a:xfrm>
+          <a:prstGeom prst="rect">
+            <a:avLst/>
+          </a:prstGeom>
+          <a:noFill/>
+          <a:ln/>
+        </p:spPr>
+        <p:txBody>
+          <a:bodyPr wrap="square" lIns="0" tIns="0" rIns="0" bIns="0" rtlCol="0" anchor="ctr">
+            <a:normAutofit/>
+          </a:bodyPr>
+          <a:lstStyle/>
+          <a:p>
+            <a:pPr algn="ctr" indent="0" marL="0">
+              <a:buNone/>
+            </a:pPr>
+            <a:r>
+              <a:rPr lang="en-US" sz="4000" b="1" dirty="0">
+                <a:solidFill>
+                  <a:schemeClr val="accent6"/>
+                </a:solidFill>
+              </a:rPr>
+              <a:t>5.6%</a:t>
+            </a:r>
+            <a:endParaRPr lang="en-US" sz="4000" dirty="0"/>
+          </a:p>
+        </p:txBody>
+      </p:sp>
+      <p:sp>
+        <p:nvSpPr>
+          <p:cNvPr id="5" name="Result 1 label"/>
+          <p:cNvSpPr txBox="1"/>
+          <p:nvPr/>
+        </p:nvSpPr>
+        <p:spPr>
+          <a:xfrm>
+            <a:off x="777240" y="2743200"/>
+            <a:ext cx="2110664" cy="914400"/>
+          </a:xfrm>
+          <a:prstGeom prst="rect">
+            <a:avLst/>
+          </a:prstGeom>
+          <a:noFill/>
+          <a:ln/>
+        </p:spPr>
+        <p:txBody>
+          <a:bodyPr wrap="square" lIns="0" tIns="0" rIns="0" bIns="0" rtlCol="0" anchor="t"/>
+          <a:lstStyle/>
+          <a:p>
+            <a:pPr algn="ctr" indent="0" marL="0">
+              <a:buNone/>
+            </a:pPr>
+            <a:r>
+              <a:rPr lang="en-US" sz="1400" dirty="0">
+                <a:solidFill>
+                  <a:schemeClr val="bg1"/>
+                </a:solidFill>
+              </a:rPr>
+              <a:t>forecast MAPE on hold-out week (Holt-Winters 27.7%)</a:t>
+            </a:r>
+            <a:endParaRPr lang="en-US" sz="1400" dirty="0"/>
+          </a:p>
+        </p:txBody>
+      </p:sp>
+      <p:sp>
+        <p:nvSpPr>
+          <p:cNvPr id="6" name="Result 2 card"/>
+          <p:cNvSpPr/>
+          <p:nvPr/>
+        </p:nvSpPr>
+        <p:spPr>
+          <a:xfrm>
+            <a:off x="3390824" y="1463040"/>
+            <a:ext cx="2567864" cy="2377440"/>
+          </a:xfrm>
+          <a:prstGeom prst="roundRect">
+            <a:avLst>
+              <a:gd name="adj" fmla="val 4615"/>
+            </a:avLst>
+          </a:prstGeom>
+          <a:solidFill>
+            <a:schemeClr val="tx2"/>
+          </a:solidFill>
+          <a:ln/>
+          <a:effectLst>
+            <a:outerShdw sx="100000" sy="100000" kx="0" ky="0" algn="bl" rotWithShape="0" blurRad="101600" dist="25400" dir="5400000">
+              <a:srgbClr val="000000">
+                <a:alpha val="14000"/>
+              </a:srgbClr>
+            </a:outerShdw>
+          </a:effectLst>
+        </p:spPr>
+      </p:sp>
+      <p:sp>
+        <p:nvSpPr>
+          <p:cNvPr id="7" name="Result 2 value"/>
+          <p:cNvSpPr txBox="1"/>
+          <p:nvPr/>
+        </p:nvSpPr>
+        <p:spPr>
+          <a:xfrm>
+            <a:off x="3619424" y="1645920"/>
+            <a:ext cx="2110664" cy="1097280"/>
+          </a:xfrm>
+          <a:prstGeom prst="rect">
+            <a:avLst/>
+          </a:prstGeom>
+          <a:noFill/>
+          <a:ln/>
+        </p:spPr>
+        <p:txBody>
+          <a:bodyPr wrap="square" lIns="0" tIns="0" rIns="0" bIns="0" rtlCol="0" anchor="ctr">
+            <a:normAutofit/>
+          </a:bodyPr>
+          <a:lstStyle/>
+          <a:p>
+            <a:pPr algn="ctr" indent="0" marL="0">
+              <a:buNone/>
+            </a:pPr>
+            <a:r>
+              <a:rPr lang="en-US" sz="2400" b="1" dirty="0">
+                <a:solidFill>
+                  <a:schemeClr val="accent6"/>
+                </a:solidFill>
+              </a:rPr>
+              <a:t>100% / 89%</a:t>
+            </a:r>
+            <a:endParaRPr lang="en-US" sz="2400" dirty="0"/>
+          </a:p>
+        </p:txBody>
+      </p:sp>
+      <p:sp>
+        <p:nvSpPr>
+          <p:cNvPr id="8" name="Result 2 label"/>
+          <p:cNvSpPr txBox="1"/>
+          <p:nvPr/>
+        </p:nvSpPr>
+        <p:spPr>
+          <a:xfrm>
+            <a:off x="3619424" y="2743200"/>
+            <a:ext cx="2110664" cy="914400"/>
+          </a:xfrm>
+          <a:prstGeom prst="rect">
+            <a:avLst/>
+          </a:prstGeom>
+          <a:noFill/>
+          <a:ln/>
+        </p:spPr>
+        <p:txBody>
+          <a:bodyPr wrap="square" lIns="0" tIns="0" rIns="0" bIns="0" rtlCol="0" anchor="t"/>
+          <a:lstStyle/>
+          <a:p>
+            <a:pPr algn="ctr" indent="0" marL="0">
+              <a:buNone/>
+            </a:pPr>
+            <a:r>
+              <a:rPr lang="en-US" sz="1400" dirty="0">
+                <a:solidFill>
+                  <a:schemeClr val="bg1"/>
+                </a:solidFill>
+              </a:rPr>
+              <a:t>waste-event precision / recall vs injected truth</a:t>
+            </a:r>
+            <a:endParaRPr lang="en-US" sz="1400" dirty="0"/>
+          </a:p>
+        </p:txBody>
+      </p:sp>
+      <p:sp>
+        <p:nvSpPr>
+          <p:cNvPr id="9" name="Result 3 card"/>
+          <p:cNvSpPr/>
+          <p:nvPr/>
+        </p:nvSpPr>
+        <p:spPr>
+          <a:xfrm>
+            <a:off x="6233008" y="1463040"/>
+            <a:ext cx="2567864" cy="2377440"/>
+          </a:xfrm>
+          <a:prstGeom prst="roundRect">
+            <a:avLst>
+              <a:gd name="adj" fmla="val 4615"/>
+            </a:avLst>
+          </a:prstGeom>
+          <a:solidFill>
+            <a:schemeClr val="tx2"/>
+          </a:solidFill>
+          <a:ln/>
+          <a:effectLst>
+            <a:outerShdw sx="100000" sy="100000" kx="0" ky="0" algn="bl" rotWithShape="0" blurRad="101600" dist="25400" dir="5400000">
+              <a:srgbClr val="000000">
+                <a:alpha val="14000"/>
+              </a:srgbClr>
+            </a:outerShdw>
+          </a:effectLst>
+        </p:spPr>
+      </p:sp>
+      <p:sp>
+        <p:nvSpPr>
+          <p:cNvPr id="10" name="Result 3 value"/>
+          <p:cNvSpPr txBox="1"/>
+          <p:nvPr/>
+        </p:nvSpPr>
+        <p:spPr>
+          <a:xfrm>
+            <a:off x="6461608" y="1645920"/>
+            <a:ext cx="2110664" cy="1097280"/>
+          </a:xfrm>
+          <a:prstGeom prst="rect">
+            <a:avLst/>
+          </a:prstGeom>
+          <a:noFill/>
+          <a:ln/>
+        </p:spPr>
+        <p:txBody>
+          <a:bodyPr wrap="square" lIns="0" tIns="0" rIns="0" bIns="0" rtlCol="0" anchor="ctr">
+            <a:normAutofit/>
+          </a:bodyPr>
+          <a:lstStyle/>
+          <a:p>
+            <a:pPr algn="ctr" indent="0" marL="0">
+              <a:buNone/>
+            </a:pPr>
+            <a:r>
+              <a:rPr lang="en-US" sz="4000" b="1" dirty="0">
+                <a:solidFill>
+                  <a:schemeClr val="accent6"/>
+                </a:solidFill>
+              </a:rPr>
+              <a:t>10%</a:t>
+            </a:r>
+            <a:endParaRPr lang="en-US" sz="4000" dirty="0"/>
+          </a:p>
+        </p:txBody>
+      </p:sp>
+      <p:sp>
+        <p:nvSpPr>
+          <p:cNvPr id="11" name="Result 3 label"/>
+          <p:cNvSpPr txBox="1"/>
+          <p:nvPr/>
+        </p:nvSpPr>
+        <p:spPr>
+          <a:xfrm>
+            <a:off x="6461608" y="2743200"/>
+            <a:ext cx="2110664" cy="914400"/>
+          </a:xfrm>
+          <a:prstGeom prst="rect">
+            <a:avLst/>
+          </a:prstGeom>
+          <a:noFill/>
+          <a:ln/>
+        </p:spPr>
+        <p:txBody>
+          <a:bodyPr wrap="square" lIns="0" tIns="0" rIns="0" bIns="0" rtlCol="0" anchor="t"/>
+          <a:lstStyle/>
+          <a:p>
+            <a:pPr algn="ctr" indent="0" marL="0">
+              <a:buNone/>
+            </a:pPr>
+            <a:r>
+              <a:rPr lang="en-US" sz="1400" dirty="0">
+                <a:solidFill>
+                  <a:schemeClr val="bg1"/>
+                </a:solidFill>
+              </a:rPr>
+              <a:t>monthly saving from 4 cheap levers (Rs 10.7 L/yr, demo)</a:t>
+            </a:r>
+            <a:endParaRPr lang="en-US" sz="1400" dirty="0"/>
+          </a:p>
+        </p:txBody>
+      </p:sp>
+      <p:sp>
+        <p:nvSpPr>
+          <p:cNvPr id="12" name="Result 4 card"/>
+          <p:cNvSpPr/>
+          <p:nvPr/>
+        </p:nvSpPr>
+        <p:spPr>
+          <a:xfrm>
+            <a:off x="9075191" y="1463040"/>
+            <a:ext cx="2567864" cy="2377440"/>
+          </a:xfrm>
+          <a:prstGeom prst="roundRect">
+            <a:avLst>
+              <a:gd name="adj" fmla="val 4615"/>
+            </a:avLst>
+          </a:prstGeom>
+          <a:solidFill>
+            <a:schemeClr val="tx2"/>
+          </a:solidFill>
+          <a:ln/>
+          <a:effectLst>
+            <a:outerShdw sx="100000" sy="100000" kx="0" ky="0" algn="bl" rotWithShape="0" blurRad="101600" dist="25400" dir="5400000">
+              <a:srgbClr val="000000">
+                <a:alpha val="14000"/>
+              </a:srgbClr>
+            </a:outerShdw>
+          </a:effectLst>
+        </p:spPr>
+      </p:sp>
+      <p:sp>
+        <p:nvSpPr>
+          <p:cNvPr id="13" name="Result 4 value"/>
+          <p:cNvSpPr txBox="1"/>
+          <p:nvPr/>
+        </p:nvSpPr>
+        <p:spPr>
+          <a:xfrm>
+            <a:off x="9303791" y="1645920"/>
+            <a:ext cx="2110664" cy="1097280"/>
+          </a:xfrm>
+          <a:prstGeom prst="rect">
+            <a:avLst/>
+          </a:prstGeom>
+          <a:noFill/>
+          <a:ln/>
+        </p:spPr>
+        <p:txBody>
+          <a:bodyPr wrap="square" lIns="0" tIns="0" rIns="0" bIns="0" rtlCol="0" anchor="ctr">
+            <a:normAutofit/>
+          </a:bodyPr>
+          <a:lstStyle/>
+          <a:p>
+            <a:pPr algn="ctr" indent="0" marL="0">
+              <a:buNone/>
+            </a:pPr>
+            <a:r>
+              <a:rPr lang="en-US" sz="4000" b="1" dirty="0">
+                <a:solidFill>
+                  <a:schemeClr val="accent6"/>
+                </a:solidFill>
+              </a:rPr>
+              <a:t>300 ms</a:t>
+            </a:r>
+            <a:endParaRPr lang="en-US" sz="4000" dirty="0"/>
+          </a:p>
+        </p:txBody>
+      </p:sp>
+      <p:sp>
+        <p:nvSpPr>
+          <p:cNvPr id="14" name="Result 4 label"/>
+          <p:cNvSpPr txBox="1"/>
+          <p:nvPr/>
+        </p:nvSpPr>
+        <p:spPr>
+          <a:xfrm>
+            <a:off x="9303791" y="2743200"/>
+            <a:ext cx="2110664" cy="914400"/>
+          </a:xfrm>
+          <a:prstGeom prst="rect">
+            <a:avLst/>
+          </a:prstGeom>
+          <a:noFill/>
+          <a:ln/>
+        </p:spPr>
+        <p:txBody>
+          <a:bodyPr wrap="square" lIns="0" tIns="0" rIns="0" bIns="0" rtlCol="0" anchor="t"/>
+          <a:lstStyle/>
+          <a:p>
+            <a:pPr algn="ctr" indent="0" marL="0">
+              <a:buNone/>
+            </a:pPr>
+            <a:r>
+              <a:rPr lang="en-US" sz="1400" dirty="0">
+                <a:solidFill>
+                  <a:schemeClr val="bg1"/>
+                </a:solidFill>
+              </a:rPr>
+              <a:t>full pipeline for 6 buildings x 8 weeks</a:t>
+            </a:r>
+            <a:endParaRPr lang="en-US" sz="1400" dirty="0"/>
+          </a:p>
+        </p:txBody>
+      </p:sp>
+      <p:sp>
+        <p:nvSpPr>
+          <p:cNvPr id="15" name="Results caveat"/>
+          <p:cNvSpPr txBox="1"/>
+          <p:nvPr/>
+        </p:nvSpPr>
+        <p:spPr>
+          <a:xfrm>
+            <a:off x="548640" y="4160520"/>
+            <a:ext cx="11094415" cy="457200"/>
+          </a:xfrm>
+          <a:prstGeom prst="rect">
+            <a:avLst/>
+          </a:prstGeom>
+          <a:noFill/>
+          <a:ln/>
+        </p:spPr>
+        <p:txBody>
+          <a:bodyPr wrap="square" lIns="0" tIns="0" rIns="0" bIns="0" rtlCol="0" anchor="ctr"/>
+          <a:lstStyle/>
+          <a:p>
+            <a:pPr indent="0" marL="0">
+              <a:buNone/>
+            </a:pPr>
+            <a:r>
+              <a:rPr lang="en-US" sz="1200" i="1" dirty="0">
+                <a:solidFill>
+                  <a:schemeClr val="accent4"/>
+                </a:solidFill>
+              </a:rPr>
+              <a:t>Measured on held-out data generated by the project (see REPORT.md for method). Real-world performance needs field validation.</a:t>
+            </a:r>
+            <a:endParaRPr lang="en-US" sz="1200" dirty="0"/>
+          </a:p>
+        </p:txBody>
+      </p:sp>
+      <p:sp>
+        <p:nvSpPr>
+          <p:cNvPr id="16" name="Impact strip"/>
+          <p:cNvSpPr/>
+          <p:nvPr/>
+        </p:nvSpPr>
+        <p:spPr>
+          <a:xfrm>
+            <a:off x="548640" y="4754880"/>
+            <a:ext cx="11094415" cy="1371600"/>
+          </a:xfrm>
+          <a:prstGeom prst="roundRect">
+            <a:avLst>
+              <a:gd name="adj" fmla="val 8000"/>
+            </a:avLst>
+          </a:prstGeom>
+          <a:solidFill>
+            <a:schemeClr val="accent2"/>
+          </a:solidFill>
+          <a:ln/>
+        </p:spPr>
+      </p:sp>
+      <p:sp>
+        <p:nvSpPr>
+          <p:cNvPr id="17" name="Impact circle"/>
+          <p:cNvSpPr/>
+          <p:nvPr/>
+        </p:nvSpPr>
+        <p:spPr>
+          <a:xfrm>
+            <a:off x="822960" y="5120640"/>
+            <a:ext cx="640080" cy="640080"/>
+          </a:xfrm>
+          <a:prstGeom prst="ellipse">
+            <a:avLst/>
+          </a:prstGeom>
+          <a:solidFill>
+            <a:schemeClr val="accent1"/>
+          </a:solidFill>
+          <a:ln/>
+        </p:spPr>
+      </p:sp>
       <p:pic>
         <p:nvPicPr>
-          <p:cNvPr id="25" name="Demo screenshot" descr="WattWise screenshot">    </p:cNvPr>
+          <p:cNvPr id="18" name="Impact icon" descr="preencoded.png">    </p:cNvPr>
           <p:cNvPicPr>
             <a:picLocks noChangeAspect="1"/>
           </p:cNvPicPr>
@@ -8384,8 +10333,8 @@
         </p:blipFill>
         <p:spPr>
           <a:xfrm>
-            <a:off x="6583680" y="1600200"/>
-            <a:ext cx="5029200" cy="3143250"/>
+            <a:off x="982980" y="5280660"/>
+            <a:ext cx="320040" cy="320040"/>
           </a:xfrm>
           <a:prstGeom prst="rect">
             <a:avLst/>
@@ -8394,14 +10343,14 @@
       </p:pic>
       <p:sp>
         <p:nvSpPr>
-          <p:cNvPr id="26" name="Run command"/>
+          <p:cNvPr id="19" name="Impact text"/>
           <p:cNvSpPr txBox="1"/>
           <p:nvPr/>
         </p:nvSpPr>
         <p:spPr>
           <a:xfrm>
-            <a:off x="6583680" y="5029200"/>
-            <a:ext cx="5029200" cy="457200"/>
+            <a:off x="1737360" y="4754880"/>
+            <a:ext cx="9631375" cy="1371600"/>
           </a:xfrm>
           <a:prstGeom prst="rect">
             <a:avLst/>
@@ -8413,21 +10362,29 @@
           <a:bodyPr wrap="square" lIns="0" tIns="0" rIns="0" bIns="0" rtlCol="0" anchor="ctr"/>
           <a:lstStyle/>
           <a:p>
-            <a:pPr algn="ctr" indent="0" marL="0">
-              <a:buNone/>
-            </a:pPr>
-            <a:r>
-              <a:rPr lang="en-US" sz="1400" dirty="0">
+            <a:pPr indent="0" marL="0">
+              <a:buNone/>
+            </a:pPr>
+            <a:r>
+              <a:rPr lang="en-US" sz="1500" b="1" dirty="0">
                 <a:solidFill>
                   <a:schemeClr val="accent3"/>
                 </a:solidFill>
-                <a:latin typeface="Courier New" pitchFamily="34" charset="0"/>
-                <a:ea typeface="Courier New" pitchFamily="34" charset="-122"/>
-                <a:cs typeface="Courier New" pitchFamily="34" charset="-120"/>
-              </a:rPr>
-              <a:t>python app.py  →  http://localhost:8002</a:t>
-            </a:r>
-            <a:endParaRPr lang="en-US" sz="1400" dirty="0"/>
+              </a:rPr>
+              <a:t>Impact  </a:t>
+            </a:r>
+            <a:pPr indent="0" marL="0">
+              <a:buNone/>
+            </a:pPr>
+            <a:r>
+              <a:rPr lang="en-US" sz="1500" dirty="0">
+                <a:solidFill>
+                  <a:schemeClr val="tx1"/>
+                </a:solidFill>
+              </a:rPr>
+              <a:t>~10% lower bills from operational levers (demo estimate)  ·  ~95 t CO2/yr avoided by levers, ~456 t/yr by rooftop solar  ·  Students see their building's footprint and compete to cut it</a:t>
+            </a:r>
+            <a:endParaRPr lang="en-US" sz="1500" dirty="0"/>
           </a:p>
         </p:txBody>
       </p:sp>
